--- a/docs/tema2/diapositivas/seguridad-red.pptx
+++ b/docs/tema2/diapositivas/seguridad-red.pptx
@@ -4,9 +4,6 @@
   <p:sldMasterIdLst>
     <p:sldMasterId id="2147483648" r:id="rId1"/>
   </p:sldMasterIdLst>
-  <p:notesMasterIdLst>
-    <p:notesMasterId r:id="rId13"/>
-  </p:notesMasterIdLst>
   <p:sldIdLst>
     <p:sldId id="256" r:id="rId2"/>
     <p:sldId id="257" r:id="rId3"/>
@@ -20,6 +17,9 @@
     <p:sldId id="265" r:id="rId11"/>
     <p:sldId id="266" r:id="rId12"/>
   </p:sldIdLst>
+  <p:notesMasterIdLst>
+    <p:notesMasterId r:id="rId13"/>
+  </p:notesMasterIdLst>
   <p:sldSz cx="12192000" cy="6858000"/>
   <p:notesSz cx="6858000" cy="12192000"/>
   <p:defaultTextStyle>
@@ -114,11 +114,6 @@
       </a:defRPr>
     </a:lvl9pPr>
   </p:defaultTextStyle>
-  <p:extLst>
-    <p:ext uri="{EFAFB233-063F-42B5-8137-9DF3F51BA10A}">
-      <p15:sldGuideLst xmlns:p15="http://schemas.microsoft.com/office/powerpoint/2012/main"/>
-    </p:ext>
-  </p:extLst>
 </p:presentation>
 </file>
 
@@ -144,10 +139,234 @@
           <a:chExt cx="0" cy="0"/>
         </a:xfrm>
       </p:grpSpPr>
+      <p:sp>
+        <p:nvSpPr>
+          <p:cNvPr id="2" name="Header Placeholder 1"/>
+          <p:cNvSpPr>
+            <a:spLocks noGrp="1"/>
+          </p:cNvSpPr>
+          <p:nvPr>
+            <p:ph type="hdr" sz="quarter"/>
+          </p:nvPr>
+        </p:nvSpPr>
+        <p:spPr>
+          <a:xfrm>
+            <a:off x="0" y="0"/>
+            <a:ext cx="2971800" cy="458788"/>
+          </a:xfrm>
+          <a:prstGeom prst="rect">
+            <a:avLst/>
+          </a:prstGeom>
+        </p:spPr>
+        <p:txBody>
+          <a:bodyPr vert="horz" lIns="91440" tIns="45720" rIns="91440" bIns="45720" rtlCol="0"/>
+          <a:lstStyle>
+            <a:lvl1pPr algn="l">
+              <a:defRPr sz="1200"/>
+            </a:lvl1pPr>
+          </a:lstStyle>
+          <a:p>
+            <a:endParaRPr lang="en-US"/>
+          </a:p>
+        </p:txBody>
+      </p:sp>
+      <p:sp>
+        <p:nvSpPr>
+          <p:cNvPr id="3" name="Date Placeholder 2"/>
+          <p:cNvSpPr>
+            <a:spLocks noGrp="1"/>
+          </p:cNvSpPr>
+          <p:nvPr>
+            <p:ph type="dt" idx="1"/>
+          </p:nvPr>
+        </p:nvSpPr>
+        <p:spPr>
+          <a:xfrm>
+            <a:off x="3884613" y="0"/>
+            <a:ext cx="2971800" cy="458788"/>
+          </a:xfrm>
+          <a:prstGeom prst="rect">
+            <a:avLst/>
+          </a:prstGeom>
+        </p:spPr>
+        <p:txBody>
+          <a:bodyPr vert="horz" lIns="91440" tIns="45720" rIns="91440" bIns="45720" rtlCol="0"/>
+          <a:lstStyle>
+            <a:lvl1pPr algn="r">
+              <a:defRPr sz="1200"/>
+            </a:lvl1pPr>
+          </a:lstStyle>
+          <a:p>
+            <a:fld id="{5282F153-3F37-0F45-9E97-73ACFA13230C}" type="datetimeFigureOut">
+              <a:rPr lang="en-US"/>
+              <a:t>7/23/19</a:t>
+            </a:fld>
+            <a:endParaRPr lang="en-US"/>
+          </a:p>
+        </p:txBody>
+      </p:sp>
+      <p:sp>
+        <p:nvSpPr>
+          <p:cNvPr id="4" name="Slide Image Placeholder 3"/>
+          <p:cNvSpPr>
+            <a:spLocks noGrp="1" noRot="1" noChangeAspect="1"/>
+          </p:cNvSpPr>
+          <p:nvPr>
+            <p:ph type="sldImg" idx="2"/>
+          </p:nvPr>
+        </p:nvSpPr>
+        <p:spPr>
+          <a:xfrm>
+            <a:off x="685800" y="1143000"/>
+            <a:ext cx="5486400" cy="3086100"/>
+          </a:xfrm>
+          <a:prstGeom prst="rect">
+            <a:avLst/>
+          </a:prstGeom>
+          <a:noFill/>
+          <a:ln w="12700">
+            <a:solidFill>
+              <a:prstClr val="black"/>
+            </a:solidFill>
+          </a:ln>
+        </p:spPr>
+        <p:txBody>
+          <a:bodyPr vert="horz" lIns="91440" tIns="45720" rIns="91440" bIns="45720" rtlCol="0" anchor="ctr"/>
+          <a:lstStyle/>
+          <a:p>
+            <a:endParaRPr lang="en-US"/>
+          </a:p>
+        </p:txBody>
+      </p:sp>
+      <p:sp>
+        <p:nvSpPr>
+          <p:cNvPr id="5" name="Notes Placeholder 4"/>
+          <p:cNvSpPr>
+            <a:spLocks noGrp="1"/>
+          </p:cNvSpPr>
+          <p:nvPr>
+            <p:ph type="body" sz="quarter" idx="3"/>
+          </p:nvPr>
+        </p:nvSpPr>
+        <p:spPr>
+          <a:xfrm>
+            <a:off x="685800" y="4400550"/>
+            <a:ext cx="5486400" cy="3600450"/>
+          </a:xfrm>
+          <a:prstGeom prst="rect">
+            <a:avLst/>
+          </a:prstGeom>
+        </p:spPr>
+        <p:txBody>
+          <a:bodyPr vert="horz" lIns="91440" tIns="45720" rIns="91440" bIns="45720" rtlCol="0"/>
+          <a:lstStyle/>
+          <a:p>
+            <a:pPr lvl="0"/>
+            <a:r>
+              <a:rPr lang="en-US"/>
+              <a:t>Click to edit Master text styles</a:t>
+            </a:r>
+          </a:p>
+          <a:p>
+            <a:pPr lvl="1"/>
+            <a:r>
+              <a:rPr lang="en-US"/>
+              <a:t>Second level</a:t>
+            </a:r>
+          </a:p>
+          <a:p>
+            <a:pPr lvl="2"/>
+            <a:r>
+              <a:rPr lang="en-US"/>
+              <a:t>Third level</a:t>
+            </a:r>
+          </a:p>
+          <a:p>
+            <a:pPr lvl="3"/>
+            <a:r>
+              <a:rPr lang="en-US"/>
+              <a:t>Fourth level</a:t>
+            </a:r>
+          </a:p>
+          <a:p>
+            <a:pPr lvl="4"/>
+            <a:r>
+              <a:rPr lang="en-US"/>
+              <a:t>Fifth level</a:t>
+            </a:r>
+          </a:p>
+        </p:txBody>
+      </p:sp>
+      <p:sp>
+        <p:nvSpPr>
+          <p:cNvPr id="6" name="Footer Placeholder 5"/>
+          <p:cNvSpPr>
+            <a:spLocks noGrp="1"/>
+          </p:cNvSpPr>
+          <p:nvPr>
+            <p:ph type="ftr" sz="quarter" idx="4"/>
+          </p:nvPr>
+        </p:nvSpPr>
+        <p:spPr>
+          <a:xfrm>
+            <a:off x="0" y="8685213"/>
+            <a:ext cx="2971800" cy="458787"/>
+          </a:xfrm>
+          <a:prstGeom prst="rect">
+            <a:avLst/>
+          </a:prstGeom>
+        </p:spPr>
+        <p:txBody>
+          <a:bodyPr vert="horz" lIns="91440" tIns="45720" rIns="91440" bIns="45720" rtlCol="0" anchor="b"/>
+          <a:lstStyle>
+            <a:lvl1pPr algn="l">
+              <a:defRPr sz="1200"/>
+            </a:lvl1pPr>
+          </a:lstStyle>
+          <a:p>
+            <a:endParaRPr lang="en-US"/>
+          </a:p>
+        </p:txBody>
+      </p:sp>
+      <p:sp>
+        <p:nvSpPr>
+          <p:cNvPr id="7" name="Slide Number Placeholder 6"/>
+          <p:cNvSpPr>
+            <a:spLocks noGrp="1"/>
+          </p:cNvSpPr>
+          <p:nvPr>
+            <p:ph type="sldNum" sz="quarter" idx="5"/>
+          </p:nvPr>
+        </p:nvSpPr>
+        <p:spPr>
+          <a:xfrm>
+            <a:off x="3884613" y="8685213"/>
+            <a:ext cx="2971800" cy="458787"/>
+          </a:xfrm>
+          <a:prstGeom prst="rect">
+            <a:avLst/>
+          </a:prstGeom>
+        </p:spPr>
+        <p:txBody>
+          <a:bodyPr vert="horz" lIns="91440" tIns="45720" rIns="91440" bIns="45720" rtlCol="0" anchor="b"/>
+          <a:lstStyle>
+            <a:lvl1pPr algn="r">
+              <a:defRPr sz="1200"/>
+            </a:lvl1pPr>
+          </a:lstStyle>
+          <a:p>
+            <a:fld id="{CE5E9CC1-C706-0F49-92D6-E571CC5EEA8F}" type="slidenum">
+              <a:rPr lang="en-US"/>
+              <a:t>‹#›</a:t>
+            </a:fld>
+            <a:endParaRPr lang="en-US"/>
+          </a:p>
+        </p:txBody>
+      </p:sp>
     </p:spTree>
     <p:extLst>
       <p:ext uri="{BB962C8B-B14F-4D97-AF65-F5344CB8AC3E}">
-        <p14:creationId xmlns:p14="http://schemas.microsoft.com/office/powerpoint/2010/main" val="3942910614"/>
+        <p14:creationId xmlns:p14="http://schemas.microsoft.com/office/powerpoint/2010/main" val="1024086991"/>
       </p:ext>
     </p:extLst>
   </p:cSld>
@@ -291,6 +510,10 @@
           <a:bodyPr/>
           <a:lstStyle/>
           <a:p>
+            <a:r>
+              <a:rPr lang="en-US" dirty="0"/>
+              <a:t/>
+            </a:r>
             <a:endParaRPr lang="en-US" dirty="0"/>
           </a:p>
         </p:txBody>
@@ -375,6 +598,10 @@
           <a:bodyPr/>
           <a:lstStyle/>
           <a:p>
+            <a:r>
+              <a:rPr lang="en-US" dirty="0"/>
+              <a:t/>
+            </a:r>
             <a:endParaRPr lang="en-US" dirty="0"/>
           </a:p>
         </p:txBody>
@@ -459,6 +686,10 @@
           <a:bodyPr/>
           <a:lstStyle/>
           <a:p>
+            <a:r>
+              <a:rPr lang="en-US" dirty="0"/>
+              <a:t/>
+            </a:r>
             <a:endParaRPr lang="en-US" dirty="0"/>
           </a:p>
         </p:txBody>
@@ -543,6 +774,10 @@
           <a:bodyPr/>
           <a:lstStyle/>
           <a:p>
+            <a:r>
+              <a:rPr lang="en-US" dirty="0"/>
+              <a:t/>
+            </a:r>
             <a:endParaRPr lang="en-US" dirty="0"/>
           </a:p>
         </p:txBody>
@@ -627,6 +862,10 @@
           <a:bodyPr/>
           <a:lstStyle/>
           <a:p>
+            <a:r>
+              <a:rPr lang="en-US" dirty="0"/>
+              <a:t/>
+            </a:r>
             <a:endParaRPr lang="en-US" dirty="0"/>
           </a:p>
         </p:txBody>
@@ -711,6 +950,10 @@
           <a:bodyPr/>
           <a:lstStyle/>
           <a:p>
+            <a:r>
+              <a:rPr lang="en-US" dirty="0"/>
+              <a:t/>
+            </a:r>
             <a:endParaRPr lang="en-US" dirty="0"/>
           </a:p>
         </p:txBody>
@@ -795,6 +1038,10 @@
           <a:bodyPr/>
           <a:lstStyle/>
           <a:p>
+            <a:r>
+              <a:rPr lang="en-US" dirty="0"/>
+              <a:t/>
+            </a:r>
             <a:endParaRPr lang="en-US" dirty="0"/>
           </a:p>
         </p:txBody>
@@ -879,6 +1126,10 @@
           <a:bodyPr/>
           <a:lstStyle/>
           <a:p>
+            <a:r>
+              <a:rPr lang="en-US" dirty="0"/>
+              <a:t/>
+            </a:r>
             <a:endParaRPr lang="en-US" dirty="0"/>
           </a:p>
         </p:txBody>
@@ -963,6 +1214,10 @@
           <a:bodyPr/>
           <a:lstStyle/>
           <a:p>
+            <a:r>
+              <a:rPr lang="en-US" dirty="0"/>
+              <a:t/>
+            </a:r>
             <a:endParaRPr lang="en-US" dirty="0"/>
           </a:p>
         </p:txBody>
@@ -1047,6 +1302,10 @@
           <a:bodyPr/>
           <a:lstStyle/>
           <a:p>
+            <a:r>
+              <a:rPr lang="en-US" dirty="0"/>
+              <a:t/>
+            </a:r>
             <a:endParaRPr lang="en-US" dirty="0"/>
           </a:p>
         </p:txBody>
@@ -1131,6 +1390,10 @@
           <a:bodyPr/>
           <a:lstStyle/>
           <a:p>
+            <a:r>
+              <a:rPr lang="en-US" dirty="0"/>
+              <a:t/>
+            </a:r>
             <a:endParaRPr lang="en-US" dirty="0"/>
           </a:p>
         </p:txBody>
@@ -1204,11 +1467,6 @@
 <file path=ppt/slideMasters/slideMaster1.xml><?xml version="1.0" encoding="utf-8"?>
 <p:sldMaster xmlns:a="http://schemas.openxmlformats.org/drawingml/2006/main" xmlns:r="http://schemas.openxmlformats.org/officeDocument/2006/relationships" xmlns:p="http://schemas.openxmlformats.org/presentationml/2006/main">
   <p:cSld>
-    <p:bg>
-      <p:bgRef idx="1001">
-        <a:schemeClr val="bg1"/>
-      </p:bgRef>
-    </p:bg>
     <p:spTree>
       <p:nvGrpSpPr>
         <p:cNvPr id="1" name=""/>
@@ -1491,7 +1749,6 @@
         <a:solidFill>
           <a:srgbClr val="1A237E"/>
         </a:solidFill>
-        <a:effectLst/>
       </p:bgPr>
     </p:bg>
     <p:spTree>
@@ -1529,7 +1786,7 @@
           <a:bodyPr wrap="square" rtlCol="0" anchor="ctr"/>
           <a:lstStyle/>
           <a:p>
-            <a:pPr marL="0" indent="0">
+            <a:pPr indent="0" marL="0">
               <a:buNone/>
             </a:pPr>
             <a:r>
@@ -1568,11 +1825,11 @@
           <a:bodyPr wrap="square" rtlCol="0" anchor="ctr"/>
           <a:lstStyle/>
           <a:p>
-            <a:pPr marL="0" indent="0" algn="l">
+            <a:pPr algn="l" indent="0" marL="0">
               <a:buNone/>
             </a:pPr>
             <a:r>
-              <a:rPr lang="en-US" sz="3800" b="1" dirty="0">
+              <a:rPr lang="en-US" sz="4000" b="1" dirty="0">
                 <a:solidFill>
                   <a:srgbClr val="FFFFFF"/>
                 </a:solidFill>
@@ -1582,7 +1839,7 @@
               </a:rPr>
               <a:t>Seguridad de red</a:t>
             </a:r>
-            <a:endParaRPr lang="en-US" sz="3800" dirty="0"/>
+            <a:endParaRPr lang="en-US" sz="4000" dirty="0"/>
           </a:p>
         </p:txBody>
       </p:sp>
@@ -1610,13 +1867,6 @@
             <a:prstDash val="solid"/>
           </a:ln>
         </p:spPr>
-        <p:txBody>
-          <a:bodyPr/>
-          <a:lstStyle/>
-          <a:p>
-            <a:endParaRPr lang="es-ES"/>
-          </a:p>
-        </p:txBody>
       </p:sp>
       <p:sp>
         <p:nvSpPr>
@@ -1639,11 +1889,11 @@
           <a:bodyPr wrap="square" rtlCol="0" anchor="ctr"/>
           <a:lstStyle/>
           <a:p>
-            <a:pPr marL="0" indent="0">
+            <a:pPr indent="0" marL="0">
               <a:buNone/>
             </a:pPr>
             <a:r>
-              <a:rPr lang="en-US" sz="1900" i="1" dirty="0">
+              <a:rPr lang="en-US" sz="2000" i="1" dirty="0">
                 <a:solidFill>
                   <a:srgbClr val="FFFFFF"/>
                 </a:solidFill>
@@ -1653,7 +1903,7 @@
               </a:rPr>
               <a:t>Tema 2 — Redes virtuales y servicios de cómputo</a:t>
             </a:r>
-            <a:endParaRPr lang="en-US" sz="1900" dirty="0"/>
+            <a:endParaRPr lang="en-US" sz="2000" dirty="0"/>
           </a:p>
         </p:txBody>
       </p:sp>
@@ -1706,13 +1956,6 @@
             <a:prstDash val="solid"/>
           </a:ln>
         </p:spPr>
-        <p:txBody>
-          <a:bodyPr/>
-          <a:lstStyle/>
-          <a:p>
-            <a:endParaRPr lang="es-ES"/>
-          </a:p>
-        </p:txBody>
       </p:sp>
       <p:sp>
         <p:nvSpPr>
@@ -1735,7 +1978,7 @@
           <a:bodyPr wrap="square" rtlCol="0" anchor="ctr"/>
           <a:lstStyle/>
           <a:p>
-            <a:pPr marL="0" indent="0">
+            <a:pPr indent="0" marL="0">
               <a:buNone/>
             </a:pPr>
             <a:r>
@@ -1747,7 +1990,7 @@
                 <a:ea typeface="Arial" pitchFamily="34" charset="-122"/>
                 <a:cs typeface="Arial" pitchFamily="34" charset="-120"/>
               </a:rPr>
-              <a:t>El patrón bastión, que ya usaste sin saberlo</a:t>
+              <a:t>El patrón bastión, ya lo has usado</a:t>
             </a:r>
             <a:endParaRPr lang="en-US" sz="2400" dirty="0"/>
           </a:p>
@@ -1774,7 +2017,7 @@
           <a:bodyPr wrap="square" rtlCol="0" anchor="ctr"/>
           <a:lstStyle/>
           <a:p>
-            <a:pPr marL="0" indent="0" algn="r">
+            <a:pPr algn="r" indent="0" marL="0">
               <a:buNone/>
             </a:pPr>
             <a:r>
@@ -1794,14 +2037,39 @@
       </p:sp>
       <p:sp>
         <p:nvSpPr>
-          <p:cNvPr id="5" name="Text 3"/>
-          <p:cNvSpPr/>
-          <p:nvPr/>
-        </p:nvSpPr>
-        <p:spPr>
-          <a:xfrm>
-            <a:off x="548640" y="1188720"/>
-            <a:ext cx="2969001" cy="1463040"/>
+          <p:cNvPr id="5" name="Shape 3"/>
+          <p:cNvSpPr/>
+          <p:nvPr/>
+        </p:nvSpPr>
+        <p:spPr>
+          <a:xfrm>
+            <a:off x="548640" y="1143000"/>
+            <a:ext cx="11091672" cy="1051560"/>
+          </a:xfrm>
+          <a:prstGeom prst="roundRect">
+            <a:avLst/>
+          </a:prstGeom>
+          <a:solidFill>
+            <a:srgbClr val="FFF8E1"/>
+          </a:solidFill>
+          <a:ln w="19050">
+            <a:solidFill>
+              <a:srgbClr val="FFA000"/>
+            </a:solidFill>
+            <a:prstDash val="solid"/>
+          </a:ln>
+        </p:spPr>
+      </p:sp>
+      <p:sp>
+        <p:nvSpPr>
+          <p:cNvPr id="6" name="Text 4"/>
+          <p:cNvSpPr/>
+          <p:nvPr/>
+        </p:nvSpPr>
+        <p:spPr>
+          <a:xfrm>
+            <a:off x="822960" y="1234440"/>
+            <a:ext cx="10543032" cy="868680"/>
           </a:xfrm>
           <a:prstGeom prst="rect">
             <a:avLst/>
@@ -1810,14 +2078,14 @@
           <a:ln/>
         </p:spPr>
         <p:txBody>
-          <a:bodyPr wrap="square" rtlCol="0" anchor="t"/>
-          <a:lstStyle/>
-          <a:p>
-            <a:pPr marL="0" indent="0">
+          <a:bodyPr wrap="square" rtlCol="0" anchor="ctr"/>
+          <a:lstStyle/>
+          <a:p>
+            <a:pPr indent="0" marL="0">
               <a:buNone/>
             </a:pPr>
             <a:r>
-              <a:rPr lang="en-US" sz="1900" dirty="0">
+              <a:rPr lang="en-US" sz="1500" dirty="0">
                 <a:solidFill>
                   <a:srgbClr val="212121"/>
                 </a:solidFill>
@@ -1825,36 +2093,118 @@
                 <a:ea typeface="Arial" pitchFamily="34" charset="-122"/>
                 <a:cs typeface="Arial" pitchFamily="34" charset="-120"/>
               </a:rPr>
-              <a:t>En la Actividad 2.1 saltaste por SSH desde tu instancia pública hasta la privada, sin que la privada tuviera nunca IP pública ni una regla abierta a internet. Esa instancia de salto intermedia se llama bastión (bastion host): un único punto de entrada por SSH hacia toda la red privada.</a:t>
-            </a:r>
-            <a:endParaRPr lang="en-US" sz="1900" dirty="0"/>
+              <a:t>Restringir el SG de SSH a tu IP es una línea, y la aplicarás en la 2.2. Pero en la 2.1 ya saltaste por SSH desde tu instancia pública hasta la privada, sin que esta tuviera nunca IP pública ni una regla abierta a internet.</a:t>
+            </a:r>
+            <a:endParaRPr lang="en-US" sz="1500" dirty="0"/>
           </a:p>
         </p:txBody>
       </p:sp>
       <p:pic>
         <p:nvPicPr>
-          <p:cNvPr id="6" name="Image 0" descr="C:/Users/Aitor/Documents/apuntes-profe/introduccion-nube/docs/tema2/img/diagrama_bastion.png"/>
+          <p:cNvPr id="7" name="Image 0" descr="C:/Users/Aitor/Documents/apuntes-profe/introduccion-nube/docs/tema2/img/diagrama_bastion.png">    </p:cNvPr>
           <p:cNvPicPr>
             <a:picLocks noChangeAspect="1"/>
           </p:cNvPicPr>
           <p:nvPr/>
         </p:nvPicPr>
         <p:blipFill>
-          <a:blip r:embed="rId3"/>
+          <a:blip r:embed="rId1"/>
           <a:stretch>
             <a:fillRect/>
           </a:stretch>
         </p:blipFill>
         <p:spPr>
           <a:xfrm>
-            <a:off x="4242348" y="1136406"/>
-            <a:ext cx="7467569" cy="4978379"/>
+            <a:off x="4105656" y="2331720"/>
+            <a:ext cx="3977640" cy="2651760"/>
           </a:xfrm>
           <a:prstGeom prst="rect">
             <a:avLst/>
           </a:prstGeom>
         </p:spPr>
       </p:pic>
+      <p:sp>
+        <p:nvSpPr>
+          <p:cNvPr id="8" name="Shape 5"/>
+          <p:cNvSpPr/>
+          <p:nvPr/>
+        </p:nvSpPr>
+        <p:spPr>
+          <a:xfrm>
+            <a:off x="548640" y="5166360"/>
+            <a:ext cx="11091672" cy="1143000"/>
+          </a:xfrm>
+          <a:prstGeom prst="roundRect">
+            <a:avLst/>
+          </a:prstGeom>
+          <a:solidFill>
+            <a:srgbClr val="FFF8E1"/>
+          </a:solidFill>
+          <a:ln w="28575">
+            <a:solidFill>
+              <a:srgbClr val="FFA000"/>
+            </a:solidFill>
+            <a:prstDash val="solid"/>
+          </a:ln>
+        </p:spPr>
+      </p:sp>
+      <p:sp>
+        <p:nvSpPr>
+          <p:cNvPr id="9" name="Text 6"/>
+          <p:cNvSpPr/>
+          <p:nvPr/>
+        </p:nvSpPr>
+        <p:spPr>
+          <a:xfrm>
+            <a:off x="822960" y="5276088"/>
+            <a:ext cx="10543032" cy="923544"/>
+          </a:xfrm>
+          <a:prstGeom prst="rect">
+            <a:avLst/>
+          </a:prstGeom>
+          <a:noFill/>
+          <a:ln/>
+        </p:spPr>
+        <p:txBody>
+          <a:bodyPr wrap="square" rtlCol="0" anchor="t"/>
+          <a:lstStyle/>
+          <a:p>
+            <a:pPr indent="0" marL="0">
+              <a:buNone/>
+            </a:pPr>
+            <a:r>
+              <a:rPr lang="en-US" sz="1600" b="1" dirty="0">
+                <a:solidFill>
+                  <a:srgbClr val="1A237E"/>
+                </a:solidFill>
+                <a:latin typeface="Arial" pitchFamily="34" charset="0"/>
+                <a:ea typeface="Arial" pitchFamily="34" charset="-122"/>
+                <a:cs typeface="Arial" pitchFamily="34" charset="-120"/>
+              </a:rPr>
+              <a:t>Esa instancia de salto se llama bastión (bastion host)
+</a:t>
+            </a:r>
+            <a:endParaRPr lang="en-US" sz="1600" dirty="0"/>
+          </a:p>
+          <a:p>
+            <a:pPr indent="0" marL="0">
+              <a:buNone/>
+            </a:pPr>
+            <a:r>
+              <a:rPr lang="en-US" sz="1500" dirty="0">
+                <a:solidFill>
+                  <a:srgbClr val="212121"/>
+                </a:solidFill>
+                <a:latin typeface="Arial" pitchFamily="34" charset="0"/>
+                <a:ea typeface="Arial" pitchFamily="34" charset="-122"/>
+                <a:cs typeface="Arial" pitchFamily="34" charset="-120"/>
+              </a:rPr>
+              <a:t>Es exactamente el patrón que acabas de usar, y lo formalizarás y reutilizarás en arquitecturas completas más adelante en el módulo.</a:t>
+            </a:r>
+            <a:endParaRPr lang="en-US" sz="1600" dirty="0"/>
+          </a:p>
+        </p:txBody>
+      </p:sp>
     </p:spTree>
   </p:cSld>
   <p:clrMapOvr>
@@ -1904,13 +2254,6 @@
             <a:prstDash val="solid"/>
           </a:ln>
         </p:spPr>
-        <p:txBody>
-          <a:bodyPr/>
-          <a:lstStyle/>
-          <a:p>
-            <a:endParaRPr lang="es-ES"/>
-          </a:p>
-        </p:txBody>
       </p:sp>
       <p:sp>
         <p:nvSpPr>
@@ -1933,7 +2276,7 @@
           <a:bodyPr wrap="square" rtlCol="0" anchor="ctr"/>
           <a:lstStyle/>
           <a:p>
-            <a:pPr marL="0" indent="0">
+            <a:pPr indent="0" marL="0">
               <a:buNone/>
             </a:pPr>
             <a:r>
@@ -1972,7 +2315,7 @@
           <a:bodyPr wrap="square" rtlCol="0" anchor="ctr"/>
           <a:lstStyle/>
           <a:p>
-            <a:pPr marL="0" indent="0" algn="r">
+            <a:pPr algn="r" indent="0" marL="0">
               <a:buNone/>
             </a:pPr>
             <a:r>
@@ -1992,14 +2335,64 @@
       </p:sp>
       <p:sp>
         <p:nvSpPr>
-          <p:cNvPr id="5" name="Text 3"/>
-          <p:cNvSpPr/>
-          <p:nvPr/>
-        </p:nvSpPr>
-        <p:spPr>
-          <a:xfrm>
-            <a:off x="548640" y="1463040"/>
-            <a:ext cx="11091672" cy="4023360"/>
+          <p:cNvPr id="5" name="Shape 3"/>
+          <p:cNvSpPr/>
+          <p:nvPr/>
+        </p:nvSpPr>
+        <p:spPr>
+          <a:xfrm>
+            <a:off x="548640" y="1371600"/>
+            <a:ext cx="5408676" cy="1463040"/>
+          </a:xfrm>
+          <a:prstGeom prst="roundRect">
+            <a:avLst/>
+          </a:prstGeom>
+          <a:solidFill>
+            <a:srgbClr val="E8EAF6"/>
+          </a:solidFill>
+          <a:ln w="15875">
+            <a:solidFill>
+              <a:srgbClr val="3949AB"/>
+            </a:solidFill>
+            <a:prstDash val="solid"/>
+          </a:ln>
+        </p:spPr>
+      </p:sp>
+      <p:sp>
+        <p:nvSpPr>
+          <p:cNvPr id="6" name="Shape 4"/>
+          <p:cNvSpPr/>
+          <p:nvPr/>
+        </p:nvSpPr>
+        <p:spPr>
+          <a:xfrm>
+            <a:off x="731520" y="1783080"/>
+            <a:ext cx="640080" cy="640080"/>
+          </a:xfrm>
+          <a:prstGeom prst="ellipse">
+            <a:avLst/>
+          </a:prstGeom>
+          <a:solidFill>
+            <a:srgbClr val="3949AB"/>
+          </a:solidFill>
+          <a:ln w="12700">
+            <a:solidFill>
+              <a:srgbClr val="3949AB"/>
+            </a:solidFill>
+            <a:prstDash val="solid"/>
+          </a:ln>
+        </p:spPr>
+      </p:sp>
+      <p:sp>
+        <p:nvSpPr>
+          <p:cNvPr id="7" name="Text 5"/>
+          <p:cNvSpPr/>
+          <p:nvPr/>
+        </p:nvSpPr>
+        <p:spPr>
+          <a:xfrm>
+            <a:off x="731520" y="1783080"/>
+            <a:ext cx="640080" cy="640080"/>
           </a:xfrm>
           <a:prstGeom prst="rect">
             <a:avLst/>
@@ -2008,18 +2401,53 @@
           <a:ln/>
         </p:spPr>
         <p:txBody>
-          <a:bodyPr wrap="square" rtlCol="0" anchor="t"/>
-          <a:lstStyle/>
-          <a:p>
-            <a:pPr marL="190500" indent="-190500">
-              <a:spcAft>
-                <a:spcPts val="2000"/>
-              </a:spcAft>
-              <a:buSzPct val="100000"/>
-              <a:buChar char="•"/>
+          <a:bodyPr wrap="square" rtlCol="0" anchor="ctr"/>
+          <a:lstStyle/>
+          <a:p>
+            <a:pPr algn="ctr" indent="0" marL="0">
+              <a:buNone/>
             </a:pPr>
             <a:r>
-              <a:rPr lang="en-US" sz="2000" dirty="0">
+              <a:rPr lang="en-US" sz="2000" b="1" dirty="0">
+                <a:solidFill>
+                  <a:srgbClr val="FFFFFF"/>
+                </a:solidFill>
+                <a:latin typeface="Arial" pitchFamily="34" charset="0"/>
+                <a:ea typeface="Arial" pitchFamily="34" charset="-122"/>
+                <a:cs typeface="Arial" pitchFamily="34" charset="-120"/>
+              </a:rPr>
+              <a:t>1</a:t>
+            </a:r>
+            <a:endParaRPr lang="en-US" sz="2000" dirty="0"/>
+          </a:p>
+        </p:txBody>
+      </p:sp>
+      <p:sp>
+        <p:nvSpPr>
+          <p:cNvPr id="8" name="Text 6"/>
+          <p:cNvSpPr/>
+          <p:nvPr/>
+        </p:nvSpPr>
+        <p:spPr>
+          <a:xfrm>
+            <a:off x="1508760" y="1371600"/>
+            <a:ext cx="4265676" cy="1463040"/>
+          </a:xfrm>
+          <a:prstGeom prst="rect">
+            <a:avLst/>
+          </a:prstGeom>
+          <a:noFill/>
+          <a:ln/>
+        </p:spPr>
+        <p:txBody>
+          <a:bodyPr wrap="square" rtlCol="0" anchor="ctr"/>
+          <a:lstStyle/>
+          <a:p>
+            <a:pPr indent="0" marL="0">
+              <a:buNone/>
+            </a:pPr>
+            <a:r>
+              <a:rPr lang="en-US" sz="1600" dirty="0">
                 <a:solidFill>
                   <a:srgbClr val="212121"/>
                 </a:solidFill>
@@ -2027,20 +2455,127 @@
                 <a:ea typeface="Arial" pitchFamily="34" charset="-122"/>
                 <a:cs typeface="Arial" pitchFamily="34" charset="-120"/>
               </a:rPr>
-              <a:t>Grupo de seguridad = filtro con estado, a nivel de instancia; NACL = filtro sin estado, a nivel de subred. Las dos capas se evalúan siempre.</a:t>
+              <a:t>Grupo de seguridad = filtro con estado a nivel de instancia; NACL = filtro sin estado a nivel de subred. Las dos se evalúan siempre.</a:t>
+            </a:r>
+            <a:endParaRPr lang="en-US" sz="1600" dirty="0"/>
+          </a:p>
+        </p:txBody>
+      </p:sp>
+      <p:sp>
+        <p:nvSpPr>
+          <p:cNvPr id="9" name="Shape 7"/>
+          <p:cNvSpPr/>
+          <p:nvPr/>
+        </p:nvSpPr>
+        <p:spPr>
+          <a:xfrm>
+            <a:off x="6231636" y="1371600"/>
+            <a:ext cx="5408676" cy="1463040"/>
+          </a:xfrm>
+          <a:prstGeom prst="roundRect">
+            <a:avLst/>
+          </a:prstGeom>
+          <a:solidFill>
+            <a:srgbClr val="E8EAF6"/>
+          </a:solidFill>
+          <a:ln w="15875">
+            <a:solidFill>
+              <a:srgbClr val="3949AB"/>
+            </a:solidFill>
+            <a:prstDash val="solid"/>
+          </a:ln>
+        </p:spPr>
+      </p:sp>
+      <p:sp>
+        <p:nvSpPr>
+          <p:cNvPr id="10" name="Shape 8"/>
+          <p:cNvSpPr/>
+          <p:nvPr/>
+        </p:nvSpPr>
+        <p:spPr>
+          <a:xfrm>
+            <a:off x="6414516" y="1783080"/>
+            <a:ext cx="640080" cy="640080"/>
+          </a:xfrm>
+          <a:prstGeom prst="ellipse">
+            <a:avLst/>
+          </a:prstGeom>
+          <a:solidFill>
+            <a:srgbClr val="3949AB"/>
+          </a:solidFill>
+          <a:ln w="12700">
+            <a:solidFill>
+              <a:srgbClr val="3949AB"/>
+            </a:solidFill>
+            <a:prstDash val="solid"/>
+          </a:ln>
+        </p:spPr>
+      </p:sp>
+      <p:sp>
+        <p:nvSpPr>
+          <p:cNvPr id="11" name="Text 9"/>
+          <p:cNvSpPr/>
+          <p:nvPr/>
+        </p:nvSpPr>
+        <p:spPr>
+          <a:xfrm>
+            <a:off x="6414516" y="1783080"/>
+            <a:ext cx="640080" cy="640080"/>
+          </a:xfrm>
+          <a:prstGeom prst="rect">
+            <a:avLst/>
+          </a:prstGeom>
+          <a:noFill/>
+          <a:ln/>
+        </p:spPr>
+        <p:txBody>
+          <a:bodyPr wrap="square" rtlCol="0" anchor="ctr"/>
+          <a:lstStyle/>
+          <a:p>
+            <a:pPr algn="ctr" indent="0" marL="0">
+              <a:buNone/>
+            </a:pPr>
+            <a:r>
+              <a:rPr lang="en-US" sz="2000" b="1" dirty="0">
+                <a:solidFill>
+                  <a:srgbClr val="FFFFFF"/>
+                </a:solidFill>
+                <a:latin typeface="Arial" pitchFamily="34" charset="0"/>
+                <a:ea typeface="Arial" pitchFamily="34" charset="-122"/>
+                <a:cs typeface="Arial" pitchFamily="34" charset="-120"/>
+              </a:rPr>
+              <a:t>2</a:t>
             </a:r>
             <a:endParaRPr lang="en-US" sz="2000" dirty="0"/>
           </a:p>
-          <a:p>
-            <a:pPr marL="190500" indent="-190500">
-              <a:spcAft>
-                <a:spcPts val="2000"/>
-              </a:spcAft>
-              <a:buSzPct val="100000"/>
-              <a:buChar char="•"/>
+        </p:txBody>
+      </p:sp>
+      <p:sp>
+        <p:nvSpPr>
+          <p:cNvPr id="12" name="Text 10"/>
+          <p:cNvSpPr/>
+          <p:nvPr/>
+        </p:nvSpPr>
+        <p:spPr>
+          <a:xfrm>
+            <a:off x="7191756" y="1371600"/>
+            <a:ext cx="4265676" cy="1463040"/>
+          </a:xfrm>
+          <a:prstGeom prst="rect">
+            <a:avLst/>
+          </a:prstGeom>
+          <a:noFill/>
+          <a:ln/>
+        </p:spPr>
+        <p:txBody>
+          <a:bodyPr wrap="square" rtlCol="0" anchor="ctr"/>
+          <a:lstStyle/>
+          <a:p>
+            <a:pPr indent="0" marL="0">
+              <a:buNone/>
             </a:pPr>
             <a:r>
-              <a:rPr lang="en-US" sz="2000" dirty="0">
+              <a:rPr lang="en-US" sz="1600" dirty="0">
                 <a:solidFill>
                   <a:srgbClr val="212121"/>
                 </a:solidFill>
@@ -2048,20 +2583,127 @@
                 <a:ea typeface="Arial" pitchFamily="34" charset="-122"/>
                 <a:cs typeface="Arial" pitchFamily="34" charset="-120"/>
               </a:rPr>
-              <a:t>Con estado: el grupo de seguridad recuerda la conexión y permite la respuesta automáticamente. Sin estado: la NACL exige entrada y salida por separado.</a:t>
+              <a:t>Con estado: el SG recuerda la conexión y permite la respuesta sola. Sin estado: la NACL exige entrada y salida por separado.</a:t>
+            </a:r>
+            <a:endParaRPr lang="en-US" sz="1600" dirty="0"/>
+          </a:p>
+        </p:txBody>
+      </p:sp>
+      <p:sp>
+        <p:nvSpPr>
+          <p:cNvPr id="13" name="Shape 11"/>
+          <p:cNvSpPr/>
+          <p:nvPr/>
+        </p:nvSpPr>
+        <p:spPr>
+          <a:xfrm>
+            <a:off x="548640" y="3108960"/>
+            <a:ext cx="5408676" cy="1463040"/>
+          </a:xfrm>
+          <a:prstGeom prst="roundRect">
+            <a:avLst/>
+          </a:prstGeom>
+          <a:solidFill>
+            <a:srgbClr val="E8EAF6"/>
+          </a:solidFill>
+          <a:ln w="15875">
+            <a:solidFill>
+              <a:srgbClr val="3949AB"/>
+            </a:solidFill>
+            <a:prstDash val="solid"/>
+          </a:ln>
+        </p:spPr>
+      </p:sp>
+      <p:sp>
+        <p:nvSpPr>
+          <p:cNvPr id="14" name="Shape 12"/>
+          <p:cNvSpPr/>
+          <p:nvPr/>
+        </p:nvSpPr>
+        <p:spPr>
+          <a:xfrm>
+            <a:off x="731520" y="3520440"/>
+            <a:ext cx="640080" cy="640080"/>
+          </a:xfrm>
+          <a:prstGeom prst="ellipse">
+            <a:avLst/>
+          </a:prstGeom>
+          <a:solidFill>
+            <a:srgbClr val="3949AB"/>
+          </a:solidFill>
+          <a:ln w="12700">
+            <a:solidFill>
+              <a:srgbClr val="3949AB"/>
+            </a:solidFill>
+            <a:prstDash val="solid"/>
+          </a:ln>
+        </p:spPr>
+      </p:sp>
+      <p:sp>
+        <p:nvSpPr>
+          <p:cNvPr id="15" name="Text 13"/>
+          <p:cNvSpPr/>
+          <p:nvPr/>
+        </p:nvSpPr>
+        <p:spPr>
+          <a:xfrm>
+            <a:off x="731520" y="3520440"/>
+            <a:ext cx="640080" cy="640080"/>
+          </a:xfrm>
+          <a:prstGeom prst="rect">
+            <a:avLst/>
+          </a:prstGeom>
+          <a:noFill/>
+          <a:ln/>
+        </p:spPr>
+        <p:txBody>
+          <a:bodyPr wrap="square" rtlCol="0" anchor="ctr"/>
+          <a:lstStyle/>
+          <a:p>
+            <a:pPr algn="ctr" indent="0" marL="0">
+              <a:buNone/>
+            </a:pPr>
+            <a:r>
+              <a:rPr lang="en-US" sz="2000" b="1" dirty="0">
+                <a:solidFill>
+                  <a:srgbClr val="FFFFFF"/>
+                </a:solidFill>
+                <a:latin typeface="Arial" pitchFamily="34" charset="0"/>
+                <a:ea typeface="Arial" pitchFamily="34" charset="-122"/>
+                <a:cs typeface="Arial" pitchFamily="34" charset="-120"/>
+              </a:rPr>
+              <a:t>3</a:t>
             </a:r>
             <a:endParaRPr lang="en-US" sz="2000" dirty="0"/>
           </a:p>
-          <a:p>
-            <a:pPr marL="190500" indent="-190500">
-              <a:spcAft>
-                <a:spcPts val="2000"/>
-              </a:spcAft>
-              <a:buSzPct val="100000"/>
-              <a:buChar char="•"/>
+        </p:txBody>
+      </p:sp>
+      <p:sp>
+        <p:nvSpPr>
+          <p:cNvPr id="16" name="Text 14"/>
+          <p:cNvSpPr/>
+          <p:nvPr/>
+        </p:nvSpPr>
+        <p:spPr>
+          <a:xfrm>
+            <a:off x="1508760" y="3108960"/>
+            <a:ext cx="4265676" cy="1463040"/>
+          </a:xfrm>
+          <a:prstGeom prst="rect">
+            <a:avLst/>
+          </a:prstGeom>
+          <a:noFill/>
+          <a:ln/>
+        </p:spPr>
+        <p:txBody>
+          <a:bodyPr wrap="square" rtlCol="0" anchor="ctr"/>
+          <a:lstStyle/>
+          <a:p>
+            <a:pPr indent="0" marL="0">
+              <a:buNone/>
             </a:pPr>
             <a:r>
-              <a:rPr lang="en-US" sz="2000" dirty="0">
+              <a:rPr lang="en-US" sz="1600" dirty="0">
                 <a:solidFill>
                   <a:srgbClr val="212121"/>
                 </a:solidFill>
@@ -2071,18 +2713,125 @@
               </a:rPr>
               <a:t>La pasarela NAT da salida a internet a las subredes privadas sin permitir entrada — y tiene coste por hora y por GB.</a:t>
             </a:r>
+            <a:endParaRPr lang="en-US" sz="1600" dirty="0"/>
+          </a:p>
+        </p:txBody>
+      </p:sp>
+      <p:sp>
+        <p:nvSpPr>
+          <p:cNvPr id="17" name="Shape 15"/>
+          <p:cNvSpPr/>
+          <p:nvPr/>
+        </p:nvSpPr>
+        <p:spPr>
+          <a:xfrm>
+            <a:off x="6231636" y="3108960"/>
+            <a:ext cx="5408676" cy="1463040"/>
+          </a:xfrm>
+          <a:prstGeom prst="roundRect">
+            <a:avLst/>
+          </a:prstGeom>
+          <a:solidFill>
+            <a:srgbClr val="E8EAF6"/>
+          </a:solidFill>
+          <a:ln w="15875">
+            <a:solidFill>
+              <a:srgbClr val="3949AB"/>
+            </a:solidFill>
+            <a:prstDash val="solid"/>
+          </a:ln>
+        </p:spPr>
+      </p:sp>
+      <p:sp>
+        <p:nvSpPr>
+          <p:cNvPr id="18" name="Shape 16"/>
+          <p:cNvSpPr/>
+          <p:nvPr/>
+        </p:nvSpPr>
+        <p:spPr>
+          <a:xfrm>
+            <a:off x="6414516" y="3520440"/>
+            <a:ext cx="640080" cy="640080"/>
+          </a:xfrm>
+          <a:prstGeom prst="ellipse">
+            <a:avLst/>
+          </a:prstGeom>
+          <a:solidFill>
+            <a:srgbClr val="3949AB"/>
+          </a:solidFill>
+          <a:ln w="12700">
+            <a:solidFill>
+              <a:srgbClr val="3949AB"/>
+            </a:solidFill>
+            <a:prstDash val="solid"/>
+          </a:ln>
+        </p:spPr>
+      </p:sp>
+      <p:sp>
+        <p:nvSpPr>
+          <p:cNvPr id="19" name="Text 17"/>
+          <p:cNvSpPr/>
+          <p:nvPr/>
+        </p:nvSpPr>
+        <p:spPr>
+          <a:xfrm>
+            <a:off x="6414516" y="3520440"/>
+            <a:ext cx="640080" cy="640080"/>
+          </a:xfrm>
+          <a:prstGeom prst="rect">
+            <a:avLst/>
+          </a:prstGeom>
+          <a:noFill/>
+          <a:ln/>
+        </p:spPr>
+        <p:txBody>
+          <a:bodyPr wrap="square" rtlCol="0" anchor="ctr"/>
+          <a:lstStyle/>
+          <a:p>
+            <a:pPr algn="ctr" indent="0" marL="0">
+              <a:buNone/>
+            </a:pPr>
+            <a:r>
+              <a:rPr lang="en-US" sz="2000" b="1" dirty="0">
+                <a:solidFill>
+                  <a:srgbClr val="FFFFFF"/>
+                </a:solidFill>
+                <a:latin typeface="Arial" pitchFamily="34" charset="0"/>
+                <a:ea typeface="Arial" pitchFamily="34" charset="-122"/>
+                <a:cs typeface="Arial" pitchFamily="34" charset="-120"/>
+              </a:rPr>
+              <a:t>4</a:t>
+            </a:r>
             <a:endParaRPr lang="en-US" sz="2000" dirty="0"/>
           </a:p>
-          <a:p>
-            <a:pPr marL="190500" indent="-190500">
-              <a:spcAft>
-                <a:spcPts val="2000"/>
-              </a:spcAft>
-              <a:buSzPct val="100000"/>
-              <a:buChar char="•"/>
+        </p:txBody>
+      </p:sp>
+      <p:sp>
+        <p:nvSpPr>
+          <p:cNvPr id="20" name="Text 18"/>
+          <p:cNvSpPr/>
+          <p:nvPr/>
+        </p:nvSpPr>
+        <p:spPr>
+          <a:xfrm>
+            <a:off x="7191756" y="3108960"/>
+            <a:ext cx="4265676" cy="1463040"/>
+          </a:xfrm>
+          <a:prstGeom prst="rect">
+            <a:avLst/>
+          </a:prstGeom>
+          <a:noFill/>
+          <a:ln/>
+        </p:spPr>
+        <p:txBody>
+          <a:bodyPr wrap="square" rtlCol="0" anchor="ctr"/>
+          <a:lstStyle/>
+          <a:p>
+            <a:pPr indent="0" marL="0">
+              <a:buNone/>
             </a:pPr>
             <a:r>
-              <a:rPr lang="en-US" sz="2000" dirty="0">
+              <a:rPr lang="en-US" sz="1600" dirty="0">
                 <a:solidFill>
                   <a:srgbClr val="212121"/>
                 </a:solidFill>
@@ -2092,18 +2841,125 @@
               </a:rPr>
               <a:t>Arquitectura en capas (borde → aplicación → datos): cada capa solo habla con la de al lado, nunca se salta ninguna.</a:t>
             </a:r>
+            <a:endParaRPr lang="en-US" sz="1600" dirty="0"/>
+          </a:p>
+        </p:txBody>
+      </p:sp>
+      <p:sp>
+        <p:nvSpPr>
+          <p:cNvPr id="21" name="Shape 19"/>
+          <p:cNvSpPr/>
+          <p:nvPr/>
+        </p:nvSpPr>
+        <p:spPr>
+          <a:xfrm>
+            <a:off x="548640" y="4846320"/>
+            <a:ext cx="5408676" cy="1463040"/>
+          </a:xfrm>
+          <a:prstGeom prst="roundRect">
+            <a:avLst/>
+          </a:prstGeom>
+          <a:solidFill>
+            <a:srgbClr val="E8EAF6"/>
+          </a:solidFill>
+          <a:ln w="15875">
+            <a:solidFill>
+              <a:srgbClr val="3949AB"/>
+            </a:solidFill>
+            <a:prstDash val="solid"/>
+          </a:ln>
+        </p:spPr>
+      </p:sp>
+      <p:sp>
+        <p:nvSpPr>
+          <p:cNvPr id="22" name="Shape 20"/>
+          <p:cNvSpPr/>
+          <p:nvPr/>
+        </p:nvSpPr>
+        <p:spPr>
+          <a:xfrm>
+            <a:off x="731520" y="5257800"/>
+            <a:ext cx="640080" cy="640080"/>
+          </a:xfrm>
+          <a:prstGeom prst="ellipse">
+            <a:avLst/>
+          </a:prstGeom>
+          <a:solidFill>
+            <a:srgbClr val="3949AB"/>
+          </a:solidFill>
+          <a:ln w="12700">
+            <a:solidFill>
+              <a:srgbClr val="3949AB"/>
+            </a:solidFill>
+            <a:prstDash val="solid"/>
+          </a:ln>
+        </p:spPr>
+      </p:sp>
+      <p:sp>
+        <p:nvSpPr>
+          <p:cNvPr id="23" name="Text 21"/>
+          <p:cNvSpPr/>
+          <p:nvPr/>
+        </p:nvSpPr>
+        <p:spPr>
+          <a:xfrm>
+            <a:off x="731520" y="5257800"/>
+            <a:ext cx="640080" cy="640080"/>
+          </a:xfrm>
+          <a:prstGeom prst="rect">
+            <a:avLst/>
+          </a:prstGeom>
+          <a:noFill/>
+          <a:ln/>
+        </p:spPr>
+        <p:txBody>
+          <a:bodyPr wrap="square" rtlCol="0" anchor="ctr"/>
+          <a:lstStyle/>
+          <a:p>
+            <a:pPr algn="ctr" indent="0" marL="0">
+              <a:buNone/>
+            </a:pPr>
+            <a:r>
+              <a:rPr lang="en-US" sz="2000" b="1" dirty="0">
+                <a:solidFill>
+                  <a:srgbClr val="FFFFFF"/>
+                </a:solidFill>
+                <a:latin typeface="Arial" pitchFamily="34" charset="0"/>
+                <a:ea typeface="Arial" pitchFamily="34" charset="-122"/>
+                <a:cs typeface="Arial" pitchFamily="34" charset="-120"/>
+              </a:rPr>
+              <a:t>5</a:t>
+            </a:r>
             <a:endParaRPr lang="en-US" sz="2000" dirty="0"/>
           </a:p>
-          <a:p>
-            <a:pPr marL="190500" indent="-190500">
-              <a:spcAft>
-                <a:spcPts val="2000"/>
-              </a:spcAft>
-              <a:buSzPct val="100000"/>
-              <a:buChar char="•"/>
+        </p:txBody>
+      </p:sp>
+      <p:sp>
+        <p:nvSpPr>
+          <p:cNvPr id="24" name="Text 22"/>
+          <p:cNvSpPr/>
+          <p:nvPr/>
+        </p:nvSpPr>
+        <p:spPr>
+          <a:xfrm>
+            <a:off x="1508760" y="4846320"/>
+            <a:ext cx="4265676" cy="1463040"/>
+          </a:xfrm>
+          <a:prstGeom prst="rect">
+            <a:avLst/>
+          </a:prstGeom>
+          <a:noFill/>
+          <a:ln/>
+        </p:spPr>
+        <p:txBody>
+          <a:bodyPr wrap="square" rtlCol="0" anchor="ctr"/>
+          <a:lstStyle/>
+          <a:p>
+            <a:pPr indent="0" marL="0">
+              <a:buNone/>
             </a:pPr>
             <a:r>
-              <a:rPr lang="en-US" sz="2000" dirty="0">
+              <a:rPr lang="en-US" sz="1600" dirty="0">
                 <a:solidFill>
                   <a:srgbClr val="212121"/>
                 </a:solidFill>
@@ -2113,7 +2969,7 @@
               </a:rPr>
               <a:t>SSH nunca debe quedar abierto a 0.0.0.0/0 — restringir el origen a tu propia IP es la primera línea de defensa.</a:t>
             </a:r>
-            <a:endParaRPr lang="en-US" sz="2000" dirty="0"/>
+            <a:endParaRPr lang="en-US" sz="1600" dirty="0"/>
           </a:p>
         </p:txBody>
       </p:sp>
@@ -2166,13 +3022,6 @@
             <a:prstDash val="solid"/>
           </a:ln>
         </p:spPr>
-        <p:txBody>
-          <a:bodyPr/>
-          <a:lstStyle/>
-          <a:p>
-            <a:endParaRPr lang="es-ES"/>
-          </a:p>
-        </p:txBody>
       </p:sp>
       <p:sp>
         <p:nvSpPr>
@@ -2195,7 +3044,7 @@
           <a:bodyPr wrap="square" rtlCol="0" anchor="ctr"/>
           <a:lstStyle/>
           <a:p>
-            <a:pPr marL="0" indent="0">
+            <a:pPr indent="0" marL="0">
               <a:buNone/>
             </a:pPr>
             <a:r>
@@ -2207,7 +3056,7 @@
                 <a:ea typeface="Arial" pitchFamily="34" charset="-122"/>
                 <a:cs typeface="Arial" pitchFamily="34" charset="-120"/>
               </a:rPr>
-              <a:t>Una puerta abierta de par en par</a:t>
+              <a:t>Seguridad de red</a:t>
             </a:r>
             <a:endParaRPr lang="en-US" sz="2400" dirty="0"/>
           </a:p>
@@ -2234,7 +3083,7 @@
           <a:bodyPr wrap="square" rtlCol="0" anchor="ctr"/>
           <a:lstStyle/>
           <a:p>
-            <a:pPr marL="0" indent="0" algn="r">
+            <a:pPr algn="r" indent="0" marL="0">
               <a:buNone/>
             </a:pPr>
             <a:r>
@@ -2254,14 +3103,39 @@
       </p:sp>
       <p:sp>
         <p:nvSpPr>
-          <p:cNvPr id="5" name="Text 3"/>
-          <p:cNvSpPr/>
-          <p:nvPr/>
-        </p:nvSpPr>
-        <p:spPr>
-          <a:xfrm>
-            <a:off x="548640" y="1554480"/>
-            <a:ext cx="11091672" cy="2194560"/>
+          <p:cNvPr id="5" name="Shape 3"/>
+          <p:cNvSpPr/>
+          <p:nvPr/>
+        </p:nvSpPr>
+        <p:spPr>
+          <a:xfrm>
+            <a:off x="548640" y="1188720"/>
+            <a:ext cx="11091672" cy="1691640"/>
+          </a:xfrm>
+          <a:prstGeom prst="roundRect">
+            <a:avLst/>
+          </a:prstGeom>
+          <a:solidFill>
+            <a:srgbClr val="E8EAF6"/>
+          </a:solidFill>
+          <a:ln w="15875">
+            <a:solidFill>
+              <a:srgbClr val="3949AB"/>
+            </a:solidFill>
+            <a:prstDash val="solid"/>
+          </a:ln>
+        </p:spPr>
+      </p:sp>
+      <p:sp>
+        <p:nvSpPr>
+          <p:cNvPr id="6" name="Text 4"/>
+          <p:cNvSpPr/>
+          <p:nvPr/>
+        </p:nvSpPr>
+        <p:spPr>
+          <a:xfrm>
+            <a:off x="731520" y="1261872"/>
+            <a:ext cx="10725912" cy="548640"/>
           </a:xfrm>
           <a:prstGeom prst="rect">
             <a:avLst/>
@@ -2270,14 +3144,53 @@
           <a:ln/>
         </p:spPr>
         <p:txBody>
-          <a:bodyPr wrap="square" rtlCol="0" anchor="t"/>
-          <a:lstStyle/>
-          <a:p>
-            <a:pPr marL="0" indent="0">
+          <a:bodyPr wrap="square" rtlCol="0" anchor="ctr"/>
+          <a:lstStyle/>
+          <a:p>
+            <a:pPr indent="0" marL="0">
               <a:buNone/>
             </a:pPr>
             <a:r>
-              <a:rPr lang="en-US" sz="2000" dirty="0">
+              <a:rPr lang="en-US" sz="1900" b="1" dirty="0">
+                <a:solidFill>
+                  <a:srgbClr val="1A237E"/>
+                </a:solidFill>
+                <a:latin typeface="Arial" pitchFamily="34" charset="0"/>
+                <a:ea typeface="Arial" pitchFamily="34" charset="-122"/>
+                <a:cs typeface="Arial" pitchFamily="34" charset="-120"/>
+              </a:rPr>
+              <a:t>Una subred pública sin filtro es una puerta abierta de par en par</a:t>
+            </a:r>
+            <a:endParaRPr lang="en-US" sz="1900" dirty="0"/>
+          </a:p>
+        </p:txBody>
+      </p:sp>
+      <p:sp>
+        <p:nvSpPr>
+          <p:cNvPr id="7" name="Text 5"/>
+          <p:cNvSpPr/>
+          <p:nvPr/>
+        </p:nvSpPr>
+        <p:spPr>
+          <a:xfrm>
+            <a:off x="731520" y="1810512"/>
+            <a:ext cx="10725912" cy="996696"/>
+          </a:xfrm>
+          <a:prstGeom prst="rect">
+            <a:avLst/>
+          </a:prstGeom>
+          <a:noFill/>
+          <a:ln/>
+        </p:spPr>
+        <p:txBody>
+          <a:bodyPr wrap="square" rtlCol="0" anchor="t"/>
+          <a:lstStyle/>
+          <a:p>
+            <a:pPr indent="0" marL="0">
+              <a:buNone/>
+            </a:pPr>
+            <a:r>
+              <a:rPr lang="en-US" sz="1500" dirty="0">
                 <a:solidFill>
                   <a:srgbClr val="212121"/>
                 </a:solidFill>
@@ -2285,54 +3198,86 @@
                 <a:ea typeface="Arial" pitchFamily="34" charset="-122"/>
                 <a:cs typeface="Arial" pitchFamily="34" charset="-120"/>
               </a:rPr>
-              <a:t>Ya tienes una VPC con subredes públicas y privadas bien repartidas — la sesión pasada construiste el terreno. Pero una subred pública sin ningún filtro más es solo una puerta abierta de par en par: cualquier instancia que lances ahí queda expuesta a todo internet, en todos sus puertos, salvo que añadas algo que decida quién entra y quién no.</a:t>
-            </a:r>
-            <a:endParaRPr lang="en-US" sz="2000" dirty="0"/>
-          </a:p>
-        </p:txBody>
-      </p:sp>
-      <p:sp>
-        <p:nvSpPr>
-          <p:cNvPr id="6" name="Shape 4"/>
-          <p:cNvSpPr/>
-          <p:nvPr/>
-        </p:nvSpPr>
-        <p:spPr>
-          <a:xfrm>
-            <a:off x="548640" y="4069080"/>
-            <a:ext cx="11091672" cy="1188720"/>
+              <a:t>Cualquier instancia que lances ahí queda expuesta a todo internet, en todos sus puertos —el número que identifica a qué servicio va dirigida una conexión, como el 80 de un servidor web—, salvo que añadas algo que decida quién entra.</a:t>
+            </a:r>
+            <a:endParaRPr lang="en-US" sz="1500" dirty="0"/>
+          </a:p>
+        </p:txBody>
+      </p:sp>
+      <p:sp>
+        <p:nvSpPr>
+          <p:cNvPr id="8" name="Text 6"/>
+          <p:cNvSpPr/>
+          <p:nvPr/>
+        </p:nvSpPr>
+        <p:spPr>
+          <a:xfrm>
+            <a:off x="548640" y="3108960"/>
+            <a:ext cx="11091672" cy="365760"/>
+          </a:xfrm>
+          <a:prstGeom prst="rect">
+            <a:avLst/>
+          </a:prstGeom>
+          <a:noFill/>
+          <a:ln/>
+        </p:spPr>
+        <p:txBody>
+          <a:bodyPr wrap="square" rtlCol="0" anchor="ctr"/>
+          <a:lstStyle/>
+          <a:p>
+            <a:pPr indent="0" marL="0">
+              <a:buNone/>
+            </a:pPr>
+            <a:r>
+              <a:rPr lang="en-US" sz="1500" b="1" dirty="0">
+                <a:solidFill>
+                  <a:srgbClr val="3949AB"/>
+                </a:solidFill>
+                <a:latin typeface="Arial" pitchFamily="34" charset="0"/>
+                <a:ea typeface="Arial" pitchFamily="34" charset="-122"/>
+                <a:cs typeface="Arial" pitchFamily="34" charset="-120"/>
+              </a:rPr>
+              <a:t>Hoy añades tres piezas</a:t>
+            </a:r>
+            <a:endParaRPr lang="en-US" sz="1500" dirty="0"/>
+          </a:p>
+        </p:txBody>
+      </p:sp>
+      <p:sp>
+        <p:nvSpPr>
+          <p:cNvPr id="9" name="Shape 7"/>
+          <p:cNvSpPr/>
+          <p:nvPr/>
+        </p:nvSpPr>
+        <p:spPr>
+          <a:xfrm>
+            <a:off x="548640" y="3566160"/>
+            <a:ext cx="3514344" cy="2103120"/>
           </a:xfrm>
           <a:prstGeom prst="roundRect">
             <a:avLst/>
           </a:prstGeom>
           <a:solidFill>
-            <a:srgbClr val="FFF8E1"/>
+            <a:srgbClr val="E8EAF6"/>
           </a:solidFill>
-          <a:ln w="19050">
+          <a:ln w="15875">
             <a:solidFill>
-              <a:srgbClr val="FFA000"/>
+              <a:srgbClr val="3949AB"/>
             </a:solidFill>
             <a:prstDash val="solid"/>
           </a:ln>
         </p:spPr>
-        <p:txBody>
-          <a:bodyPr/>
-          <a:lstStyle/>
-          <a:p>
-            <a:endParaRPr lang="es-ES"/>
-          </a:p>
-        </p:txBody>
-      </p:sp>
-      <p:sp>
-        <p:nvSpPr>
-          <p:cNvPr id="7" name="Text 5"/>
-          <p:cNvSpPr/>
-          <p:nvPr/>
-        </p:nvSpPr>
-        <p:spPr>
-          <a:xfrm>
-            <a:off x="822960" y="4160520"/>
-            <a:ext cx="10543032" cy="1005840"/>
+      </p:sp>
+      <p:sp>
+        <p:nvSpPr>
+          <p:cNvPr id="10" name="Text 8"/>
+          <p:cNvSpPr/>
+          <p:nvPr/>
+        </p:nvSpPr>
+        <p:spPr>
+          <a:xfrm>
+            <a:off x="685800" y="3657600"/>
+            <a:ext cx="3240024" cy="731520"/>
           </a:xfrm>
           <a:prstGeom prst="rect">
             <a:avLst/>
@@ -2344,11 +3289,50 @@
           <a:bodyPr wrap="square" rtlCol="0" anchor="ctr"/>
           <a:lstStyle/>
           <a:p>
-            <a:pPr marL="0" indent="0">
+            <a:pPr algn="ctr" indent="0" marL="0">
               <a:buNone/>
             </a:pPr>
             <a:r>
-              <a:rPr lang="en-US" sz="1900" dirty="0">
+              <a:rPr lang="en-US" sz="1800" b="1" dirty="0">
+                <a:solidFill>
+                  <a:srgbClr val="1A237E"/>
+                </a:solidFill>
+                <a:latin typeface="Arial" pitchFamily="34" charset="0"/>
+                <a:ea typeface="Arial" pitchFamily="34" charset="-122"/>
+                <a:cs typeface="Arial" pitchFamily="34" charset="-120"/>
+              </a:rPr>
+              <a:t>Dos capas de filtrado</a:t>
+            </a:r>
+            <a:endParaRPr lang="en-US" sz="1800" dirty="0"/>
+          </a:p>
+        </p:txBody>
+      </p:sp>
+      <p:sp>
+        <p:nvSpPr>
+          <p:cNvPr id="11" name="Text 9"/>
+          <p:cNvSpPr/>
+          <p:nvPr/>
+        </p:nvSpPr>
+        <p:spPr>
+          <a:xfrm>
+            <a:off x="731520" y="4434840"/>
+            <a:ext cx="3148584" cy="1143000"/>
+          </a:xfrm>
+          <a:prstGeom prst="rect">
+            <a:avLst/>
+          </a:prstGeom>
+          <a:noFill/>
+          <a:ln/>
+        </p:spPr>
+        <p:txBody>
+          <a:bodyPr wrap="square" rtlCol="0" anchor="t"/>
+          <a:lstStyle/>
+          <a:p>
+            <a:pPr algn="ctr" indent="0" marL="0">
+              <a:buNone/>
+            </a:pPr>
+            <a:r>
+              <a:rPr lang="en-US" sz="1400" dirty="0">
                 <a:solidFill>
                   <a:srgbClr val="212121"/>
                 </a:solidFill>
@@ -2356,9 +3340,215 @@
                 <a:ea typeface="Arial" pitchFamily="34" charset="-122"/>
                 <a:cs typeface="Arial" pitchFamily="34" charset="-120"/>
               </a:rPr>
-              <a:t>Hoy añades dos capas de filtrado que se confunden constantemente entre sí, y el hábito de administrar una instancia sin dejar su puerto de SSH abierto al mundo entero.</a:t>
-            </a:r>
-            <a:endParaRPr lang="en-US" sz="1900" dirty="0"/>
+              <a:t>Que se confunden constantemente entre sí.</a:t>
+            </a:r>
+            <a:endParaRPr lang="en-US" sz="1400" dirty="0"/>
+          </a:p>
+        </p:txBody>
+      </p:sp>
+      <p:sp>
+        <p:nvSpPr>
+          <p:cNvPr id="12" name="Shape 10"/>
+          <p:cNvSpPr/>
+          <p:nvPr/>
+        </p:nvSpPr>
+        <p:spPr>
+          <a:xfrm>
+            <a:off x="4337304" y="3566160"/>
+            <a:ext cx="3514344" cy="2103120"/>
+          </a:xfrm>
+          <a:prstGeom prst="roundRect">
+            <a:avLst/>
+          </a:prstGeom>
+          <a:solidFill>
+            <a:srgbClr val="E8EAF6"/>
+          </a:solidFill>
+          <a:ln w="15875">
+            <a:solidFill>
+              <a:srgbClr val="3949AB"/>
+            </a:solidFill>
+            <a:prstDash val="solid"/>
+          </a:ln>
+        </p:spPr>
+      </p:sp>
+      <p:sp>
+        <p:nvSpPr>
+          <p:cNvPr id="13" name="Text 11"/>
+          <p:cNvSpPr/>
+          <p:nvPr/>
+        </p:nvSpPr>
+        <p:spPr>
+          <a:xfrm>
+            <a:off x="4474464" y="3657600"/>
+            <a:ext cx="3240024" cy="731520"/>
+          </a:xfrm>
+          <a:prstGeom prst="rect">
+            <a:avLst/>
+          </a:prstGeom>
+          <a:noFill/>
+          <a:ln/>
+        </p:spPr>
+        <p:txBody>
+          <a:bodyPr wrap="square" rtlCol="0" anchor="ctr"/>
+          <a:lstStyle/>
+          <a:p>
+            <a:pPr algn="ctr" indent="0" marL="0">
+              <a:buNone/>
+            </a:pPr>
+            <a:r>
+              <a:rPr lang="en-US" sz="1800" b="1" dirty="0">
+                <a:solidFill>
+                  <a:srgbClr val="1A237E"/>
+                </a:solidFill>
+                <a:latin typeface="Arial" pitchFamily="34" charset="0"/>
+                <a:ea typeface="Arial" pitchFamily="34" charset="-122"/>
+                <a:cs typeface="Arial" pitchFamily="34" charset="-120"/>
+              </a:rPr>
+              <a:t>SSH sin exponer</a:t>
+            </a:r>
+            <a:endParaRPr lang="en-US" sz="1800" dirty="0"/>
+          </a:p>
+        </p:txBody>
+      </p:sp>
+      <p:sp>
+        <p:nvSpPr>
+          <p:cNvPr id="14" name="Text 12"/>
+          <p:cNvSpPr/>
+          <p:nvPr/>
+        </p:nvSpPr>
+        <p:spPr>
+          <a:xfrm>
+            <a:off x="4520184" y="4434840"/>
+            <a:ext cx="3148584" cy="1143000"/>
+          </a:xfrm>
+          <a:prstGeom prst="rect">
+            <a:avLst/>
+          </a:prstGeom>
+          <a:noFill/>
+          <a:ln/>
+        </p:spPr>
+        <p:txBody>
+          <a:bodyPr wrap="square" rtlCol="0" anchor="t"/>
+          <a:lstStyle/>
+          <a:p>
+            <a:pPr algn="ctr" indent="0" marL="0">
+              <a:buNone/>
+            </a:pPr>
+            <a:r>
+              <a:rPr lang="en-US" sz="1400" dirty="0">
+                <a:solidFill>
+                  <a:srgbClr val="212121"/>
+                </a:solidFill>
+                <a:latin typeface="Arial" pitchFamily="34" charset="0"/>
+                <a:ea typeface="Arial" pitchFamily="34" charset="-122"/>
+                <a:cs typeface="Arial" pitchFamily="34" charset="-120"/>
+              </a:rPr>
+              <a:t>El hábito de administrar sin dejar el puerto abierto al mundo.</a:t>
+            </a:r>
+            <a:endParaRPr lang="en-US" sz="1400" dirty="0"/>
+          </a:p>
+        </p:txBody>
+      </p:sp>
+      <p:sp>
+        <p:nvSpPr>
+          <p:cNvPr id="15" name="Shape 13"/>
+          <p:cNvSpPr/>
+          <p:nvPr/>
+        </p:nvSpPr>
+        <p:spPr>
+          <a:xfrm>
+            <a:off x="8125968" y="3566160"/>
+            <a:ext cx="3514344" cy="2103120"/>
+          </a:xfrm>
+          <a:prstGeom prst="roundRect">
+            <a:avLst/>
+          </a:prstGeom>
+          <a:solidFill>
+            <a:srgbClr val="FFF8E1"/>
+          </a:solidFill>
+          <a:ln w="25400">
+            <a:solidFill>
+              <a:srgbClr val="FFA000"/>
+            </a:solidFill>
+            <a:prstDash val="solid"/>
+          </a:ln>
+        </p:spPr>
+      </p:sp>
+      <p:sp>
+        <p:nvSpPr>
+          <p:cNvPr id="16" name="Text 14"/>
+          <p:cNvSpPr/>
+          <p:nvPr/>
+        </p:nvSpPr>
+        <p:spPr>
+          <a:xfrm>
+            <a:off x="8263128" y="3657600"/>
+            <a:ext cx="3240024" cy="731520"/>
+          </a:xfrm>
+          <a:prstGeom prst="rect">
+            <a:avLst/>
+          </a:prstGeom>
+          <a:noFill/>
+          <a:ln/>
+        </p:spPr>
+        <p:txBody>
+          <a:bodyPr wrap="square" rtlCol="0" anchor="ctr"/>
+          <a:lstStyle/>
+          <a:p>
+            <a:pPr algn="ctr" indent="0" marL="0">
+              <a:buNone/>
+            </a:pPr>
+            <a:r>
+              <a:rPr lang="en-US" sz="1800" b="1" dirty="0">
+                <a:solidFill>
+                  <a:srgbClr val="1A237E"/>
+                </a:solidFill>
+                <a:latin typeface="Arial" pitchFamily="34" charset="0"/>
+                <a:ea typeface="Arial" pitchFamily="34" charset="-122"/>
+                <a:cs typeface="Arial" pitchFamily="34" charset="-120"/>
+              </a:rPr>
+              <a:t>Salida sin entrada</a:t>
+            </a:r>
+            <a:endParaRPr lang="en-US" sz="1800" dirty="0"/>
+          </a:p>
+        </p:txBody>
+      </p:sp>
+      <p:sp>
+        <p:nvSpPr>
+          <p:cNvPr id="17" name="Text 15"/>
+          <p:cNvSpPr/>
+          <p:nvPr/>
+        </p:nvSpPr>
+        <p:spPr>
+          <a:xfrm>
+            <a:off x="8308848" y="4434840"/>
+            <a:ext cx="3148584" cy="1143000"/>
+          </a:xfrm>
+          <a:prstGeom prst="rect">
+            <a:avLst/>
+          </a:prstGeom>
+          <a:noFill/>
+          <a:ln/>
+        </p:spPr>
+        <p:txBody>
+          <a:bodyPr wrap="square" rtlCol="0" anchor="t"/>
+          <a:lstStyle/>
+          <a:p>
+            <a:pPr algn="ctr" indent="0" marL="0">
+              <a:buNone/>
+            </a:pPr>
+            <a:r>
+              <a:rPr lang="en-US" sz="1400" dirty="0">
+                <a:solidFill>
+                  <a:srgbClr val="212121"/>
+                </a:solidFill>
+                <a:latin typeface="Arial" pitchFamily="34" charset="0"/>
+                <a:ea typeface="Arial" pitchFamily="34" charset="-122"/>
+                <a:cs typeface="Arial" pitchFamily="34" charset="-120"/>
+              </a:rPr>
+              <a:t>Cómo una subred privada sale a internet sin dejar de ser inalcanzable.</a:t>
+            </a:r>
+            <a:endParaRPr lang="en-US" sz="1400" dirty="0"/>
           </a:p>
         </p:txBody>
       </p:sp>
@@ -2411,13 +3601,6 @@
             <a:prstDash val="solid"/>
           </a:ln>
         </p:spPr>
-        <p:txBody>
-          <a:bodyPr/>
-          <a:lstStyle/>
-          <a:p>
-            <a:endParaRPr lang="es-ES"/>
-          </a:p>
-        </p:txBody>
       </p:sp>
       <p:sp>
         <p:nvSpPr>
@@ -2440,7 +3623,7 @@
           <a:bodyPr wrap="square" rtlCol="0" anchor="ctr"/>
           <a:lstStyle/>
           <a:p>
-            <a:pPr marL="0" indent="0">
+            <a:pPr indent="0" marL="0">
               <a:buNone/>
             </a:pPr>
             <a:r>
@@ -2479,7 +3662,7 @@
           <a:bodyPr wrap="square" rtlCol="0" anchor="ctr"/>
           <a:lstStyle/>
           <a:p>
-            <a:pPr marL="0" indent="0" algn="r">
+            <a:pPr algn="r" indent="0" marL="0">
               <a:buNone/>
             </a:pPr>
             <a:r>
@@ -2499,14 +3682,39 @@
       </p:sp>
       <p:sp>
         <p:nvSpPr>
-          <p:cNvPr id="5" name="Text 3"/>
-          <p:cNvSpPr/>
-          <p:nvPr/>
-        </p:nvSpPr>
-        <p:spPr>
-          <a:xfrm>
-            <a:off x="548640" y="1188720"/>
-            <a:ext cx="11091672" cy="1097280"/>
+          <p:cNvPr id="5" name="Shape 3"/>
+          <p:cNvSpPr/>
+          <p:nvPr/>
+        </p:nvSpPr>
+        <p:spPr>
+          <a:xfrm>
+            <a:off x="548640" y="1143000"/>
+            <a:ext cx="11091672" cy="914400"/>
+          </a:xfrm>
+          <a:prstGeom prst="roundRect">
+            <a:avLst/>
+          </a:prstGeom>
+          <a:solidFill>
+            <a:srgbClr val="FFF8E1"/>
+          </a:solidFill>
+          <a:ln w="19050">
+            <a:solidFill>
+              <a:srgbClr val="FFA000"/>
+            </a:solidFill>
+            <a:prstDash val="solid"/>
+          </a:ln>
+        </p:spPr>
+      </p:sp>
+      <p:sp>
+        <p:nvSpPr>
+          <p:cNvPr id="6" name="Text 4"/>
+          <p:cNvSpPr/>
+          <p:nvPr/>
+        </p:nvSpPr>
+        <p:spPr>
+          <a:xfrm>
+            <a:off x="822960" y="1234440"/>
+            <a:ext cx="10543032" cy="731520"/>
           </a:xfrm>
           <a:prstGeom prst="rect">
             <a:avLst/>
@@ -2515,14 +3723,14 @@
           <a:ln/>
         </p:spPr>
         <p:txBody>
-          <a:bodyPr wrap="square" rtlCol="0" anchor="t"/>
-          <a:lstStyle/>
-          <a:p>
-            <a:pPr marL="0" indent="0">
+          <a:bodyPr wrap="square" rtlCol="0" anchor="ctr"/>
+          <a:lstStyle/>
+          <a:p>
+            <a:pPr indent="0" marL="0">
               <a:buNone/>
             </a:pPr>
             <a:r>
-              <a:rPr lang="en-US" sz="1700" dirty="0">
+              <a:rPr lang="en-US" sz="1600" dirty="0">
                 <a:solidFill>
                   <a:srgbClr val="212121"/>
                 </a:solidFill>
@@ -2530,15 +3738,15 @@
                 <a:ea typeface="Arial" pitchFamily="34" charset="-122"/>
                 <a:cs typeface="Arial" pitchFamily="34" charset="-120"/>
               </a:rPr>
-              <a:t>Una ACL (Access Control List) es cualquier lista de reglas que decide quién puede hacer qué sobre un recurso. La que usas hoy es la NACL (Network ACL): una ACL aplicada al tráfico de red, asociada a una subred entera de tu VPC.</a:t>
-            </a:r>
-            <a:endParaRPr lang="en-US" sz="1700" dirty="0"/>
+              <a:t>Dos herramientas de filtrado, y confundirlas es de los errores más repetidos del curso. Deciden qué tráfico entra y sale, pero a nivel distinto y de forma distinta.</a:t>
+            </a:r>
+            <a:endParaRPr lang="en-US" sz="1600" dirty="0"/>
           </a:p>
         </p:txBody>
       </p:sp>
       <p:graphicFrame>
         <p:nvGraphicFramePr>
-          <p:cNvPr id="6" name="Table 0"/>
+          <p:cNvPr id="4" name="Table 0"/>
           <p:cNvGraphicFramePr>
             <a:graphicFrameLocks noGrp="1"/>
           </p:cNvGraphicFramePr>
@@ -2551,43 +3759,25 @@
           </p:nvPr>
         </p:nvGraphicFramePr>
         <p:xfrm>
-          <a:off x="548640" y="2468880"/>
-          <a:ext cx="11091672" cy="3200400"/>
+          <a:off x="548640" y="2240280"/>
+          <a:ext cx="11091672" cy="914400"/>
         </p:xfrm>
         <a:graphic>
           <a:graphicData uri="http://schemas.openxmlformats.org/drawingml/2006/table">
             <a:tbl>
               <a:tblPr/>
               <a:tblGrid>
-                <a:gridCol w="1774668">
-                  <a:extLst>
-                    <a:ext uri="{9D8B030D-6E8A-4147-A177-3AD203B41FA5}">
-                      <a16:colId xmlns:a16="http://schemas.microsoft.com/office/drawing/2014/main" val="20000"/>
-                    </a:ext>
-                  </a:extLst>
-                </a:gridCol>
-                <a:gridCol w="4658502">
-                  <a:extLst>
-                    <a:ext uri="{9D8B030D-6E8A-4147-A177-3AD203B41FA5}">
-                      <a16:colId xmlns:a16="http://schemas.microsoft.com/office/drawing/2014/main" val="20001"/>
-                    </a:ext>
-                  </a:extLst>
-                </a:gridCol>
-                <a:gridCol w="4658502">
-                  <a:extLst>
-                    <a:ext uri="{9D8B030D-6E8A-4147-A177-3AD203B41FA5}">
-                      <a16:colId xmlns:a16="http://schemas.microsoft.com/office/drawing/2014/main" val="20002"/>
-                    </a:ext>
-                  </a:extLst>
-                </a:gridCol>
+                <a:gridCol w="2440168"/>
+                <a:gridCol w="4325752"/>
+                <a:gridCol w="4325752"/>
               </a:tblGrid>
-              <a:tr h="640080">
+              <a:tr h="548640">
                 <a:tc>
                   <a:txBody>
                     <a:bodyPr/>
                     <a:lstStyle/>
                     <a:p>
-                      <a:pPr marL="0" indent="0" algn="ctr">
+                      <a:pPr algn="ctr" indent="0" marL="0">
                         <a:buNone/>
                       </a:pPr>
                       <a:endParaRPr lang="en-US" sz="1400" dirty="0">
@@ -2597,7 +3787,7 @@
                       </a:endParaRPr>
                     </a:p>
                   </a:txBody>
-                  <a:tcPr anchor="ctr">
+                  <a:tcPr marL="91440" marR="91440" marT="45720" marB="45720" anchor="ctr">
                     <a:lnL w="12700" cap="flat" cmpd="sng" algn="ctr">
                       <a:solidFill>
                         <a:srgbClr val="EEEEEE"/>
@@ -2644,7 +3834,7 @@
                     <a:bodyPr/>
                     <a:lstStyle/>
                     <a:p>
-                      <a:pPr marL="0" indent="0" algn="ctr">
+                      <a:pPr algn="ctr" indent="0" marL="0">
                         <a:buNone/>
                       </a:pPr>
                       <a:r>
@@ -2665,7 +3855,7 @@
                       </a:endParaRPr>
                     </a:p>
                   </a:txBody>
-                  <a:tcPr anchor="ctr">
+                  <a:tcPr marL="91440" marR="91440" marT="45720" marB="45720" anchor="ctr">
                     <a:lnL w="12700" cap="flat" cmpd="sng" algn="ctr">
                       <a:solidFill>
                         <a:srgbClr val="EEEEEE"/>
@@ -2712,7 +3902,7 @@
                     <a:bodyPr/>
                     <a:lstStyle/>
                     <a:p>
-                      <a:pPr marL="0" indent="0" algn="ctr">
+                      <a:pPr algn="ctr" indent="0" marL="0">
                         <a:buNone/>
                       </a:pPr>
                       <a:r>
@@ -2724,7 +3914,7 @@
                           <a:ea typeface="Arial" pitchFamily="34" charset="-122"/>
                           <a:cs typeface="Arial" pitchFamily="34" charset="-120"/>
                         </a:rPr>
-                        <a:t>NACL (Network ACL)</a:t>
+                        <a:t>NACL</a:t>
                       </a:r>
                       <a:endParaRPr lang="en-US" sz="1400" dirty="0">
                         <a:latin typeface="Arial" charset="0"/>
@@ -2733,7 +3923,7 @@
                       </a:endParaRPr>
                     </a:p>
                   </a:txBody>
-                  <a:tcPr anchor="ctr">
+                  <a:tcPr marL="91440" marR="91440" marT="45720" marB="45720" anchor="ctr">
                     <a:lnL w="12700" cap="flat" cmpd="sng" algn="ctr">
                       <a:solidFill>
                         <a:srgbClr val="EEEEEE"/>
@@ -2775,19 +3965,14 @@
                     </a:solidFill>
                   </a:tcPr>
                 </a:tc>
-                <a:extLst>
-                  <a:ext uri="{0D108BD9-81ED-4DB2-BD59-A6C34878D82A}">
-                    <a16:rowId xmlns:a16="http://schemas.microsoft.com/office/drawing/2014/main" val="10000"/>
-                  </a:ext>
-                </a:extLst>
               </a:tr>
-              <a:tr h="640080">
+              <a:tr h="548640">
                 <a:tc>
                   <a:txBody>
                     <a:bodyPr/>
                     <a:lstStyle/>
                     <a:p>
-                      <a:pPr marL="0" indent="0">
+                      <a:pPr indent="0" marL="0">
                         <a:buNone/>
                       </a:pPr>
                       <a:r>
@@ -2808,7 +3993,7 @@
                       </a:endParaRPr>
                     </a:p>
                   </a:txBody>
-                  <a:tcPr anchor="ctr">
+                  <a:tcPr marL="91440" marR="91440" marT="45720" marB="45720" anchor="ctr">
                     <a:lnL w="12700" cap="flat" cmpd="sng" algn="ctr">
                       <a:solidFill>
                         <a:srgbClr val="EEEEEE"/>
@@ -2855,7 +4040,7 @@
                     <a:bodyPr/>
                     <a:lstStyle/>
                     <a:p>
-                      <a:pPr marL="0" indent="0">
+                      <a:pPr indent="0" marL="0">
                         <a:buNone/>
                       </a:pPr>
                       <a:r>
@@ -2867,7 +4052,7 @@
                           <a:ea typeface="Arial" pitchFamily="34" charset="-122"/>
                           <a:cs typeface="Arial" pitchFamily="34" charset="-120"/>
                         </a:rPr>
-                        <a:t>La instancia (o al recurso concreto)</a:t>
+                        <a:t>La instancia (el recurso concreto)</a:t>
                       </a:r>
                       <a:endParaRPr lang="en-US" sz="1300" dirty="0">
                         <a:latin typeface="Arial" charset="0"/>
@@ -2876,7 +4061,7 @@
                       </a:endParaRPr>
                     </a:p>
                   </a:txBody>
-                  <a:tcPr anchor="ctr">
+                  <a:tcPr marL="91440" marR="91440" marT="45720" marB="45720" anchor="ctr">
                     <a:lnL w="12700" cap="flat" cmpd="sng" algn="ctr">
                       <a:solidFill>
                         <a:srgbClr val="EEEEEE"/>
@@ -2923,7 +4108,7 @@
                     <a:bodyPr/>
                     <a:lstStyle/>
                     <a:p>
-                      <a:pPr marL="0" indent="0">
+                      <a:pPr indent="0" marL="0">
                         <a:buNone/>
                       </a:pPr>
                       <a:r>
@@ -2944,7 +4129,7 @@
                       </a:endParaRPr>
                     </a:p>
                   </a:txBody>
-                  <a:tcPr anchor="ctr">
+                  <a:tcPr marL="91440" marR="91440" marT="45720" marB="45720" anchor="ctr">
                     <a:lnL w="12700" cap="flat" cmpd="sng" algn="ctr">
                       <a:solidFill>
                         <a:srgbClr val="EEEEEE"/>
@@ -2986,19 +4171,14 @@
                     </a:solidFill>
                   </a:tcPr>
                 </a:tc>
-                <a:extLst>
-                  <a:ext uri="{0D108BD9-81ED-4DB2-BD59-A6C34878D82A}">
-                    <a16:rowId xmlns:a16="http://schemas.microsoft.com/office/drawing/2014/main" val="10001"/>
-                  </a:ext>
-                </a:extLst>
               </a:tr>
-              <a:tr h="640080">
+              <a:tr h="548640">
                 <a:tc>
                   <a:txBody>
                     <a:bodyPr/>
                     <a:lstStyle/>
                     <a:p>
-                      <a:pPr marL="0" indent="0">
+                      <a:pPr indent="0" marL="0">
                         <a:buNone/>
                       </a:pPr>
                       <a:r>
@@ -3019,7 +4199,7 @@
                       </a:endParaRPr>
                     </a:p>
                   </a:txBody>
-                  <a:tcPr anchor="ctr">
+                  <a:tcPr marL="91440" marR="91440" marT="45720" marB="45720" anchor="ctr">
                     <a:lnL w="12700" cap="flat" cmpd="sng" algn="ctr">
                       <a:solidFill>
                         <a:srgbClr val="EEEEEE"/>
@@ -3066,7 +4246,7 @@
                     <a:bodyPr/>
                     <a:lstStyle/>
                     <a:p>
-                      <a:pPr marL="0" indent="0">
+                      <a:pPr indent="0" marL="0">
                         <a:buNone/>
                       </a:pPr>
                       <a:r>
@@ -3078,7 +4258,7 @@
                           <a:ea typeface="Arial" pitchFamily="34" charset="-122"/>
                           <a:cs typeface="Arial" pitchFamily="34" charset="-120"/>
                         </a:rPr>
-                        <a:t>Con estado: la respuesta de salida se permite automáticamente</a:t>
+                        <a:t>Con estado: la respuesta se permite sola</a:t>
                       </a:r>
                       <a:endParaRPr lang="en-US" sz="1300" dirty="0">
                         <a:latin typeface="Arial" charset="0"/>
@@ -3087,7 +4267,7 @@
                       </a:endParaRPr>
                     </a:p>
                   </a:txBody>
-                  <a:tcPr anchor="ctr">
+                  <a:tcPr marL="91440" marR="91440" marT="45720" marB="45720" anchor="ctr">
                     <a:lnL w="12700" cap="flat" cmpd="sng" algn="ctr">
                       <a:solidFill>
                         <a:srgbClr val="EEEEEE"/>
@@ -3134,7 +4314,7 @@
                     <a:bodyPr/>
                     <a:lstStyle/>
                     <a:p>
-                      <a:pPr marL="0" indent="0">
+                      <a:pPr indent="0" marL="0">
                         <a:buNone/>
                       </a:pPr>
                       <a:r>
@@ -3146,7 +4326,7 @@
                           <a:ea typeface="Arial" pitchFamily="34" charset="-122"/>
                           <a:cs typeface="Arial" pitchFamily="34" charset="-120"/>
                         </a:rPr>
-                        <a:t>Sin estado: hay que permitir entrada Y salida por separado</a:t>
+                        <a:t>Sin estado: entrada y salida por separado</a:t>
                       </a:r>
                       <a:endParaRPr lang="en-US" sz="1300" dirty="0">
                         <a:latin typeface="Arial" charset="0"/>
@@ -3155,7 +4335,7 @@
                       </a:endParaRPr>
                     </a:p>
                   </a:txBody>
-                  <a:tcPr anchor="ctr">
+                  <a:tcPr marL="91440" marR="91440" marT="45720" marB="45720" anchor="ctr">
                     <a:lnL w="12700" cap="flat" cmpd="sng" algn="ctr">
                       <a:solidFill>
                         <a:srgbClr val="EEEEEE"/>
@@ -3197,19 +4377,14 @@
                     </a:solidFill>
                   </a:tcPr>
                 </a:tc>
-                <a:extLst>
-                  <a:ext uri="{0D108BD9-81ED-4DB2-BD59-A6C34878D82A}">
-                    <a16:rowId xmlns:a16="http://schemas.microsoft.com/office/drawing/2014/main" val="10002"/>
-                  </a:ext>
-                </a:extLst>
               </a:tr>
-              <a:tr h="640080">
+              <a:tr h="548640">
                 <a:tc>
                   <a:txBody>
                     <a:bodyPr/>
                     <a:lstStyle/>
                     <a:p>
-                      <a:pPr marL="0" indent="0">
+                      <a:pPr indent="0" marL="0">
                         <a:buNone/>
                       </a:pPr>
                       <a:r>
@@ -3230,7 +4405,7 @@
                       </a:endParaRPr>
                     </a:p>
                   </a:txBody>
-                  <a:tcPr anchor="ctr">
+                  <a:tcPr marL="91440" marR="91440" marT="45720" marB="45720" anchor="ctr">
                     <a:lnL w="12700" cap="flat" cmpd="sng" algn="ctr">
                       <a:solidFill>
                         <a:srgbClr val="EEEEEE"/>
@@ -3277,7 +4452,7 @@
                     <a:bodyPr/>
                     <a:lstStyle/>
                     <a:p>
-                      <a:pPr marL="0" indent="0">
+                      <a:pPr indent="0" marL="0">
                         <a:buNone/>
                       </a:pPr>
                       <a:r>
@@ -3289,7 +4464,7 @@
                           <a:ea typeface="Arial" pitchFamily="34" charset="-122"/>
                           <a:cs typeface="Arial" pitchFamily="34" charset="-120"/>
                         </a:rPr>
-                        <a:t>Solo de permitir</a:t>
+                        <a:t>Solo de «permitir»</a:t>
                       </a:r>
                       <a:endParaRPr lang="en-US" sz="1300" dirty="0">
                         <a:latin typeface="Arial" charset="0"/>
@@ -3298,7 +4473,7 @@
                       </a:endParaRPr>
                     </a:p>
                   </a:txBody>
-                  <a:tcPr anchor="ctr">
+                  <a:tcPr marL="91440" marR="91440" marT="45720" marB="45720" anchor="ctr">
                     <a:lnL w="12700" cap="flat" cmpd="sng" algn="ctr">
                       <a:solidFill>
                         <a:srgbClr val="EEEEEE"/>
@@ -3345,7 +4520,7 @@
                     <a:bodyPr/>
                     <a:lstStyle/>
                     <a:p>
-                      <a:pPr marL="0" indent="0">
+                      <a:pPr indent="0" marL="0">
                         <a:buNone/>
                       </a:pPr>
                       <a:r>
@@ -3357,7 +4532,7 @@
                           <a:ea typeface="Arial" pitchFamily="34" charset="-122"/>
                           <a:cs typeface="Arial" pitchFamily="34" charset="-120"/>
                         </a:rPr>
-                        <a:t>De permitir y de denegar explícito</a:t>
+                        <a:t>De «permitir» y de «denegar» explícito</a:t>
                       </a:r>
                       <a:endParaRPr lang="en-US" sz="1300" dirty="0">
                         <a:latin typeface="Arial" charset="0"/>
@@ -3366,7 +4541,7 @@
                       </a:endParaRPr>
                     </a:p>
                   </a:txBody>
-                  <a:tcPr anchor="ctr">
+                  <a:tcPr marL="91440" marR="91440" marT="45720" marB="45720" anchor="ctr">
                     <a:lnL w="12700" cap="flat" cmpd="sng" algn="ctr">
                       <a:solidFill>
                         <a:srgbClr val="EEEEEE"/>
@@ -3408,19 +4583,14 @@
                     </a:solidFill>
                   </a:tcPr>
                 </a:tc>
-                <a:extLst>
-                  <a:ext uri="{0D108BD9-81ED-4DB2-BD59-A6C34878D82A}">
-                    <a16:rowId xmlns:a16="http://schemas.microsoft.com/office/drawing/2014/main" val="10003"/>
-                  </a:ext>
-                </a:extLst>
               </a:tr>
-              <a:tr h="640080">
+              <a:tr h="548640">
                 <a:tc>
                   <a:txBody>
                     <a:bodyPr/>
                     <a:lstStyle/>
                     <a:p>
-                      <a:pPr marL="0" indent="0">
+                      <a:pPr indent="0" marL="0">
                         <a:buNone/>
                       </a:pPr>
                       <a:r>
@@ -3441,7 +4611,7 @@
                       </a:endParaRPr>
                     </a:p>
                   </a:txBody>
-                  <a:tcPr anchor="ctr">
+                  <a:tcPr marL="91440" marR="91440" marT="45720" marB="45720" anchor="ctr">
                     <a:lnL w="12700" cap="flat" cmpd="sng" algn="ctr">
                       <a:solidFill>
                         <a:srgbClr val="EEEEEE"/>
@@ -3488,7 +4658,7 @@
                     <a:bodyPr/>
                     <a:lstStyle/>
                     <a:p>
-                      <a:pPr marL="0" indent="0">
+                      <a:pPr indent="0" marL="0">
                         <a:buNone/>
                       </a:pPr>
                       <a:r>
@@ -3500,7 +4670,7 @@
                           <a:ea typeface="Arial" pitchFamily="34" charset="-122"/>
                           <a:cs typeface="Arial" pitchFamily="34" charset="-120"/>
                         </a:rPr>
-                        <a:t>Se evalúan todas las reglas que apliquen</a:t>
+                        <a:t>Se evalúan todas las que apliquen</a:t>
                       </a:r>
                       <a:endParaRPr lang="en-US" sz="1300" dirty="0">
                         <a:latin typeface="Arial" charset="0"/>
@@ -3509,7 +4679,7 @@
                       </a:endParaRPr>
                     </a:p>
                   </a:txBody>
-                  <a:tcPr anchor="ctr">
+                  <a:tcPr marL="91440" marR="91440" marT="45720" marB="45720" anchor="ctr">
                     <a:lnL w="12700" cap="flat" cmpd="sng" algn="ctr">
                       <a:solidFill>
                         <a:srgbClr val="EEEEEE"/>
@@ -3556,7 +4726,7 @@
                     <a:bodyPr/>
                     <a:lstStyle/>
                     <a:p>
-                      <a:pPr marL="0" indent="0">
+                      <a:pPr indent="0" marL="0">
                         <a:buNone/>
                       </a:pPr>
                       <a:r>
@@ -3577,7 +4747,7 @@
                       </a:endParaRPr>
                     </a:p>
                   </a:txBody>
-                  <a:tcPr anchor="ctr">
+                  <a:tcPr marL="91440" marR="91440" marT="45720" marB="45720" anchor="ctr">
                     <a:lnL w="12700" cap="flat" cmpd="sng" algn="ctr">
                       <a:solidFill>
                         <a:srgbClr val="EEEEEE"/>
@@ -3619,11 +4789,6 @@
                     </a:solidFill>
                   </a:tcPr>
                 </a:tc>
-                <a:extLst>
-                  <a:ext uri="{0D108BD9-81ED-4DB2-BD59-A6C34878D82A}">
-                    <a16:rowId xmlns:a16="http://schemas.microsoft.com/office/drawing/2014/main" val="10004"/>
-                  </a:ext>
-                </a:extLst>
               </a:tr>
             </a:tbl>
           </a:graphicData>
@@ -3678,13 +4843,6 @@
             <a:prstDash val="solid"/>
           </a:ln>
         </p:spPr>
-        <p:txBody>
-          <a:bodyPr/>
-          <a:lstStyle/>
-          <a:p>
-            <a:endParaRPr lang="es-ES"/>
-          </a:p>
-        </p:txBody>
       </p:sp>
       <p:sp>
         <p:nvSpPr>
@@ -3707,7 +4865,7 @@
           <a:bodyPr wrap="square" rtlCol="0" anchor="ctr"/>
           <a:lstStyle/>
           <a:p>
-            <a:pPr marL="0" indent="0">
+            <a:pPr indent="0" marL="0">
               <a:buNone/>
             </a:pPr>
             <a:r>
@@ -3719,7 +4877,7 @@
                 <a:ea typeface="Arial" pitchFamily="34" charset="-122"/>
                 <a:cs typeface="Arial" pitchFamily="34" charset="-120"/>
               </a:rPr>
-              <a:t>Las dos capas de filtrado</a:t>
+              <a:t>Por qué se confunden tanto</a:t>
             </a:r>
             <a:endParaRPr lang="en-US" sz="2400" dirty="0"/>
           </a:p>
@@ -3746,7 +4904,7 @@
           <a:bodyPr wrap="square" rtlCol="0" anchor="ctr"/>
           <a:lstStyle/>
           <a:p>
-            <a:pPr marL="0" indent="0" algn="r">
+            <a:pPr algn="r" indent="0" marL="0">
               <a:buNone/>
             </a:pPr>
             <a:r>
@@ -3764,40 +4922,16 @@
           </a:p>
         </p:txBody>
       </p:sp>
-      <p:pic>
-        <p:nvPicPr>
-          <p:cNvPr id="5" name="Image 0" descr="C:/Users/Aitor/Documents/apuntes-profe/introduccion-nube/docs/tema2/img/diagrama_sg_vs_nacl.png"/>
-          <p:cNvPicPr>
-            <a:picLocks noChangeAspect="1"/>
-          </p:cNvPicPr>
-          <p:nvPr/>
-        </p:nvPicPr>
-        <p:blipFill>
-          <a:blip r:embed="rId3"/>
-          <a:stretch>
-            <a:fillRect/>
-          </a:stretch>
-        </p:blipFill>
-        <p:spPr>
-          <a:xfrm>
-            <a:off x="3806403" y="1056321"/>
-            <a:ext cx="8129752" cy="5419835"/>
-          </a:xfrm>
-          <a:prstGeom prst="rect">
-            <a:avLst/>
-          </a:prstGeom>
-        </p:spPr>
-      </p:pic>
-      <p:sp>
-        <p:nvSpPr>
-          <p:cNvPr id="6" name="Shape 3"/>
-          <p:cNvSpPr/>
-          <p:nvPr/>
-        </p:nvSpPr>
-        <p:spPr>
-          <a:xfrm>
-            <a:off x="255845" y="1402764"/>
-            <a:ext cx="3500846" cy="2441448"/>
+      <p:sp>
+        <p:nvSpPr>
+          <p:cNvPr id="5" name="Shape 3"/>
+          <p:cNvSpPr/>
+          <p:nvPr/>
+        </p:nvSpPr>
+        <p:spPr>
+          <a:xfrm>
+            <a:off x="548640" y="1143000"/>
+            <a:ext cx="11091672" cy="1188720"/>
           </a:xfrm>
           <a:prstGeom prst="roundRect">
             <a:avLst/>
@@ -3812,24 +4946,17 @@
             <a:prstDash val="solid"/>
           </a:ln>
         </p:spPr>
-        <p:txBody>
-          <a:bodyPr/>
-          <a:lstStyle/>
-          <a:p>
-            <a:endParaRPr lang="es-ES"/>
-          </a:p>
-        </p:txBody>
-      </p:sp>
-      <p:sp>
-        <p:nvSpPr>
-          <p:cNvPr id="7" name="Text 4"/>
-          <p:cNvSpPr/>
-          <p:nvPr/>
-        </p:nvSpPr>
-        <p:spPr>
-          <a:xfrm>
-            <a:off x="365760" y="1624714"/>
-            <a:ext cx="3327680" cy="1997548"/>
+      </p:sp>
+      <p:sp>
+        <p:nvSpPr>
+          <p:cNvPr id="6" name="Text 4"/>
+          <p:cNvSpPr/>
+          <p:nvPr/>
+        </p:nvSpPr>
+        <p:spPr>
+          <a:xfrm>
+            <a:off x="822960" y="1234440"/>
+            <a:ext cx="10543032" cy="1005840"/>
           </a:xfrm>
           <a:prstGeom prst="rect">
             <a:avLst/>
@@ -3841,11 +4968,11 @@
           <a:bodyPr wrap="square" rtlCol="0" anchor="ctr"/>
           <a:lstStyle/>
           <a:p>
-            <a:pPr marL="0" indent="0">
+            <a:pPr indent="0" marL="0">
               <a:buNone/>
             </a:pPr>
             <a:r>
-              <a:rPr lang="en-US" sz="1800" dirty="0">
+              <a:rPr lang="en-US" sz="1600" dirty="0">
                 <a:solidFill>
                   <a:srgbClr val="212121"/>
                 </a:solidFill>
@@ -3853,9 +4980,115 @@
                 <a:ea typeface="Arial" pitchFamily="34" charset="-122"/>
                 <a:cs typeface="Arial" pitchFamily="34" charset="-120"/>
               </a:rPr>
-              <a:t>El portero de discoteca (grupo de seguridad) recuerda a quién ha dejado entrar. La verja del recinto (NACL) no recuerda nada: cada cruce, en cualquier sentido, se comprueba otra vez.</a:t>
-            </a:r>
-            <a:endParaRPr lang="en-US" sz="1800" dirty="0"/>
+              <a:t>Un portero de discoteca (grupo de seguridad) recuerda a quién dejó entrar: al salir, no vuelve a pedir el carné —«con estado»—. La verja del recinto (NACL) no recuerda nada: cada cruce, en cualquier sentido, se comprueba de nuevo —«sin estado»—.</a:t>
+            </a:r>
+            <a:endParaRPr lang="en-US" sz="1600" dirty="0"/>
+          </a:p>
+        </p:txBody>
+      </p:sp>
+      <p:pic>
+        <p:nvPicPr>
+          <p:cNvPr id="7" name="Image 0" descr="C:/Users/Aitor/Documents/apuntes-profe/introduccion-nube/docs/tema2/img/diagrama_sg_vs_nacl.png">    </p:cNvPr>
+          <p:cNvPicPr>
+            <a:picLocks noChangeAspect="1"/>
+          </p:cNvPicPr>
+          <p:nvPr/>
+        </p:nvPicPr>
+        <p:blipFill>
+          <a:blip r:embed="rId1"/>
+          <a:stretch>
+            <a:fillRect/>
+          </a:stretch>
+        </p:blipFill>
+        <p:spPr>
+          <a:xfrm>
+            <a:off x="3899916" y="2560320"/>
+            <a:ext cx="4389120" cy="2926080"/>
+          </a:xfrm>
+          <a:prstGeom prst="rect">
+            <a:avLst/>
+          </a:prstGeom>
+        </p:spPr>
+      </p:pic>
+      <p:sp>
+        <p:nvSpPr>
+          <p:cNvPr id="8" name="Shape 5"/>
+          <p:cNvSpPr/>
+          <p:nvPr/>
+        </p:nvSpPr>
+        <p:spPr>
+          <a:xfrm>
+            <a:off x="548640" y="5623560"/>
+            <a:ext cx="11091672" cy="777240"/>
+          </a:xfrm>
+          <a:prstGeom prst="roundRect">
+            <a:avLst/>
+          </a:prstGeom>
+          <a:solidFill>
+            <a:srgbClr val="FFF8E1"/>
+          </a:solidFill>
+          <a:ln w="28575">
+            <a:solidFill>
+              <a:srgbClr val="FFA000"/>
+            </a:solidFill>
+            <a:prstDash val="solid"/>
+          </a:ln>
+        </p:spPr>
+      </p:sp>
+      <p:sp>
+        <p:nvSpPr>
+          <p:cNvPr id="9" name="Text 6"/>
+          <p:cNvSpPr/>
+          <p:nvPr/>
+        </p:nvSpPr>
+        <p:spPr>
+          <a:xfrm>
+            <a:off x="822960" y="5733288"/>
+            <a:ext cx="10543032" cy="557784"/>
+          </a:xfrm>
+          <a:prstGeom prst="rect">
+            <a:avLst/>
+          </a:prstGeom>
+          <a:noFill/>
+          <a:ln/>
+        </p:spPr>
+        <p:txBody>
+          <a:bodyPr wrap="square" rtlCol="0" anchor="t"/>
+          <a:lstStyle/>
+          <a:p>
+            <a:pPr indent="0" marL="0">
+              <a:buNone/>
+            </a:pPr>
+            <a:r>
+              <a:rPr lang="en-US" sz="1400" b="1" dirty="0">
+                <a:solidFill>
+                  <a:srgbClr val="1A237E"/>
+                </a:solidFill>
+                <a:latin typeface="Arial" pitchFamily="34" charset="0"/>
+                <a:ea typeface="Arial" pitchFamily="34" charset="-122"/>
+                <a:cs typeface="Arial" pitchFamily="34" charset="-120"/>
+              </a:rPr>
+              <a:t>Si olvidas una regla de salida en un SG, no pasa nada
+</a:t>
+            </a:r>
+            <a:endParaRPr lang="en-US" sz="1400" dirty="0"/>
+          </a:p>
+          <a:p>
+            <a:pPr indent="0" marL="0">
+              <a:buNone/>
+            </a:pPr>
+            <a:r>
+              <a:rPr lang="en-US" sz="1300" dirty="0">
+                <a:solidFill>
+                  <a:srgbClr val="212121"/>
+                </a:solidFill>
+                <a:latin typeface="Arial" pitchFamily="34" charset="0"/>
+                <a:ea typeface="Arial" pitchFamily="34" charset="-122"/>
+                <a:cs typeface="Arial" pitchFamily="34" charset="-120"/>
+              </a:rPr>
+              <a:t>Si la olvidas en una NACL, el tráfico se corta aunque la entrada estuviera permitida.</a:t>
+            </a:r>
+            <a:endParaRPr lang="en-US" sz="1400" dirty="0"/>
           </a:p>
         </p:txBody>
       </p:sp>
@@ -3908,13 +5141,6 @@
             <a:prstDash val="solid"/>
           </a:ln>
         </p:spPr>
-        <p:txBody>
-          <a:bodyPr/>
-          <a:lstStyle/>
-          <a:p>
-            <a:endParaRPr lang="es-ES"/>
-          </a:p>
-        </p:txBody>
       </p:sp>
       <p:sp>
         <p:nvSpPr>
@@ -3937,7 +5163,7 @@
           <a:bodyPr wrap="square" rtlCol="0" anchor="ctr"/>
           <a:lstStyle/>
           <a:p>
-            <a:pPr marL="0" indent="0">
+            <a:pPr indent="0" marL="0">
               <a:buNone/>
             </a:pPr>
             <a:r>
@@ -3949,7 +5175,7 @@
                 <a:ea typeface="Arial" pitchFamily="34" charset="-122"/>
                 <a:cs typeface="Arial" pitchFamily="34" charset="-120"/>
               </a:rPr>
-              <a:t>El orden importa: una NACL mal ordenada bloquea tráfico</a:t>
+              <a:t>El orden importa: una NACL mal ordenada bloquea</a:t>
             </a:r>
             <a:endParaRPr lang="en-US" sz="2400" dirty="0"/>
           </a:p>
@@ -3976,7 +5202,7 @@
           <a:bodyPr wrap="square" rtlCol="0" anchor="ctr"/>
           <a:lstStyle/>
           <a:p>
-            <a:pPr marL="0" indent="0" algn="r">
+            <a:pPr algn="r" indent="0" marL="0">
               <a:buNone/>
             </a:pPr>
             <a:r>
@@ -3994,16 +5220,65 @@
           </a:p>
         </p:txBody>
       </p:sp>
-      <p:sp>
-        <p:nvSpPr>
-          <p:cNvPr id="5" name="Text 3"/>
-          <p:cNvSpPr/>
-          <p:nvPr/>
-        </p:nvSpPr>
-        <p:spPr>
-          <a:xfrm>
-            <a:off x="548640" y="1188720"/>
-            <a:ext cx="4377923" cy="1554480"/>
+      <p:pic>
+        <p:nvPicPr>
+          <p:cNvPr id="5" name="Image 0" descr="C:/Users/Aitor/Documents/apuntes-profe/introduccion-nube/docs/tema2/img/diagrama_nacl_orden.png">    </p:cNvPr>
+          <p:cNvPicPr>
+            <a:picLocks noChangeAspect="1"/>
+          </p:cNvPicPr>
+          <p:nvPr/>
+        </p:nvPicPr>
+        <p:blipFill>
+          <a:blip r:embed="rId1"/>
+          <a:stretch>
+            <a:fillRect/>
+          </a:stretch>
+        </p:blipFill>
+        <p:spPr>
+          <a:xfrm>
+            <a:off x="548640" y="1143000"/>
+            <a:ext cx="3840480" cy="3840480"/>
+          </a:xfrm>
+          <a:prstGeom prst="rect">
+            <a:avLst/>
+          </a:prstGeom>
+        </p:spPr>
+      </p:pic>
+      <p:sp>
+        <p:nvSpPr>
+          <p:cNvPr id="6" name="Shape 3"/>
+          <p:cNvSpPr/>
+          <p:nvPr/>
+        </p:nvSpPr>
+        <p:spPr>
+          <a:xfrm>
+            <a:off x="4663440" y="1143000"/>
+            <a:ext cx="6976872" cy="2011680"/>
+          </a:xfrm>
+          <a:prstGeom prst="roundRect">
+            <a:avLst/>
+          </a:prstGeom>
+          <a:solidFill>
+            <a:srgbClr val="FFF8E1"/>
+          </a:solidFill>
+          <a:ln w="25400">
+            <a:solidFill>
+              <a:srgbClr val="FFA000"/>
+            </a:solidFill>
+            <a:prstDash val="solid"/>
+          </a:ln>
+        </p:spPr>
+      </p:sp>
+      <p:sp>
+        <p:nvSpPr>
+          <p:cNvPr id="7" name="Text 4"/>
+          <p:cNvSpPr/>
+          <p:nvPr/>
+        </p:nvSpPr>
+        <p:spPr>
+          <a:xfrm>
+            <a:off x="4846320" y="1216152"/>
+            <a:ext cx="6611112" cy="548640"/>
           </a:xfrm>
           <a:prstGeom prst="rect">
             <a:avLst/>
@@ -4012,14 +5287,53 @@
           <a:ln/>
         </p:spPr>
         <p:txBody>
-          <a:bodyPr wrap="square" rtlCol="0" anchor="t"/>
-          <a:lstStyle/>
-          <a:p>
-            <a:pPr marL="0" indent="0">
+          <a:bodyPr wrap="square" rtlCol="0" anchor="ctr"/>
+          <a:lstStyle/>
+          <a:p>
+            <a:pPr indent="0" marL="0">
               <a:buNone/>
             </a:pPr>
             <a:r>
-              <a:rPr lang="en-US" sz="1800" dirty="0">
+              <a:rPr lang="en-US" sz="1800" b="1" dirty="0">
+                <a:solidFill>
+                  <a:srgbClr val="1A237E"/>
+                </a:solidFill>
+                <a:latin typeface="Arial" pitchFamily="34" charset="0"/>
+                <a:ea typeface="Arial" pitchFamily="34" charset="-122"/>
+                <a:cs typeface="Arial" pitchFamily="34" charset="-120"/>
+              </a:rPr>
+              <a:t>Regla 100: deniega todo desde 0.0.0.0/0</a:t>
+            </a:r>
+            <a:endParaRPr lang="en-US" sz="1800" dirty="0"/>
+          </a:p>
+        </p:txBody>
+      </p:sp>
+      <p:sp>
+        <p:nvSpPr>
+          <p:cNvPr id="8" name="Text 5"/>
+          <p:cNvSpPr/>
+          <p:nvPr/>
+        </p:nvSpPr>
+        <p:spPr>
+          <a:xfrm>
+            <a:off x="4846320" y="1764792"/>
+            <a:ext cx="6611112" cy="1316736"/>
+          </a:xfrm>
+          <a:prstGeom prst="rect">
+            <a:avLst/>
+          </a:prstGeom>
+          <a:noFill/>
+          <a:ln/>
+        </p:spPr>
+        <p:txBody>
+          <a:bodyPr wrap="square" rtlCol="0" anchor="t"/>
+          <a:lstStyle/>
+          <a:p>
+            <a:pPr indent="0" marL="0">
+              <a:buNone/>
+            </a:pPr>
+            <a:r>
+              <a:rPr lang="en-US" sz="1500" dirty="0">
                 <a:solidFill>
                   <a:srgbClr val="212121"/>
                 </a:solidFill>
@@ -4027,36 +5341,115 @@
                 <a:ea typeface="Arial" pitchFamily="34" charset="-122"/>
                 <a:cs typeface="Arial" pitchFamily="34" charset="-120"/>
               </a:rPr>
-              <a:t>Imagina una NACL con la regla 100 denegando todo desde 0.0.0.0/0, y la regla 200 —añadida después— permitiendo el puerto 80 desde ese mismo origen. AWS evalúa en orden numérico y se queda con la primera que coincide: la 100 deniega antes de que la 200 actúe.</a:t>
+              <a:t>Regla 200 (añadida después): permite el puerto 80 desde ese mismo origen. AWS evalúa en orden numérico y se queda con la primera que coincide.</a:t>
+            </a:r>
+            <a:endParaRPr lang="en-US" sz="1500" dirty="0"/>
+          </a:p>
+        </p:txBody>
+      </p:sp>
+      <p:sp>
+        <p:nvSpPr>
+          <p:cNvPr id="9" name="Shape 6"/>
+          <p:cNvSpPr/>
+          <p:nvPr/>
+        </p:nvSpPr>
+        <p:spPr>
+          <a:xfrm>
+            <a:off x="4663440" y="3337560"/>
+            <a:ext cx="6976872" cy="2011680"/>
+          </a:xfrm>
+          <a:prstGeom prst="roundRect">
+            <a:avLst/>
+          </a:prstGeom>
+          <a:solidFill>
+            <a:srgbClr val="E8EAF6"/>
+          </a:solidFill>
+          <a:ln w="15875">
+            <a:solidFill>
+              <a:srgbClr val="3949AB"/>
+            </a:solidFill>
+            <a:prstDash val="solid"/>
+          </a:ln>
+        </p:spPr>
+      </p:sp>
+      <p:sp>
+        <p:nvSpPr>
+          <p:cNvPr id="10" name="Text 7"/>
+          <p:cNvSpPr/>
+          <p:nvPr/>
+        </p:nvSpPr>
+        <p:spPr>
+          <a:xfrm>
+            <a:off x="4846320" y="3410712"/>
+            <a:ext cx="6611112" cy="548640"/>
+          </a:xfrm>
+          <a:prstGeom prst="rect">
+            <a:avLst/>
+          </a:prstGeom>
+          <a:noFill/>
+          <a:ln/>
+        </p:spPr>
+        <p:txBody>
+          <a:bodyPr wrap="square" rtlCol="0" anchor="ctr"/>
+          <a:lstStyle/>
+          <a:p>
+            <a:pPr indent="0" marL="0">
+              <a:buNone/>
+            </a:pPr>
+            <a:r>
+              <a:rPr lang="en-US" sz="1800" b="1" dirty="0">
+                <a:solidFill>
+                  <a:srgbClr val="1A237E"/>
+                </a:solidFill>
+                <a:latin typeface="Arial" pitchFamily="34" charset="0"/>
+                <a:ea typeface="Arial" pitchFamily="34" charset="-122"/>
+                <a:cs typeface="Arial" pitchFamily="34" charset="-120"/>
+              </a:rPr>
+              <a:t>La 100 gana, aunque la 200 «diga que sí»</a:t>
             </a:r>
             <a:endParaRPr lang="en-US" sz="1800" dirty="0"/>
           </a:p>
         </p:txBody>
       </p:sp>
-      <p:pic>
-        <p:nvPicPr>
-          <p:cNvPr id="6" name="Image 0" descr="C:/Users/Aitor/Documents/apuntes-profe/introduccion-nube/docs/tema2/img/diagrama_nacl_orden.png"/>
-          <p:cNvPicPr>
-            <a:picLocks noChangeAspect="1"/>
-          </p:cNvPicPr>
-          <p:nvPr/>
-        </p:nvPicPr>
-        <p:blipFill>
-          <a:blip r:embed="rId3"/>
-          <a:stretch>
-            <a:fillRect/>
-          </a:stretch>
-        </p:blipFill>
-        <p:spPr>
-          <a:xfrm>
-            <a:off x="5448797" y="938661"/>
-            <a:ext cx="5412036" cy="5412036"/>
+      <p:sp>
+        <p:nvSpPr>
+          <p:cNvPr id="11" name="Text 8"/>
+          <p:cNvSpPr/>
+          <p:nvPr/>
+        </p:nvSpPr>
+        <p:spPr>
+          <a:xfrm>
+            <a:off x="4846320" y="3959352"/>
+            <a:ext cx="6611112" cy="1316736"/>
           </a:xfrm>
           <a:prstGeom prst="rect">
             <a:avLst/>
           </a:prstGeom>
-        </p:spPr>
-      </p:pic>
+          <a:noFill/>
+          <a:ln/>
+        </p:spPr>
+        <p:txBody>
+          <a:bodyPr wrap="square" rtlCol="0" anchor="t"/>
+          <a:lstStyle/>
+          <a:p>
+            <a:pPr indent="0" marL="0">
+              <a:buNone/>
+            </a:pPr>
+            <a:r>
+              <a:rPr lang="en-US" sz="1500" dirty="0">
+                <a:solidFill>
+                  <a:srgbClr val="212121"/>
+                </a:solidFill>
+                <a:latin typeface="Arial" pitchFamily="34" charset="0"/>
+                <a:ea typeface="Arial" pitchFamily="34" charset="-122"/>
+                <a:cs typeface="Arial" pitchFamily="34" charset="-120"/>
+              </a:rPr>
+              <a:t>El tráfico se bloquea igual. La solución no es borrar la 100 — es darle a la regla de permitir un número más bajo que el de la que deniega.</a:t>
+            </a:r>
+            <a:endParaRPr lang="en-US" sz="1500" dirty="0"/>
+          </a:p>
+        </p:txBody>
+      </p:sp>
     </p:spTree>
   </p:cSld>
   <p:clrMapOvr>
@@ -4106,13 +5499,6 @@
             <a:prstDash val="solid"/>
           </a:ln>
         </p:spPr>
-        <p:txBody>
-          <a:bodyPr/>
-          <a:lstStyle/>
-          <a:p>
-            <a:endParaRPr lang="es-ES"/>
-          </a:p>
-        </p:txBody>
       </p:sp>
       <p:sp>
         <p:nvSpPr>
@@ -4135,7 +5521,7 @@
           <a:bodyPr wrap="square" rtlCol="0" anchor="ctr"/>
           <a:lstStyle/>
           <a:p>
-            <a:pPr marL="0" indent="0">
+            <a:pPr indent="0" marL="0">
               <a:buNone/>
             </a:pPr>
             <a:r>
@@ -4147,7 +5533,7 @@
                 <a:ea typeface="Arial" pitchFamily="34" charset="-122"/>
                 <a:cs typeface="Arial" pitchFamily="34" charset="-120"/>
               </a:rPr>
-              <a:t>NAT: salida a internet sin permitir entrada</a:t>
+              <a:t>NAT y su coste</a:t>
             </a:r>
             <a:endParaRPr lang="en-US" sz="2400" dirty="0"/>
           </a:p>
@@ -4174,7 +5560,7 @@
           <a:bodyPr wrap="square" rtlCol="0" anchor="ctr"/>
           <a:lstStyle/>
           <a:p>
-            <a:pPr marL="0" indent="0" algn="r">
+            <a:pPr algn="r" indent="0" marL="0">
               <a:buNone/>
             </a:pPr>
             <a:r>
@@ -4194,14 +5580,39 @@
       </p:sp>
       <p:sp>
         <p:nvSpPr>
-          <p:cNvPr id="5" name="Text 3"/>
-          <p:cNvSpPr/>
-          <p:nvPr/>
-        </p:nvSpPr>
-        <p:spPr>
-          <a:xfrm>
-            <a:off x="548640" y="1463040"/>
-            <a:ext cx="11091672" cy="2011680"/>
+          <p:cNvPr id="5" name="Shape 3"/>
+          <p:cNvSpPr/>
+          <p:nvPr/>
+        </p:nvSpPr>
+        <p:spPr>
+          <a:xfrm>
+            <a:off x="548640" y="1143000"/>
+            <a:ext cx="11091672" cy="1005840"/>
+          </a:xfrm>
+          <a:prstGeom prst="roundRect">
+            <a:avLst/>
+          </a:prstGeom>
+          <a:solidFill>
+            <a:srgbClr val="FFF8E1"/>
+          </a:solidFill>
+          <a:ln w="19050">
+            <a:solidFill>
+              <a:srgbClr val="FFA000"/>
+            </a:solidFill>
+            <a:prstDash val="solid"/>
+          </a:ln>
+        </p:spPr>
+      </p:sp>
+      <p:sp>
+        <p:nvSpPr>
+          <p:cNvPr id="6" name="Text 4"/>
+          <p:cNvSpPr/>
+          <p:nvPr/>
+        </p:nvSpPr>
+        <p:spPr>
+          <a:xfrm>
+            <a:off x="822960" y="1234440"/>
+            <a:ext cx="10543032" cy="822960"/>
           </a:xfrm>
           <a:prstGeom prst="rect">
             <a:avLst/>
@@ -4210,14 +5621,14 @@
           <a:ln/>
         </p:spPr>
         <p:txBody>
-          <a:bodyPr wrap="square" rtlCol="0" anchor="t"/>
-          <a:lstStyle/>
-          <a:p>
-            <a:pPr marL="0" indent="0">
+          <a:bodyPr wrap="square" rtlCol="0" anchor="ctr"/>
+          <a:lstStyle/>
+          <a:p>
+            <a:pPr indent="0" marL="0">
               <a:buNone/>
             </a:pPr>
             <a:r>
-              <a:rPr lang="en-US" sz="2000" dirty="0">
+              <a:rPr lang="en-US" sz="1600" dirty="0">
                 <a:solidFill>
                   <a:srgbClr val="212121"/>
                 </a:solidFill>
@@ -4225,36 +5636,501 @@
                 <a:ea typeface="Arial" pitchFamily="34" charset="-122"/>
                 <a:cs typeface="Arial" pitchFamily="34" charset="-120"/>
               </a:rPr>
-              <a:t>Una subred privada no tiene ruta a la pasarela de internet, pero a veces necesita salir para actualizar software o llamar a un servicio externo, sin dejar de ser inalcanzable desde fuera. La pasarela NAT vive en una subred pública, y las privadas la usan como salida: el tráfico sale con la IP de la pasarela, nunca con la de la instancia privada.</a:t>
-            </a:r>
-            <a:endParaRPr lang="en-US" sz="2000" dirty="0"/>
-          </a:p>
-        </p:txBody>
-      </p:sp>
-      <p:pic>
-        <p:nvPicPr>
-          <p:cNvPr id="6" name="Image 0" descr="C:/Users/Aitor/docxgen/img/inu_nat_gateway.png"/>
-          <p:cNvPicPr>
-            <a:picLocks noChangeAspect="1"/>
-          </p:cNvPicPr>
-          <p:nvPr/>
-        </p:nvPicPr>
-        <p:blipFill>
-          <a:blip r:embed="rId3"/>
-          <a:stretch>
-            <a:fillRect/>
-          </a:stretch>
-        </p:blipFill>
-        <p:spPr>
-          <a:xfrm>
-            <a:off x="1424352" y="3246120"/>
-            <a:ext cx="9596533" cy="2426892"/>
+              <a:t>Una subred privada no tiene ruta a la pasarela de internet, así que tampoco puede salir. Pero a veces necesita salir —actualizar paquetes, llamar a un servicio externo— sin dejar de ser inalcanzable desde fuera.</a:t>
+            </a:r>
+            <a:endParaRPr lang="en-US" sz="1600" dirty="0"/>
+          </a:p>
+        </p:txBody>
+      </p:sp>
+      <p:sp>
+        <p:nvSpPr>
+          <p:cNvPr id="7" name="Shape 5"/>
+          <p:cNvSpPr/>
+          <p:nvPr/>
+        </p:nvSpPr>
+        <p:spPr>
+          <a:xfrm>
+            <a:off x="548640" y="2377440"/>
+            <a:ext cx="3422904" cy="1188720"/>
+          </a:xfrm>
+          <a:prstGeom prst="roundRect">
+            <a:avLst/>
+          </a:prstGeom>
+          <a:solidFill>
+            <a:srgbClr val="E8EAF6"/>
+          </a:solidFill>
+          <a:ln w="15875">
+            <a:solidFill>
+              <a:srgbClr val="3949AB"/>
+            </a:solidFill>
+            <a:prstDash val="solid"/>
+          </a:ln>
+        </p:spPr>
+      </p:sp>
+      <p:sp>
+        <p:nvSpPr>
+          <p:cNvPr id="8" name="Text 6"/>
+          <p:cNvSpPr/>
+          <p:nvPr/>
+        </p:nvSpPr>
+        <p:spPr>
+          <a:xfrm>
+            <a:off x="594360" y="2423160"/>
+            <a:ext cx="3331464" cy="1097280"/>
           </a:xfrm>
           <a:prstGeom prst="rect">
             <a:avLst/>
           </a:prstGeom>
-        </p:spPr>
-      </p:pic>
+          <a:noFill/>
+          <a:ln/>
+        </p:spPr>
+        <p:txBody>
+          <a:bodyPr wrap="square" rtlCol="0" anchor="ctr"/>
+          <a:lstStyle/>
+          <a:p>
+            <a:pPr algn="ctr" indent="0" marL="0">
+              <a:buNone/>
+            </a:pPr>
+            <a:r>
+              <a:rPr lang="en-US" sz="1700" dirty="0">
+                <a:solidFill>
+                  <a:srgbClr val="212121"/>
+                </a:solidFill>
+                <a:latin typeface="Arial" pitchFamily="34" charset="0"/>
+                <a:ea typeface="Arial" pitchFamily="34" charset="-122"/>
+                <a:cs typeface="Arial" pitchFamily="34" charset="-120"/>
+              </a:rPr>
+              <a:t>🔒 Instancia</a:t>
+            </a:r>
+            <a:endParaRPr lang="en-US" sz="1700" dirty="0"/>
+          </a:p>
+          <a:p>
+            <a:pPr algn="ctr" indent="0" marL="0">
+              <a:buNone/>
+            </a:pPr>
+            <a:r>
+              <a:rPr lang="en-US" sz="1700" dirty="0">
+                <a:solidFill>
+                  <a:srgbClr val="212121"/>
+                </a:solidFill>
+                <a:latin typeface="Arial" pitchFamily="34" charset="0"/>
+                <a:ea typeface="Arial" pitchFamily="34" charset="-122"/>
+                <a:cs typeface="Arial" pitchFamily="34" charset="-120"/>
+              </a:rPr>
+              <a:t>privada</a:t>
+            </a:r>
+            <a:endParaRPr lang="en-US" sz="1700" dirty="0"/>
+          </a:p>
+        </p:txBody>
+      </p:sp>
+      <p:sp>
+        <p:nvSpPr>
+          <p:cNvPr id="9" name="Text 7"/>
+          <p:cNvSpPr/>
+          <p:nvPr/>
+        </p:nvSpPr>
+        <p:spPr>
+          <a:xfrm>
+            <a:off x="3925824" y="2377440"/>
+            <a:ext cx="502920" cy="1188720"/>
+          </a:xfrm>
+          <a:prstGeom prst="rect">
+            <a:avLst/>
+          </a:prstGeom>
+          <a:noFill/>
+          <a:ln/>
+        </p:spPr>
+        <p:txBody>
+          <a:bodyPr wrap="square" rtlCol="0" anchor="ctr"/>
+          <a:lstStyle/>
+          <a:p>
+            <a:pPr algn="ctr" indent="0" marL="0">
+              <a:buNone/>
+            </a:pPr>
+            <a:r>
+              <a:rPr lang="en-US" sz="2200" b="1" dirty="0">
+                <a:solidFill>
+                  <a:srgbClr val="3949AB"/>
+                </a:solidFill>
+                <a:latin typeface="Arial" pitchFamily="34" charset="0"/>
+                <a:ea typeface="Arial" pitchFamily="34" charset="-122"/>
+                <a:cs typeface="Arial" pitchFamily="34" charset="-120"/>
+              </a:rPr>
+              <a:t>→</a:t>
+            </a:r>
+            <a:endParaRPr lang="en-US" sz="2200" dirty="0"/>
+          </a:p>
+        </p:txBody>
+      </p:sp>
+      <p:sp>
+        <p:nvSpPr>
+          <p:cNvPr id="10" name="Shape 8"/>
+          <p:cNvSpPr/>
+          <p:nvPr/>
+        </p:nvSpPr>
+        <p:spPr>
+          <a:xfrm>
+            <a:off x="4383024" y="2377440"/>
+            <a:ext cx="3422904" cy="1188720"/>
+          </a:xfrm>
+          <a:prstGeom prst="roundRect">
+            <a:avLst/>
+          </a:prstGeom>
+          <a:solidFill>
+            <a:srgbClr val="E8EAF6"/>
+          </a:solidFill>
+          <a:ln w="15875">
+            <a:solidFill>
+              <a:srgbClr val="3949AB"/>
+            </a:solidFill>
+            <a:prstDash val="solid"/>
+          </a:ln>
+        </p:spPr>
+      </p:sp>
+      <p:sp>
+        <p:nvSpPr>
+          <p:cNvPr id="11" name="Text 9"/>
+          <p:cNvSpPr/>
+          <p:nvPr/>
+        </p:nvSpPr>
+        <p:spPr>
+          <a:xfrm>
+            <a:off x="4428744" y="2423160"/>
+            <a:ext cx="3331464" cy="1097280"/>
+          </a:xfrm>
+          <a:prstGeom prst="rect">
+            <a:avLst/>
+          </a:prstGeom>
+          <a:noFill/>
+          <a:ln/>
+        </p:spPr>
+        <p:txBody>
+          <a:bodyPr wrap="square" rtlCol="0" anchor="ctr"/>
+          <a:lstStyle/>
+          <a:p>
+            <a:pPr algn="ctr" indent="0" marL="0">
+              <a:buNone/>
+            </a:pPr>
+            <a:r>
+              <a:rPr lang="en-US" sz="1700" dirty="0">
+                <a:solidFill>
+                  <a:srgbClr val="212121"/>
+                </a:solidFill>
+                <a:latin typeface="Arial" pitchFamily="34" charset="0"/>
+                <a:ea typeface="Arial" pitchFamily="34" charset="-122"/>
+                <a:cs typeface="Arial" pitchFamily="34" charset="-120"/>
+              </a:rPr>
+              <a:t>🚪 Pasarela NAT</a:t>
+            </a:r>
+            <a:endParaRPr lang="en-US" sz="1700" dirty="0"/>
+          </a:p>
+          <a:p>
+            <a:pPr algn="ctr" indent="0" marL="0">
+              <a:buNone/>
+            </a:pPr>
+            <a:r>
+              <a:rPr lang="en-US" sz="1700" dirty="0">
+                <a:solidFill>
+                  <a:srgbClr val="212121"/>
+                </a:solidFill>
+                <a:latin typeface="Arial" pitchFamily="34" charset="0"/>
+                <a:ea typeface="Arial" pitchFamily="34" charset="-122"/>
+                <a:cs typeface="Arial" pitchFamily="34" charset="-120"/>
+              </a:rPr>
+              <a:t>en subred pública</a:t>
+            </a:r>
+            <a:endParaRPr lang="en-US" sz="1700" dirty="0"/>
+          </a:p>
+        </p:txBody>
+      </p:sp>
+      <p:sp>
+        <p:nvSpPr>
+          <p:cNvPr id="12" name="Text 10"/>
+          <p:cNvSpPr/>
+          <p:nvPr/>
+        </p:nvSpPr>
+        <p:spPr>
+          <a:xfrm>
+            <a:off x="7760208" y="2377440"/>
+            <a:ext cx="502920" cy="1188720"/>
+          </a:xfrm>
+          <a:prstGeom prst="rect">
+            <a:avLst/>
+          </a:prstGeom>
+          <a:noFill/>
+          <a:ln/>
+        </p:spPr>
+        <p:txBody>
+          <a:bodyPr wrap="square" rtlCol="0" anchor="ctr"/>
+          <a:lstStyle/>
+          <a:p>
+            <a:pPr algn="ctr" indent="0" marL="0">
+              <a:buNone/>
+            </a:pPr>
+            <a:r>
+              <a:rPr lang="en-US" sz="2200" b="1" dirty="0">
+                <a:solidFill>
+                  <a:srgbClr val="3949AB"/>
+                </a:solidFill>
+                <a:latin typeface="Arial" pitchFamily="34" charset="0"/>
+                <a:ea typeface="Arial" pitchFamily="34" charset="-122"/>
+                <a:cs typeface="Arial" pitchFamily="34" charset="-120"/>
+              </a:rPr>
+              <a:t>→</a:t>
+            </a:r>
+            <a:endParaRPr lang="en-US" sz="2200" dirty="0"/>
+          </a:p>
+        </p:txBody>
+      </p:sp>
+      <p:sp>
+        <p:nvSpPr>
+          <p:cNvPr id="13" name="Shape 11"/>
+          <p:cNvSpPr/>
+          <p:nvPr/>
+        </p:nvSpPr>
+        <p:spPr>
+          <a:xfrm>
+            <a:off x="8217408" y="2377440"/>
+            <a:ext cx="3422904" cy="1188720"/>
+          </a:xfrm>
+          <a:prstGeom prst="roundRect">
+            <a:avLst/>
+          </a:prstGeom>
+          <a:solidFill>
+            <a:srgbClr val="E8EAF6"/>
+          </a:solidFill>
+          <a:ln w="15875">
+            <a:solidFill>
+              <a:srgbClr val="3949AB"/>
+            </a:solidFill>
+            <a:prstDash val="solid"/>
+          </a:ln>
+        </p:spPr>
+      </p:sp>
+      <p:sp>
+        <p:nvSpPr>
+          <p:cNvPr id="14" name="Text 12"/>
+          <p:cNvSpPr/>
+          <p:nvPr/>
+        </p:nvSpPr>
+        <p:spPr>
+          <a:xfrm>
+            <a:off x="8263128" y="2423160"/>
+            <a:ext cx="3331464" cy="1097280"/>
+          </a:xfrm>
+          <a:prstGeom prst="rect">
+            <a:avLst/>
+          </a:prstGeom>
+          <a:noFill/>
+          <a:ln/>
+        </p:spPr>
+        <p:txBody>
+          <a:bodyPr wrap="square" rtlCol="0" anchor="ctr"/>
+          <a:lstStyle/>
+          <a:p>
+            <a:pPr algn="ctr" indent="0" marL="0">
+              <a:buNone/>
+            </a:pPr>
+            <a:r>
+              <a:rPr lang="en-US" sz="1700" dirty="0">
+                <a:solidFill>
+                  <a:srgbClr val="212121"/>
+                </a:solidFill>
+                <a:latin typeface="Arial" pitchFamily="34" charset="0"/>
+                <a:ea typeface="Arial" pitchFamily="34" charset="-122"/>
+                <a:cs typeface="Arial" pitchFamily="34" charset="-120"/>
+              </a:rPr>
+              <a:t>🌍 Internet</a:t>
+            </a:r>
+            <a:endParaRPr lang="en-US" sz="1700" dirty="0"/>
+          </a:p>
+        </p:txBody>
+      </p:sp>
+      <p:sp>
+        <p:nvSpPr>
+          <p:cNvPr id="15" name="Shape 13"/>
+          <p:cNvSpPr/>
+          <p:nvPr/>
+        </p:nvSpPr>
+        <p:spPr>
+          <a:xfrm>
+            <a:off x="548640" y="3794760"/>
+            <a:ext cx="11091672" cy="1097280"/>
+          </a:xfrm>
+          <a:prstGeom prst="roundRect">
+            <a:avLst/>
+          </a:prstGeom>
+          <a:solidFill>
+            <a:srgbClr val="E8EAF6"/>
+          </a:solidFill>
+          <a:ln w="15875">
+            <a:solidFill>
+              <a:srgbClr val="3949AB"/>
+            </a:solidFill>
+            <a:prstDash val="solid"/>
+          </a:ln>
+        </p:spPr>
+      </p:sp>
+      <p:sp>
+        <p:nvSpPr>
+          <p:cNvPr id="16" name="Text 14"/>
+          <p:cNvSpPr/>
+          <p:nvPr/>
+        </p:nvSpPr>
+        <p:spPr>
+          <a:xfrm>
+            <a:off x="731520" y="3867912"/>
+            <a:ext cx="10725912" cy="548640"/>
+          </a:xfrm>
+          <a:prstGeom prst="rect">
+            <a:avLst/>
+          </a:prstGeom>
+          <a:noFill/>
+          <a:ln/>
+        </p:spPr>
+        <p:txBody>
+          <a:bodyPr wrap="square" rtlCol="0" anchor="ctr"/>
+          <a:lstStyle/>
+          <a:p>
+            <a:pPr indent="0" marL="0">
+              <a:buNone/>
+            </a:pPr>
+            <a:r>
+              <a:rPr lang="en-US" sz="1900" b="1" dirty="0">
+                <a:solidFill>
+                  <a:srgbClr val="1A237E"/>
+                </a:solidFill>
+                <a:latin typeface="Arial" pitchFamily="34" charset="0"/>
+                <a:ea typeface="Arial" pitchFamily="34" charset="-122"/>
+                <a:cs typeface="Arial" pitchFamily="34" charset="-120"/>
+              </a:rPr>
+              <a:t>El tráfico sale con la IP de la pasarela</a:t>
+            </a:r>
+            <a:endParaRPr lang="en-US" sz="1900" dirty="0"/>
+          </a:p>
+        </p:txBody>
+      </p:sp>
+      <p:sp>
+        <p:nvSpPr>
+          <p:cNvPr id="17" name="Text 15"/>
+          <p:cNvSpPr/>
+          <p:nvPr/>
+        </p:nvSpPr>
+        <p:spPr>
+          <a:xfrm>
+            <a:off x="731520" y="4416552"/>
+            <a:ext cx="10725912" cy="402336"/>
+          </a:xfrm>
+          <a:prstGeom prst="rect">
+            <a:avLst/>
+          </a:prstGeom>
+          <a:noFill/>
+          <a:ln/>
+        </p:spPr>
+        <p:txBody>
+          <a:bodyPr wrap="square" rtlCol="0" anchor="t"/>
+          <a:lstStyle/>
+          <a:p>
+            <a:pPr indent="0" marL="0">
+              <a:buNone/>
+            </a:pPr>
+            <a:r>
+              <a:rPr lang="en-US" sz="1600" dirty="0">
+                <a:solidFill>
+                  <a:srgbClr val="212121"/>
+                </a:solidFill>
+                <a:latin typeface="Arial" pitchFamily="34" charset="0"/>
+                <a:ea typeface="Arial" pitchFamily="34" charset="-122"/>
+                <a:cs typeface="Arial" pitchFamily="34" charset="-120"/>
+              </a:rPr>
+              <a:t>Nunca con la de la instancia privada, así que nadie de fuera puede iniciar una conexión de vuelta hacia ella.</a:t>
+            </a:r>
+            <a:endParaRPr lang="en-US" sz="1600" dirty="0"/>
+          </a:p>
+        </p:txBody>
+      </p:sp>
+      <p:sp>
+        <p:nvSpPr>
+          <p:cNvPr id="18" name="Shape 16"/>
+          <p:cNvSpPr/>
+          <p:nvPr/>
+        </p:nvSpPr>
+        <p:spPr>
+          <a:xfrm>
+            <a:off x="548640" y="5074920"/>
+            <a:ext cx="11091672" cy="1234440"/>
+          </a:xfrm>
+          <a:prstGeom prst="roundRect">
+            <a:avLst/>
+          </a:prstGeom>
+          <a:solidFill>
+            <a:srgbClr val="FFF8E1"/>
+          </a:solidFill>
+          <a:ln w="28575">
+            <a:solidFill>
+              <a:srgbClr val="FFA000"/>
+            </a:solidFill>
+            <a:prstDash val="solid"/>
+          </a:ln>
+        </p:spPr>
+      </p:sp>
+      <p:sp>
+        <p:nvSpPr>
+          <p:cNvPr id="19" name="Text 17"/>
+          <p:cNvSpPr/>
+          <p:nvPr/>
+        </p:nvSpPr>
+        <p:spPr>
+          <a:xfrm>
+            <a:off x="822960" y="5184648"/>
+            <a:ext cx="10543032" cy="1014984"/>
+          </a:xfrm>
+          <a:prstGeom prst="rect">
+            <a:avLst/>
+          </a:prstGeom>
+          <a:noFill/>
+          <a:ln/>
+        </p:spPr>
+        <p:txBody>
+          <a:bodyPr wrap="square" rtlCol="0" anchor="t"/>
+          <a:lstStyle/>
+          <a:p>
+            <a:pPr indent="0" marL="0">
+              <a:buNone/>
+            </a:pPr>
+            <a:r>
+              <a:rPr lang="en-US" sz="1700" b="1" dirty="0">
+                <a:solidFill>
+                  <a:srgbClr val="1A237E"/>
+                </a:solidFill>
+                <a:latin typeface="Arial" pitchFamily="34" charset="0"/>
+                <a:ea typeface="Arial" pitchFamily="34" charset="-122"/>
+                <a:cs typeface="Arial" pitchFamily="34" charset="-120"/>
+              </a:rPr>
+              <a:t>La pasarela NAT no es gratis
+</a:t>
+            </a:r>
+            <a:endParaRPr lang="en-US" sz="1700" dirty="0"/>
+          </a:p>
+          <a:p>
+            <a:pPr indent="0" marL="0">
+              <a:buNone/>
+            </a:pPr>
+            <a:r>
+              <a:rPr lang="en-US" sz="1600" dirty="0">
+                <a:solidFill>
+                  <a:srgbClr val="212121"/>
+                </a:solidFill>
+                <a:latin typeface="Arial" pitchFamily="34" charset="0"/>
+                <a:ea typeface="Arial" pitchFamily="34" charset="-122"/>
+                <a:cs typeface="Arial" pitchFamily="34" charset="-120"/>
+              </a:rPr>
+              <a:t>A diferencia de la de internet, cobra por hora encendida y por GB. Suele ser una de las líneas más caras de una arquitectura pequeña — lo calcularás en la Actividad 2.2.</a:t>
+            </a:r>
+            <a:endParaRPr lang="en-US" sz="1700" dirty="0"/>
+          </a:p>
+        </p:txBody>
+      </p:sp>
     </p:spTree>
   </p:cSld>
   <p:clrMapOvr>
@@ -4304,13 +6180,6 @@
             <a:prstDash val="solid"/>
           </a:ln>
         </p:spPr>
-        <p:txBody>
-          <a:bodyPr/>
-          <a:lstStyle/>
-          <a:p>
-            <a:endParaRPr lang="es-ES"/>
-          </a:p>
-        </p:txBody>
       </p:sp>
       <p:sp>
         <p:nvSpPr>
@@ -4333,7 +6202,7 @@
           <a:bodyPr wrap="square" rtlCol="0" anchor="ctr"/>
           <a:lstStyle/>
           <a:p>
-            <a:pPr marL="0" indent="0">
+            <a:pPr indent="0" marL="0">
               <a:buNone/>
             </a:pPr>
             <a:r>
@@ -4345,7 +6214,7 @@
                 <a:ea typeface="Arial" pitchFamily="34" charset="-122"/>
                 <a:cs typeface="Arial" pitchFamily="34" charset="-120"/>
               </a:rPr>
-              <a:t>La pasarela NAT no es gratis</a:t>
+              <a:t>Arquitectura en capas: borde, aplicación y datos</a:t>
             </a:r>
             <a:endParaRPr lang="en-US" sz="2400" dirty="0"/>
           </a:p>
@@ -4372,7 +6241,7 @@
           <a:bodyPr wrap="square" rtlCol="0" anchor="ctr"/>
           <a:lstStyle/>
           <a:p>
-            <a:pPr marL="0" indent="0" algn="r">
+            <a:pPr algn="r" indent="0" marL="0">
               <a:buNone/>
             </a:pPr>
             <a:r>
@@ -4398,8 +6267,8 @@
         </p:nvSpPr>
         <p:spPr>
           <a:xfrm>
-            <a:off x="548640" y="2194560"/>
-            <a:ext cx="11091672" cy="2743200"/>
+            <a:off x="548640" y="1143000"/>
+            <a:ext cx="11091672" cy="960120"/>
           </a:xfrm>
           <a:prstGeom prst="roundRect">
             <a:avLst/>
@@ -4407,20 +6276,13 @@
           <a:solidFill>
             <a:srgbClr val="FFF8E1"/>
           </a:solidFill>
-          <a:ln w="28575">
+          <a:ln w="19050">
             <a:solidFill>
               <a:srgbClr val="FFA000"/>
             </a:solidFill>
             <a:prstDash val="solid"/>
           </a:ln>
         </p:spPr>
-        <p:txBody>
-          <a:bodyPr/>
-          <a:lstStyle/>
-          <a:p>
-            <a:endParaRPr lang="es-ES"/>
-          </a:p>
-        </p:txBody>
       </p:sp>
       <p:sp>
         <p:nvSpPr>
@@ -4430,8 +6292,8 @@
         </p:nvSpPr>
         <p:spPr>
           <a:xfrm>
-            <a:off x="822960" y="2304288"/>
-            <a:ext cx="10543032" cy="2523744"/>
+            <a:off x="822960" y="1234440"/>
+            <a:ext cx="10543032" cy="777240"/>
           </a:xfrm>
           <a:prstGeom prst="rect">
             <a:avLst/>
@@ -4440,32 +6302,14 @@
           <a:ln/>
         </p:spPr>
         <p:txBody>
-          <a:bodyPr wrap="square" rtlCol="0" anchor="t"/>
-          <a:lstStyle/>
-          <a:p>
-            <a:pPr marL="0" indent="0">
+          <a:bodyPr wrap="square" rtlCol="0" anchor="ctr"/>
+          <a:lstStyle/>
+          <a:p>
+            <a:pPr indent="0" marL="0">
               <a:buNone/>
             </a:pPr>
             <a:r>
-              <a:rPr lang="en-US" sz="2300" b="1" dirty="0">
-                <a:solidFill>
-                  <a:srgbClr val="1A237E"/>
-                </a:solidFill>
-                <a:latin typeface="Arial" pitchFamily="34" charset="0"/>
-                <a:ea typeface="Arial" pitchFamily="34" charset="-122"/>
-                <a:cs typeface="Arial" pitchFamily="34" charset="-120"/>
-              </a:rPr>
-              <a:t>💰 Se paga por horas y por GB
-</a:t>
-            </a:r>
-            <a:endParaRPr lang="en-US" sz="2300" dirty="0"/>
-          </a:p>
-          <a:p>
-            <a:pPr marL="0" indent="0">
-              <a:buNone/>
-            </a:pPr>
-            <a:r>
-              <a:rPr lang="en-US" sz="2200" dirty="0">
+              <a:rPr lang="en-US" sz="1500" dirty="0">
                 <a:solidFill>
                   <a:srgbClr val="212121"/>
                 </a:solidFill>
@@ -4473,12 +6317,618 @@
                 <a:ea typeface="Arial" pitchFamily="34" charset="-122"/>
                 <a:cs typeface="Arial" pitchFamily="34" charset="-120"/>
               </a:rPr>
-              <a:t>A diferencia de la pasarela de internet (sin coste propio), la pasarela NAT cobra por cada hora encendida y por cada GB que pasa a su través — suele ser una de las líneas más caras de una arquitectura pequeña. En la Actividad 2.2 vas a calcular su coste mensual real.</a:t>
-            </a:r>
-            <a:endParaRPr lang="en-US" sz="2300" dirty="0"/>
-          </a:p>
-        </p:txBody>
-      </p:sp>
+              <a:t>Con SG, NACL y NAT ya puedes construir el patrón que repetirás en cada arquitectura: capas concéntricas donde cada una solo habla con la de al lado, nunca se salta ninguna.</a:t>
+            </a:r>
+            <a:endParaRPr lang="en-US" sz="1500" dirty="0"/>
+          </a:p>
+        </p:txBody>
+      </p:sp>
+      <p:pic>
+        <p:nvPicPr>
+          <p:cNvPr id="7" name="Image 0" descr="C:/Users/Aitor/Documents/apuntes-profe/introduccion-nube/docs/tema2/img/diagrama_arquitectura_capas.png">    </p:cNvPr>
+          <p:cNvPicPr>
+            <a:picLocks noChangeAspect="1"/>
+          </p:cNvPicPr>
+          <p:nvPr/>
+        </p:nvPicPr>
+        <p:blipFill>
+          <a:blip r:embed="rId1"/>
+          <a:stretch>
+            <a:fillRect/>
+          </a:stretch>
+        </p:blipFill>
+        <p:spPr>
+          <a:xfrm>
+            <a:off x="3534156" y="2286000"/>
+            <a:ext cx="5120640" cy="2560320"/>
+          </a:xfrm>
+          <a:prstGeom prst="rect">
+            <a:avLst/>
+          </a:prstGeom>
+        </p:spPr>
+      </p:pic>
+      <p:graphicFrame>
+        <p:nvGraphicFramePr>
+          <p:cNvPr id="8" name="Table 0"/>
+          <p:cNvGraphicFramePr>
+            <a:graphicFrameLocks noGrp="1"/>
+          </p:cNvGraphicFramePr>
+          <p:nvPr>
+            <p:extLst>
+              <p:ext uri="{D42A27DB-BD31-4B8C-83A1-F6EECF244321}">
+                <p14:modId xmlns:p14="http://schemas.microsoft.com/office/powerpoint/2010/main" val="1579011935"/>
+              </p:ext>
+            </p:extLst>
+          </p:nvPr>
+        </p:nvGraphicFramePr>
+        <p:xfrm>
+          <a:off x="548640" y="5074920"/>
+          <a:ext cx="11091672" cy="914400"/>
+        </p:xfrm>
+        <a:graphic>
+          <a:graphicData uri="http://schemas.openxmlformats.org/drawingml/2006/table">
+            <a:tbl>
+              <a:tblPr/>
+              <a:tblGrid>
+                <a:gridCol w="1774668"/>
+                <a:gridCol w="9317004"/>
+              </a:tblGrid>
+              <a:tr h="365760">
+                <a:tc>
+                  <a:txBody>
+                    <a:bodyPr/>
+                    <a:lstStyle/>
+                    <a:p>
+                      <a:pPr algn="ctr" indent="0" marL="0">
+                        <a:buNone/>
+                      </a:pPr>
+                      <a:r>
+                        <a:rPr lang="en-US" sz="1300" b="1" dirty="0">
+                          <a:solidFill>
+                            <a:srgbClr val="FFFFFF"/>
+                          </a:solidFill>
+                          <a:latin typeface="Arial" pitchFamily="34" charset="0"/>
+                          <a:ea typeface="Arial" pitchFamily="34" charset="-122"/>
+                          <a:cs typeface="Arial" pitchFamily="34" charset="-120"/>
+                        </a:rPr>
+                        <a:t>Puerto</a:t>
+                      </a:r>
+                      <a:endParaRPr lang="en-US" sz="1300" dirty="0">
+                        <a:latin typeface="Arial" charset="0"/>
+                        <a:ea typeface="Arial" charset="0"/>
+                        <a:cs typeface="Arial" charset="0"/>
+                      </a:endParaRPr>
+                    </a:p>
+                  </a:txBody>
+                  <a:tcPr marL="91440" marR="91440" marT="45720" marB="45720" anchor="ctr">
+                    <a:lnL w="12700" cap="flat" cmpd="sng" algn="ctr">
+                      <a:solidFill>
+                        <a:srgbClr val="EEEEEE"/>
+                      </a:solidFill>
+                      <a:prstDash val="solid"/>
+                      <a:round/>
+                      <a:headEnd type="none" w="med" len="med"/>
+                      <a:tailEnd type="none" w="med" len="med"/>
+                    </a:lnL>
+                    <a:lnR w="12700" cap="flat" cmpd="sng" algn="ctr">
+                      <a:solidFill>
+                        <a:srgbClr val="EEEEEE"/>
+                      </a:solidFill>
+                      <a:prstDash val="solid"/>
+                      <a:round/>
+                      <a:headEnd type="none" w="med" len="med"/>
+                      <a:tailEnd type="none" w="med" len="med"/>
+                    </a:lnR>
+                    <a:lnT w="12700" cap="flat" cmpd="sng" algn="ctr">
+                      <a:solidFill>
+                        <a:srgbClr val="EEEEEE"/>
+                      </a:solidFill>
+                      <a:prstDash val="solid"/>
+                      <a:round/>
+                      <a:headEnd type="none" w="med" len="med"/>
+                      <a:tailEnd type="none" w="med" len="med"/>
+                    </a:lnT>
+                    <a:lnB w="12700" cap="flat" cmpd="sng" algn="ctr">
+                      <a:solidFill>
+                        <a:srgbClr val="EEEEEE"/>
+                      </a:solidFill>
+                      <a:prstDash val="solid"/>
+                      <a:round/>
+                      <a:headEnd type="none" w="med" len="med"/>
+                      <a:tailEnd type="none" w="med" len="med"/>
+                    </a:lnB>
+                    <a:solidFill>
+                      <a:srgbClr val="3949AB"/>
+                    </a:solidFill>
+                  </a:tcPr>
+                </a:tc>
+                <a:tc>
+                  <a:txBody>
+                    <a:bodyPr/>
+                    <a:lstStyle/>
+                    <a:p>
+                      <a:pPr algn="ctr" indent="0" marL="0">
+                        <a:buNone/>
+                      </a:pPr>
+                      <a:r>
+                        <a:rPr lang="en-US" sz="1300" b="1" dirty="0">
+                          <a:solidFill>
+                            <a:srgbClr val="FFFFFF"/>
+                          </a:solidFill>
+                          <a:latin typeface="Arial" pitchFamily="34" charset="0"/>
+                          <a:ea typeface="Arial" pitchFamily="34" charset="-122"/>
+                          <a:cs typeface="Arial" pitchFamily="34" charset="-120"/>
+                        </a:rPr>
+                        <a:t>Qué es</a:t>
+                      </a:r>
+                      <a:endParaRPr lang="en-US" sz="1300" dirty="0">
+                        <a:latin typeface="Arial" charset="0"/>
+                        <a:ea typeface="Arial" charset="0"/>
+                        <a:cs typeface="Arial" charset="0"/>
+                      </a:endParaRPr>
+                    </a:p>
+                  </a:txBody>
+                  <a:tcPr marL="91440" marR="91440" marT="45720" marB="45720" anchor="ctr">
+                    <a:lnL w="12700" cap="flat" cmpd="sng" algn="ctr">
+                      <a:solidFill>
+                        <a:srgbClr val="EEEEEE"/>
+                      </a:solidFill>
+                      <a:prstDash val="solid"/>
+                      <a:round/>
+                      <a:headEnd type="none" w="med" len="med"/>
+                      <a:tailEnd type="none" w="med" len="med"/>
+                    </a:lnL>
+                    <a:lnR w="12700" cap="flat" cmpd="sng" algn="ctr">
+                      <a:solidFill>
+                        <a:srgbClr val="EEEEEE"/>
+                      </a:solidFill>
+                      <a:prstDash val="solid"/>
+                      <a:round/>
+                      <a:headEnd type="none" w="med" len="med"/>
+                      <a:tailEnd type="none" w="med" len="med"/>
+                    </a:lnR>
+                    <a:lnT w="12700" cap="flat" cmpd="sng" algn="ctr">
+                      <a:solidFill>
+                        <a:srgbClr val="EEEEEE"/>
+                      </a:solidFill>
+                      <a:prstDash val="solid"/>
+                      <a:round/>
+                      <a:headEnd type="none" w="med" len="med"/>
+                      <a:tailEnd type="none" w="med" len="med"/>
+                    </a:lnT>
+                    <a:lnB w="12700" cap="flat" cmpd="sng" algn="ctr">
+                      <a:solidFill>
+                        <a:srgbClr val="EEEEEE"/>
+                      </a:solidFill>
+                      <a:prstDash val="solid"/>
+                      <a:round/>
+                      <a:headEnd type="none" w="med" len="med"/>
+                      <a:tailEnd type="none" w="med" len="med"/>
+                    </a:lnB>
+                    <a:solidFill>
+                      <a:srgbClr val="3949AB"/>
+                    </a:solidFill>
+                  </a:tcPr>
+                </a:tc>
+              </a:tr>
+              <a:tr h="365760">
+                <a:tc>
+                  <a:txBody>
+                    <a:bodyPr/>
+                    <a:lstStyle/>
+                    <a:p>
+                      <a:pPr indent="0" marL="0">
+                        <a:buNone/>
+                      </a:pPr>
+                      <a:r>
+                        <a:rPr lang="en-US" sz="1200" b="1" dirty="0">
+                          <a:solidFill>
+                            <a:srgbClr val="212121"/>
+                          </a:solidFill>
+                          <a:latin typeface="Arial" pitchFamily="34" charset="0"/>
+                          <a:ea typeface="Arial" pitchFamily="34" charset="-122"/>
+                          <a:cs typeface="Arial" pitchFamily="34" charset="-120"/>
+                        </a:rPr>
+                        <a:t>80</a:t>
+                      </a:r>
+                      <a:endParaRPr lang="en-US" sz="1200" dirty="0">
+                        <a:latin typeface="Arial" charset="0"/>
+                        <a:ea typeface="Arial" charset="0"/>
+                        <a:cs typeface="Arial" charset="0"/>
+                      </a:endParaRPr>
+                    </a:p>
+                  </a:txBody>
+                  <a:tcPr marL="91440" marR="91440" marT="45720" marB="45720" anchor="ctr">
+                    <a:lnL w="12700" cap="flat" cmpd="sng" algn="ctr">
+                      <a:solidFill>
+                        <a:srgbClr val="EEEEEE"/>
+                      </a:solidFill>
+                      <a:prstDash val="solid"/>
+                      <a:round/>
+                      <a:headEnd type="none" w="med" len="med"/>
+                      <a:tailEnd type="none" w="med" len="med"/>
+                    </a:lnL>
+                    <a:lnR w="12700" cap="flat" cmpd="sng" algn="ctr">
+                      <a:solidFill>
+                        <a:srgbClr val="EEEEEE"/>
+                      </a:solidFill>
+                      <a:prstDash val="solid"/>
+                      <a:round/>
+                      <a:headEnd type="none" w="med" len="med"/>
+                      <a:tailEnd type="none" w="med" len="med"/>
+                    </a:lnR>
+                    <a:lnT w="12700" cap="flat" cmpd="sng" algn="ctr">
+                      <a:solidFill>
+                        <a:srgbClr val="EEEEEE"/>
+                      </a:solidFill>
+                      <a:prstDash val="solid"/>
+                      <a:round/>
+                      <a:headEnd type="none" w="med" len="med"/>
+                      <a:tailEnd type="none" w="med" len="med"/>
+                    </a:lnT>
+                    <a:lnB w="12700" cap="flat" cmpd="sng" algn="ctr">
+                      <a:solidFill>
+                        <a:srgbClr val="EEEEEE"/>
+                      </a:solidFill>
+                      <a:prstDash val="solid"/>
+                      <a:round/>
+                      <a:headEnd type="none" w="med" len="med"/>
+                      <a:tailEnd type="none" w="med" len="med"/>
+                    </a:lnB>
+                    <a:solidFill>
+                      <a:srgbClr val="FFFFFF"/>
+                    </a:solidFill>
+                  </a:tcPr>
+                </a:tc>
+                <a:tc>
+                  <a:txBody>
+                    <a:bodyPr/>
+                    <a:lstStyle/>
+                    <a:p>
+                      <a:pPr indent="0" marL="0">
+                        <a:buNone/>
+                      </a:pPr>
+                      <a:r>
+                        <a:rPr lang="en-US" sz="1200" dirty="0">
+                          <a:solidFill>
+                            <a:srgbClr val="212121"/>
+                          </a:solidFill>
+                          <a:latin typeface="Arial" pitchFamily="34" charset="0"/>
+                          <a:ea typeface="Arial" pitchFamily="34" charset="-122"/>
+                          <a:cs typeface="Arial" pitchFamily="34" charset="-120"/>
+                        </a:rPr>
+                        <a:t>El puerto estándar de un servidor web</a:t>
+                      </a:r>
+                      <a:endParaRPr lang="en-US" sz="1200" dirty="0">
+                        <a:latin typeface="Arial" charset="0"/>
+                        <a:ea typeface="Arial" charset="0"/>
+                        <a:cs typeface="Arial" charset="0"/>
+                      </a:endParaRPr>
+                    </a:p>
+                  </a:txBody>
+                  <a:tcPr marL="91440" marR="91440" marT="45720" marB="45720" anchor="ctr">
+                    <a:lnL w="12700" cap="flat" cmpd="sng" algn="ctr">
+                      <a:solidFill>
+                        <a:srgbClr val="EEEEEE"/>
+                      </a:solidFill>
+                      <a:prstDash val="solid"/>
+                      <a:round/>
+                      <a:headEnd type="none" w="med" len="med"/>
+                      <a:tailEnd type="none" w="med" len="med"/>
+                    </a:lnL>
+                    <a:lnR w="12700" cap="flat" cmpd="sng" algn="ctr">
+                      <a:solidFill>
+                        <a:srgbClr val="EEEEEE"/>
+                      </a:solidFill>
+                      <a:prstDash val="solid"/>
+                      <a:round/>
+                      <a:headEnd type="none" w="med" len="med"/>
+                      <a:tailEnd type="none" w="med" len="med"/>
+                    </a:lnR>
+                    <a:lnT w="12700" cap="flat" cmpd="sng" algn="ctr">
+                      <a:solidFill>
+                        <a:srgbClr val="EEEEEE"/>
+                      </a:solidFill>
+                      <a:prstDash val="solid"/>
+                      <a:round/>
+                      <a:headEnd type="none" w="med" len="med"/>
+                      <a:tailEnd type="none" w="med" len="med"/>
+                    </a:lnT>
+                    <a:lnB w="12700" cap="flat" cmpd="sng" algn="ctr">
+                      <a:solidFill>
+                        <a:srgbClr val="EEEEEE"/>
+                      </a:solidFill>
+                      <a:prstDash val="solid"/>
+                      <a:round/>
+                      <a:headEnd type="none" w="med" len="med"/>
+                      <a:tailEnd type="none" w="med" len="med"/>
+                    </a:lnB>
+                    <a:solidFill>
+                      <a:srgbClr val="FFFFFF"/>
+                    </a:solidFill>
+                  </a:tcPr>
+                </a:tc>
+              </a:tr>
+              <a:tr h="365760">
+                <a:tc>
+                  <a:txBody>
+                    <a:bodyPr/>
+                    <a:lstStyle/>
+                    <a:p>
+                      <a:pPr indent="0" marL="0">
+                        <a:buNone/>
+                      </a:pPr>
+                      <a:r>
+                        <a:rPr lang="en-US" sz="1200" b="1" dirty="0">
+                          <a:solidFill>
+                            <a:srgbClr val="212121"/>
+                          </a:solidFill>
+                          <a:latin typeface="Arial" pitchFamily="34" charset="0"/>
+                          <a:ea typeface="Arial" pitchFamily="34" charset="-122"/>
+                          <a:cs typeface="Arial" pitchFamily="34" charset="-120"/>
+                        </a:rPr>
+                        <a:t>3000</a:t>
+                      </a:r>
+                      <a:endParaRPr lang="en-US" sz="1200" dirty="0">
+                        <a:latin typeface="Arial" charset="0"/>
+                        <a:ea typeface="Arial" charset="0"/>
+                        <a:cs typeface="Arial" charset="0"/>
+                      </a:endParaRPr>
+                    </a:p>
+                  </a:txBody>
+                  <a:tcPr marL="91440" marR="91440" marT="45720" marB="45720" anchor="ctr">
+                    <a:lnL w="12700" cap="flat" cmpd="sng" algn="ctr">
+                      <a:solidFill>
+                        <a:srgbClr val="EEEEEE"/>
+                      </a:solidFill>
+                      <a:prstDash val="solid"/>
+                      <a:round/>
+                      <a:headEnd type="none" w="med" len="med"/>
+                      <a:tailEnd type="none" w="med" len="med"/>
+                    </a:lnL>
+                    <a:lnR w="12700" cap="flat" cmpd="sng" algn="ctr">
+                      <a:solidFill>
+                        <a:srgbClr val="EEEEEE"/>
+                      </a:solidFill>
+                      <a:prstDash val="solid"/>
+                      <a:round/>
+                      <a:headEnd type="none" w="med" len="med"/>
+                      <a:tailEnd type="none" w="med" len="med"/>
+                    </a:lnR>
+                    <a:lnT w="12700" cap="flat" cmpd="sng" algn="ctr">
+                      <a:solidFill>
+                        <a:srgbClr val="EEEEEE"/>
+                      </a:solidFill>
+                      <a:prstDash val="solid"/>
+                      <a:round/>
+                      <a:headEnd type="none" w="med" len="med"/>
+                      <a:tailEnd type="none" w="med" len="med"/>
+                    </a:lnT>
+                    <a:lnB w="12700" cap="flat" cmpd="sng" algn="ctr">
+                      <a:solidFill>
+                        <a:srgbClr val="EEEEEE"/>
+                      </a:solidFill>
+                      <a:prstDash val="solid"/>
+                      <a:round/>
+                      <a:headEnd type="none" w="med" len="med"/>
+                      <a:tailEnd type="none" w="med" len="med"/>
+                    </a:lnB>
+                    <a:solidFill>
+                      <a:srgbClr val="F5F5F5"/>
+                    </a:solidFill>
+                  </a:tcPr>
+                </a:tc>
+                <a:tc>
+                  <a:txBody>
+                    <a:bodyPr/>
+                    <a:lstStyle/>
+                    <a:p>
+                      <a:pPr indent="0" marL="0">
+                        <a:buNone/>
+                      </a:pPr>
+                      <a:r>
+                        <a:rPr lang="en-US" sz="1200" dirty="0">
+                          <a:solidFill>
+                            <a:srgbClr val="212121"/>
+                          </a:solidFill>
+                          <a:latin typeface="Arial" pitchFamily="34" charset="0"/>
+                          <a:ea typeface="Arial" pitchFamily="34" charset="-122"/>
+                          <a:cs typeface="Arial" pitchFamily="34" charset="-120"/>
+                        </a:rPr>
+                        <a:t>No es «oficial»: lo elige el desarrollador del servidor de aplicación</a:t>
+                      </a:r>
+                      <a:endParaRPr lang="en-US" sz="1200" dirty="0">
+                        <a:latin typeface="Arial" charset="0"/>
+                        <a:ea typeface="Arial" charset="0"/>
+                        <a:cs typeface="Arial" charset="0"/>
+                      </a:endParaRPr>
+                    </a:p>
+                  </a:txBody>
+                  <a:tcPr marL="91440" marR="91440" marT="45720" marB="45720" anchor="ctr">
+                    <a:lnL w="12700" cap="flat" cmpd="sng" algn="ctr">
+                      <a:solidFill>
+                        <a:srgbClr val="EEEEEE"/>
+                      </a:solidFill>
+                      <a:prstDash val="solid"/>
+                      <a:round/>
+                      <a:headEnd type="none" w="med" len="med"/>
+                      <a:tailEnd type="none" w="med" len="med"/>
+                    </a:lnL>
+                    <a:lnR w="12700" cap="flat" cmpd="sng" algn="ctr">
+                      <a:solidFill>
+                        <a:srgbClr val="EEEEEE"/>
+                      </a:solidFill>
+                      <a:prstDash val="solid"/>
+                      <a:round/>
+                      <a:headEnd type="none" w="med" len="med"/>
+                      <a:tailEnd type="none" w="med" len="med"/>
+                    </a:lnR>
+                    <a:lnT w="12700" cap="flat" cmpd="sng" algn="ctr">
+                      <a:solidFill>
+                        <a:srgbClr val="EEEEEE"/>
+                      </a:solidFill>
+                      <a:prstDash val="solid"/>
+                      <a:round/>
+                      <a:headEnd type="none" w="med" len="med"/>
+                      <a:tailEnd type="none" w="med" len="med"/>
+                    </a:lnT>
+                    <a:lnB w="12700" cap="flat" cmpd="sng" algn="ctr">
+                      <a:solidFill>
+                        <a:srgbClr val="EEEEEE"/>
+                      </a:solidFill>
+                      <a:prstDash val="solid"/>
+                      <a:round/>
+                      <a:headEnd type="none" w="med" len="med"/>
+                      <a:tailEnd type="none" w="med" len="med"/>
+                    </a:lnB>
+                    <a:solidFill>
+                      <a:srgbClr val="F5F5F5"/>
+                    </a:solidFill>
+                  </a:tcPr>
+                </a:tc>
+              </a:tr>
+              <a:tr h="365760">
+                <a:tc>
+                  <a:txBody>
+                    <a:bodyPr/>
+                    <a:lstStyle/>
+                    <a:p>
+                      <a:pPr indent="0" marL="0">
+                        <a:buNone/>
+                      </a:pPr>
+                      <a:r>
+                        <a:rPr lang="en-US" sz="1200" b="1" dirty="0">
+                          <a:solidFill>
+                            <a:srgbClr val="212121"/>
+                          </a:solidFill>
+                          <a:latin typeface="Arial" pitchFamily="34" charset="0"/>
+                          <a:ea typeface="Arial" pitchFamily="34" charset="-122"/>
+                          <a:cs typeface="Arial" pitchFamily="34" charset="-120"/>
+                        </a:rPr>
+                        <a:t>5432</a:t>
+                      </a:r>
+                      <a:endParaRPr lang="en-US" sz="1200" dirty="0">
+                        <a:latin typeface="Arial" charset="0"/>
+                        <a:ea typeface="Arial" charset="0"/>
+                        <a:cs typeface="Arial" charset="0"/>
+                      </a:endParaRPr>
+                    </a:p>
+                  </a:txBody>
+                  <a:tcPr marL="91440" marR="91440" marT="45720" marB="45720" anchor="ctr">
+                    <a:lnL w="12700" cap="flat" cmpd="sng" algn="ctr">
+                      <a:solidFill>
+                        <a:srgbClr val="EEEEEE"/>
+                      </a:solidFill>
+                      <a:prstDash val="solid"/>
+                      <a:round/>
+                      <a:headEnd type="none" w="med" len="med"/>
+                      <a:tailEnd type="none" w="med" len="med"/>
+                    </a:lnL>
+                    <a:lnR w="12700" cap="flat" cmpd="sng" algn="ctr">
+                      <a:solidFill>
+                        <a:srgbClr val="EEEEEE"/>
+                      </a:solidFill>
+                      <a:prstDash val="solid"/>
+                      <a:round/>
+                      <a:headEnd type="none" w="med" len="med"/>
+                      <a:tailEnd type="none" w="med" len="med"/>
+                    </a:lnR>
+                    <a:lnT w="12700" cap="flat" cmpd="sng" algn="ctr">
+                      <a:solidFill>
+                        <a:srgbClr val="EEEEEE"/>
+                      </a:solidFill>
+                      <a:prstDash val="solid"/>
+                      <a:round/>
+                      <a:headEnd type="none" w="med" len="med"/>
+                      <a:tailEnd type="none" w="med" len="med"/>
+                    </a:lnT>
+                    <a:lnB w="12700" cap="flat" cmpd="sng" algn="ctr">
+                      <a:solidFill>
+                        <a:srgbClr val="EEEEEE"/>
+                      </a:solidFill>
+                      <a:prstDash val="solid"/>
+                      <a:round/>
+                      <a:headEnd type="none" w="med" len="med"/>
+                      <a:tailEnd type="none" w="med" len="med"/>
+                    </a:lnB>
+                    <a:solidFill>
+                      <a:srgbClr val="FFFFFF"/>
+                    </a:solidFill>
+                  </a:tcPr>
+                </a:tc>
+                <a:tc>
+                  <a:txBody>
+                    <a:bodyPr/>
+                    <a:lstStyle/>
+                    <a:p>
+                      <a:pPr indent="0" marL="0">
+                        <a:buNone/>
+                      </a:pPr>
+                      <a:r>
+                        <a:rPr lang="en-US" sz="1200" dirty="0">
+                          <a:solidFill>
+                            <a:srgbClr val="212121"/>
+                          </a:solidFill>
+                          <a:latin typeface="Arial" pitchFamily="34" charset="0"/>
+                          <a:ea typeface="Arial" pitchFamily="34" charset="-122"/>
+                          <a:cs typeface="Arial" pitchFamily="34" charset="-120"/>
+                        </a:rPr>
+                        <a:t>El puerto por defecto de PostgreSQL — este sí es fijo</a:t>
+                      </a:r>
+                      <a:endParaRPr lang="en-US" sz="1200" dirty="0">
+                        <a:latin typeface="Arial" charset="0"/>
+                        <a:ea typeface="Arial" charset="0"/>
+                        <a:cs typeface="Arial" charset="0"/>
+                      </a:endParaRPr>
+                    </a:p>
+                  </a:txBody>
+                  <a:tcPr marL="91440" marR="91440" marT="45720" marB="45720" anchor="ctr">
+                    <a:lnL w="12700" cap="flat" cmpd="sng" algn="ctr">
+                      <a:solidFill>
+                        <a:srgbClr val="EEEEEE"/>
+                      </a:solidFill>
+                      <a:prstDash val="solid"/>
+                      <a:round/>
+                      <a:headEnd type="none" w="med" len="med"/>
+                      <a:tailEnd type="none" w="med" len="med"/>
+                    </a:lnL>
+                    <a:lnR w="12700" cap="flat" cmpd="sng" algn="ctr">
+                      <a:solidFill>
+                        <a:srgbClr val="EEEEEE"/>
+                      </a:solidFill>
+                      <a:prstDash val="solid"/>
+                      <a:round/>
+                      <a:headEnd type="none" w="med" len="med"/>
+                      <a:tailEnd type="none" w="med" len="med"/>
+                    </a:lnR>
+                    <a:lnT w="12700" cap="flat" cmpd="sng" algn="ctr">
+                      <a:solidFill>
+                        <a:srgbClr val="EEEEEE"/>
+                      </a:solidFill>
+                      <a:prstDash val="solid"/>
+                      <a:round/>
+                      <a:headEnd type="none" w="med" len="med"/>
+                      <a:tailEnd type="none" w="med" len="med"/>
+                    </a:lnT>
+                    <a:lnB w="12700" cap="flat" cmpd="sng" algn="ctr">
+                      <a:solidFill>
+                        <a:srgbClr val="EEEEEE"/>
+                      </a:solidFill>
+                      <a:prstDash val="solid"/>
+                      <a:round/>
+                      <a:headEnd type="none" w="med" len="med"/>
+                      <a:tailEnd type="none" w="med" len="med"/>
+                    </a:lnB>
+                    <a:solidFill>
+                      <a:srgbClr val="FFFFFF"/>
+                    </a:solidFill>
+                  </a:tcPr>
+                </a:tc>
+              </a:tr>
+            </a:tbl>
+          </a:graphicData>
+        </a:graphic>
+      </p:graphicFrame>
     </p:spTree>
   </p:cSld>
   <p:clrMapOvr>
@@ -4528,13 +6978,6 @@
             <a:prstDash val="solid"/>
           </a:ln>
         </p:spPr>
-        <p:txBody>
-          <a:bodyPr/>
-          <a:lstStyle/>
-          <a:p>
-            <a:endParaRPr lang="es-ES"/>
-          </a:p>
-        </p:txBody>
       </p:sp>
       <p:sp>
         <p:nvSpPr>
@@ -4557,7 +7000,7 @@
           <a:bodyPr wrap="square" rtlCol="0" anchor="ctr"/>
           <a:lstStyle/>
           <a:p>
-            <a:pPr marL="0" indent="0">
+            <a:pPr indent="0" marL="0">
               <a:buNone/>
             </a:pPr>
             <a:r>
@@ -4569,7 +7012,7 @@
                 <a:ea typeface="Arial" pitchFamily="34" charset="-122"/>
                 <a:cs typeface="Arial" pitchFamily="34" charset="-120"/>
               </a:rPr>
-              <a:t>Arquitectura en capas: borde, aplicación y datos</a:t>
+              <a:t>La regla de la capa de datos, en concreto</a:t>
             </a:r>
             <a:endParaRPr lang="en-US" sz="2400" dirty="0"/>
           </a:p>
@@ -4596,7 +7039,7 @@
           <a:bodyPr wrap="square" rtlCol="0" anchor="ctr"/>
           <a:lstStyle/>
           <a:p>
-            <a:pPr marL="0" indent="0" algn="r">
+            <a:pPr algn="r" indent="0" marL="0">
               <a:buNone/>
             </a:pPr>
             <a:r>
@@ -4614,644 +7057,191 @@
           </a:p>
         </p:txBody>
       </p:sp>
-      <p:pic>
-        <p:nvPicPr>
-          <p:cNvPr id="5" name="Image 0" descr="C:/Users/Aitor/Documents/apuntes-profe/introduccion-nube/docs/tema2/img/diagrama_arquitectura_capas.png"/>
-          <p:cNvPicPr>
-            <a:picLocks noChangeAspect="1"/>
-          </p:cNvPicPr>
-          <p:nvPr/>
-        </p:nvPicPr>
-        <p:blipFill>
-          <a:blip r:embed="rId3"/>
-          <a:stretch>
-            <a:fillRect/>
-          </a:stretch>
-        </p:blipFill>
-        <p:spPr>
-          <a:xfrm>
-            <a:off x="1029819" y="914882"/>
-            <a:ext cx="9771919" cy="4885960"/>
+      <p:sp>
+        <p:nvSpPr>
+          <p:cNvPr id="5" name="Shape 3"/>
+          <p:cNvSpPr/>
+          <p:nvPr/>
+        </p:nvSpPr>
+        <p:spPr>
+          <a:xfrm>
+            <a:off x="548640" y="1280160"/>
+            <a:ext cx="11091672" cy="1828800"/>
+          </a:xfrm>
+          <a:prstGeom prst="roundRect">
+            <a:avLst/>
+          </a:prstGeom>
+          <a:solidFill>
+            <a:srgbClr val="E8EAF6"/>
+          </a:solidFill>
+          <a:ln w="15875">
+            <a:solidFill>
+              <a:srgbClr val="3949AB"/>
+            </a:solidFill>
+            <a:prstDash val="solid"/>
+          </a:ln>
+        </p:spPr>
+      </p:sp>
+      <p:sp>
+        <p:nvSpPr>
+          <p:cNvPr id="6" name="Text 4"/>
+          <p:cNvSpPr/>
+          <p:nvPr/>
+        </p:nvSpPr>
+        <p:spPr>
+          <a:xfrm>
+            <a:off x="731520" y="1353312"/>
+            <a:ext cx="10725912" cy="548640"/>
           </a:xfrm>
           <a:prstGeom prst="rect">
             <a:avLst/>
           </a:prstGeom>
-        </p:spPr>
-      </p:pic>
-      <p:graphicFrame>
-        <p:nvGraphicFramePr>
-          <p:cNvPr id="9" name="Table 0"/>
-          <p:cNvGraphicFramePr>
-            <a:graphicFrameLocks noGrp="1"/>
-          </p:cNvGraphicFramePr>
-          <p:nvPr>
-            <p:extLst>
-              <p:ext uri="{D42A27DB-BD31-4B8C-83A1-F6EECF244321}">
-                <p14:modId xmlns:p14="http://schemas.microsoft.com/office/powerpoint/2010/main" val="1013027617"/>
-              </p:ext>
-            </p:extLst>
-          </p:nvPr>
-        </p:nvGraphicFramePr>
-        <p:xfrm>
-          <a:off x="548640" y="5010912"/>
-          <a:ext cx="11091672" cy="1463040"/>
-        </p:xfrm>
-        <a:graphic>
-          <a:graphicData uri="http://schemas.openxmlformats.org/drawingml/2006/table">
-            <a:tbl>
-              <a:tblPr/>
-              <a:tblGrid>
-                <a:gridCol w="1996501">
-                  <a:extLst>
-                    <a:ext uri="{9D8B030D-6E8A-4147-A177-3AD203B41FA5}">
-                      <a16:colId xmlns:a16="http://schemas.microsoft.com/office/drawing/2014/main" val="20000"/>
-                    </a:ext>
-                  </a:extLst>
-                </a:gridCol>
-                <a:gridCol w="9095171">
-                  <a:extLst>
-                    <a:ext uri="{9D8B030D-6E8A-4147-A177-3AD203B41FA5}">
-                      <a16:colId xmlns:a16="http://schemas.microsoft.com/office/drawing/2014/main" val="20001"/>
-                    </a:ext>
-                  </a:extLst>
-                </a:gridCol>
-              </a:tblGrid>
-              <a:tr h="365760">
-                <a:tc>
-                  <a:txBody>
-                    <a:bodyPr/>
-                    <a:lstStyle/>
-                    <a:p>
-                      <a:pPr marL="0" indent="0" algn="ctr">
-                        <a:buNone/>
-                      </a:pPr>
-                      <a:r>
-                        <a:rPr lang="en-US" sz="1400" b="1" dirty="0">
-                          <a:solidFill>
-                            <a:srgbClr val="FFFFFF"/>
-                          </a:solidFill>
-                          <a:latin typeface="Arial" pitchFamily="34" charset="0"/>
-                          <a:ea typeface="Arial" pitchFamily="34" charset="-122"/>
-                          <a:cs typeface="Arial" pitchFamily="34" charset="-120"/>
-                        </a:rPr>
-                        <a:t>Puerto</a:t>
-                      </a:r>
-                      <a:endParaRPr lang="en-US" sz="1400" dirty="0">
-                        <a:latin typeface="Arial" charset="0"/>
-                        <a:ea typeface="Arial" charset="0"/>
-                        <a:cs typeface="Arial" charset="0"/>
-                      </a:endParaRPr>
-                    </a:p>
-                  </a:txBody>
-                  <a:tcPr anchor="ctr">
-                    <a:lnL w="12700" cap="flat" cmpd="sng" algn="ctr">
-                      <a:solidFill>
-                        <a:srgbClr val="EEEEEE"/>
-                      </a:solidFill>
-                      <a:prstDash val="solid"/>
-                      <a:round/>
-                      <a:headEnd type="none" w="med" len="med"/>
-                      <a:tailEnd type="none" w="med" len="med"/>
-                    </a:lnL>
-                    <a:lnR w="12700" cap="flat" cmpd="sng" algn="ctr">
-                      <a:solidFill>
-                        <a:srgbClr val="EEEEEE"/>
-                      </a:solidFill>
-                      <a:prstDash val="solid"/>
-                      <a:round/>
-                      <a:headEnd type="none" w="med" len="med"/>
-                      <a:tailEnd type="none" w="med" len="med"/>
-                    </a:lnR>
-                    <a:lnT w="12700" cap="flat" cmpd="sng" algn="ctr">
-                      <a:solidFill>
-                        <a:srgbClr val="EEEEEE"/>
-                      </a:solidFill>
-                      <a:prstDash val="solid"/>
-                      <a:round/>
-                      <a:headEnd type="none" w="med" len="med"/>
-                      <a:tailEnd type="none" w="med" len="med"/>
-                    </a:lnT>
-                    <a:lnB w="12700" cap="flat" cmpd="sng" algn="ctr">
-                      <a:solidFill>
-                        <a:srgbClr val="EEEEEE"/>
-                      </a:solidFill>
-                      <a:prstDash val="solid"/>
-                      <a:round/>
-                      <a:headEnd type="none" w="med" len="med"/>
-                      <a:tailEnd type="none" w="med" len="med"/>
-                    </a:lnB>
-                    <a:solidFill>
-                      <a:srgbClr val="3949AB"/>
-                    </a:solidFill>
-                  </a:tcPr>
-                </a:tc>
-                <a:tc>
-                  <a:txBody>
-                    <a:bodyPr/>
-                    <a:lstStyle/>
-                    <a:p>
-                      <a:pPr marL="0" indent="0" algn="ctr">
-                        <a:buNone/>
-                      </a:pPr>
-                      <a:r>
-                        <a:rPr lang="en-US" sz="1400" b="1" dirty="0">
-                          <a:solidFill>
-                            <a:srgbClr val="FFFFFF"/>
-                          </a:solidFill>
-                          <a:latin typeface="Arial" pitchFamily="34" charset="0"/>
-                          <a:ea typeface="Arial" pitchFamily="34" charset="-122"/>
-                          <a:cs typeface="Arial" pitchFamily="34" charset="-120"/>
-                        </a:rPr>
-                        <a:t>Qué es</a:t>
-                      </a:r>
-                      <a:endParaRPr lang="en-US" sz="1400" dirty="0">
-                        <a:latin typeface="Arial" charset="0"/>
-                        <a:ea typeface="Arial" charset="0"/>
-                        <a:cs typeface="Arial" charset="0"/>
-                      </a:endParaRPr>
-                    </a:p>
-                  </a:txBody>
-                  <a:tcPr anchor="ctr">
-                    <a:lnL w="12700" cap="flat" cmpd="sng" algn="ctr">
-                      <a:solidFill>
-                        <a:srgbClr val="EEEEEE"/>
-                      </a:solidFill>
-                      <a:prstDash val="solid"/>
-                      <a:round/>
-                      <a:headEnd type="none" w="med" len="med"/>
-                      <a:tailEnd type="none" w="med" len="med"/>
-                    </a:lnL>
-                    <a:lnR w="12700" cap="flat" cmpd="sng" algn="ctr">
-                      <a:solidFill>
-                        <a:srgbClr val="EEEEEE"/>
-                      </a:solidFill>
-                      <a:prstDash val="solid"/>
-                      <a:round/>
-                      <a:headEnd type="none" w="med" len="med"/>
-                      <a:tailEnd type="none" w="med" len="med"/>
-                    </a:lnR>
-                    <a:lnT w="12700" cap="flat" cmpd="sng" algn="ctr">
-                      <a:solidFill>
-                        <a:srgbClr val="EEEEEE"/>
-                      </a:solidFill>
-                      <a:prstDash val="solid"/>
-                      <a:round/>
-                      <a:headEnd type="none" w="med" len="med"/>
-                      <a:tailEnd type="none" w="med" len="med"/>
-                    </a:lnT>
-                    <a:lnB w="12700" cap="flat" cmpd="sng" algn="ctr">
-                      <a:solidFill>
-                        <a:srgbClr val="EEEEEE"/>
-                      </a:solidFill>
-                      <a:prstDash val="solid"/>
-                      <a:round/>
-                      <a:headEnd type="none" w="med" len="med"/>
-                      <a:tailEnd type="none" w="med" len="med"/>
-                    </a:lnB>
-                    <a:solidFill>
-                      <a:srgbClr val="3949AB"/>
-                    </a:solidFill>
-                  </a:tcPr>
-                </a:tc>
-                <a:extLst>
-                  <a:ext uri="{0D108BD9-81ED-4DB2-BD59-A6C34878D82A}">
-                    <a16:rowId xmlns:a16="http://schemas.microsoft.com/office/drawing/2014/main" val="10000"/>
-                  </a:ext>
-                </a:extLst>
-              </a:tr>
-              <a:tr h="365760">
-                <a:tc>
-                  <a:txBody>
-                    <a:bodyPr/>
-                    <a:lstStyle/>
-                    <a:p>
-                      <a:pPr marL="0" indent="0">
-                        <a:buNone/>
-                      </a:pPr>
-                      <a:r>
-                        <a:rPr lang="en-US" sz="1300" b="1" dirty="0">
-                          <a:solidFill>
-                            <a:srgbClr val="212121"/>
-                          </a:solidFill>
-                          <a:latin typeface="Arial" pitchFamily="34" charset="0"/>
-                          <a:ea typeface="Arial" pitchFamily="34" charset="-122"/>
-                          <a:cs typeface="Arial" pitchFamily="34" charset="-120"/>
-                        </a:rPr>
-                        <a:t>80</a:t>
-                      </a:r>
-                      <a:endParaRPr lang="en-US" sz="1300" dirty="0">
-                        <a:latin typeface="Arial" charset="0"/>
-                        <a:ea typeface="Arial" charset="0"/>
-                        <a:cs typeface="Arial" charset="0"/>
-                      </a:endParaRPr>
-                    </a:p>
-                  </a:txBody>
-                  <a:tcPr anchor="ctr">
-                    <a:lnL w="12700" cap="flat" cmpd="sng" algn="ctr">
-                      <a:solidFill>
-                        <a:srgbClr val="EEEEEE"/>
-                      </a:solidFill>
-                      <a:prstDash val="solid"/>
-                      <a:round/>
-                      <a:headEnd type="none" w="med" len="med"/>
-                      <a:tailEnd type="none" w="med" len="med"/>
-                    </a:lnL>
-                    <a:lnR w="12700" cap="flat" cmpd="sng" algn="ctr">
-                      <a:solidFill>
-                        <a:srgbClr val="EEEEEE"/>
-                      </a:solidFill>
-                      <a:prstDash val="solid"/>
-                      <a:round/>
-                      <a:headEnd type="none" w="med" len="med"/>
-                      <a:tailEnd type="none" w="med" len="med"/>
-                    </a:lnR>
-                    <a:lnT w="12700" cap="flat" cmpd="sng" algn="ctr">
-                      <a:solidFill>
-                        <a:srgbClr val="EEEEEE"/>
-                      </a:solidFill>
-                      <a:prstDash val="solid"/>
-                      <a:round/>
-                      <a:headEnd type="none" w="med" len="med"/>
-                      <a:tailEnd type="none" w="med" len="med"/>
-                    </a:lnT>
-                    <a:lnB w="12700" cap="flat" cmpd="sng" algn="ctr">
-                      <a:solidFill>
-                        <a:srgbClr val="EEEEEE"/>
-                      </a:solidFill>
-                      <a:prstDash val="solid"/>
-                      <a:round/>
-                      <a:headEnd type="none" w="med" len="med"/>
-                      <a:tailEnd type="none" w="med" len="med"/>
-                    </a:lnB>
-                    <a:solidFill>
-                      <a:srgbClr val="FFFFFF"/>
-                    </a:solidFill>
-                  </a:tcPr>
-                </a:tc>
-                <a:tc>
-                  <a:txBody>
-                    <a:bodyPr/>
-                    <a:lstStyle/>
-                    <a:p>
-                      <a:pPr marL="0" indent="0">
-                        <a:buNone/>
-                      </a:pPr>
-                      <a:r>
-                        <a:rPr lang="en-US" sz="1300" dirty="0">
-                          <a:solidFill>
-                            <a:srgbClr val="212121"/>
-                          </a:solidFill>
-                          <a:latin typeface="Arial" pitchFamily="34" charset="0"/>
-                          <a:ea typeface="Arial" pitchFamily="34" charset="-122"/>
-                          <a:cs typeface="Arial" pitchFamily="34" charset="-120"/>
-                        </a:rPr>
-                        <a:t>El puerto estándar de un servidor web.</a:t>
-                      </a:r>
-                      <a:endParaRPr lang="en-US" sz="1300" dirty="0">
-                        <a:latin typeface="Arial" charset="0"/>
-                        <a:ea typeface="Arial" charset="0"/>
-                        <a:cs typeface="Arial" charset="0"/>
-                      </a:endParaRPr>
-                    </a:p>
-                  </a:txBody>
-                  <a:tcPr anchor="ctr">
-                    <a:lnL w="12700" cap="flat" cmpd="sng" algn="ctr">
-                      <a:solidFill>
-                        <a:srgbClr val="EEEEEE"/>
-                      </a:solidFill>
-                      <a:prstDash val="solid"/>
-                      <a:round/>
-                      <a:headEnd type="none" w="med" len="med"/>
-                      <a:tailEnd type="none" w="med" len="med"/>
-                    </a:lnL>
-                    <a:lnR w="12700" cap="flat" cmpd="sng" algn="ctr">
-                      <a:solidFill>
-                        <a:srgbClr val="EEEEEE"/>
-                      </a:solidFill>
-                      <a:prstDash val="solid"/>
-                      <a:round/>
-                      <a:headEnd type="none" w="med" len="med"/>
-                      <a:tailEnd type="none" w="med" len="med"/>
-                    </a:lnR>
-                    <a:lnT w="12700" cap="flat" cmpd="sng" algn="ctr">
-                      <a:solidFill>
-                        <a:srgbClr val="EEEEEE"/>
-                      </a:solidFill>
-                      <a:prstDash val="solid"/>
-                      <a:round/>
-                      <a:headEnd type="none" w="med" len="med"/>
-                      <a:tailEnd type="none" w="med" len="med"/>
-                    </a:lnT>
-                    <a:lnB w="12700" cap="flat" cmpd="sng" algn="ctr">
-                      <a:solidFill>
-                        <a:srgbClr val="EEEEEE"/>
-                      </a:solidFill>
-                      <a:prstDash val="solid"/>
-                      <a:round/>
-                      <a:headEnd type="none" w="med" len="med"/>
-                      <a:tailEnd type="none" w="med" len="med"/>
-                    </a:lnB>
-                    <a:solidFill>
-                      <a:srgbClr val="FFFFFF"/>
-                    </a:solidFill>
-                  </a:tcPr>
-                </a:tc>
-                <a:extLst>
-                  <a:ext uri="{0D108BD9-81ED-4DB2-BD59-A6C34878D82A}">
-                    <a16:rowId xmlns:a16="http://schemas.microsoft.com/office/drawing/2014/main" val="10001"/>
-                  </a:ext>
-                </a:extLst>
-              </a:tr>
-              <a:tr h="365760">
-                <a:tc>
-                  <a:txBody>
-                    <a:bodyPr/>
-                    <a:lstStyle/>
-                    <a:p>
-                      <a:pPr marL="0" indent="0">
-                        <a:buNone/>
-                      </a:pPr>
-                      <a:r>
-                        <a:rPr lang="en-US" sz="1300" b="1" dirty="0">
-                          <a:solidFill>
-                            <a:srgbClr val="212121"/>
-                          </a:solidFill>
-                          <a:latin typeface="Arial" pitchFamily="34" charset="0"/>
-                          <a:ea typeface="Arial" pitchFamily="34" charset="-122"/>
-                          <a:cs typeface="Arial" pitchFamily="34" charset="-120"/>
-                        </a:rPr>
-                        <a:t>3000</a:t>
-                      </a:r>
-                      <a:endParaRPr lang="en-US" sz="1300" dirty="0">
-                        <a:latin typeface="Arial" charset="0"/>
-                        <a:ea typeface="Arial" charset="0"/>
-                        <a:cs typeface="Arial" charset="0"/>
-                      </a:endParaRPr>
-                    </a:p>
-                  </a:txBody>
-                  <a:tcPr anchor="ctr">
-                    <a:lnL w="12700" cap="flat" cmpd="sng" algn="ctr">
-                      <a:solidFill>
-                        <a:srgbClr val="EEEEEE"/>
-                      </a:solidFill>
-                      <a:prstDash val="solid"/>
-                      <a:round/>
-                      <a:headEnd type="none" w="med" len="med"/>
-                      <a:tailEnd type="none" w="med" len="med"/>
-                    </a:lnL>
-                    <a:lnR w="12700" cap="flat" cmpd="sng" algn="ctr">
-                      <a:solidFill>
-                        <a:srgbClr val="EEEEEE"/>
-                      </a:solidFill>
-                      <a:prstDash val="solid"/>
-                      <a:round/>
-                      <a:headEnd type="none" w="med" len="med"/>
-                      <a:tailEnd type="none" w="med" len="med"/>
-                    </a:lnR>
-                    <a:lnT w="12700" cap="flat" cmpd="sng" algn="ctr">
-                      <a:solidFill>
-                        <a:srgbClr val="EEEEEE"/>
-                      </a:solidFill>
-                      <a:prstDash val="solid"/>
-                      <a:round/>
-                      <a:headEnd type="none" w="med" len="med"/>
-                      <a:tailEnd type="none" w="med" len="med"/>
-                    </a:lnT>
-                    <a:lnB w="12700" cap="flat" cmpd="sng" algn="ctr">
-                      <a:solidFill>
-                        <a:srgbClr val="EEEEEE"/>
-                      </a:solidFill>
-                      <a:prstDash val="solid"/>
-                      <a:round/>
-                      <a:headEnd type="none" w="med" len="med"/>
-                      <a:tailEnd type="none" w="med" len="med"/>
-                    </a:lnB>
-                    <a:solidFill>
-                      <a:srgbClr val="F5F5F5"/>
-                    </a:solidFill>
-                  </a:tcPr>
-                </a:tc>
-                <a:tc>
-                  <a:txBody>
-                    <a:bodyPr/>
-                    <a:lstStyle/>
-                    <a:p>
-                      <a:pPr marL="0" indent="0">
-                        <a:buNone/>
-                      </a:pPr>
-                      <a:r>
-                        <a:rPr lang="en-US" sz="1300" dirty="0">
-                          <a:solidFill>
-                            <a:srgbClr val="212121"/>
-                          </a:solidFill>
-                          <a:latin typeface="Arial" pitchFamily="34" charset="0"/>
-                          <a:ea typeface="Arial" pitchFamily="34" charset="-122"/>
-                          <a:cs typeface="Arial" pitchFamily="34" charset="-120"/>
-                        </a:rPr>
-                        <a:t>No es «oficial» de nada: lo elige el desarrollador del servidor de aplicación.</a:t>
-                      </a:r>
-                      <a:endParaRPr lang="en-US" sz="1300" dirty="0">
-                        <a:latin typeface="Arial" charset="0"/>
-                        <a:ea typeface="Arial" charset="0"/>
-                        <a:cs typeface="Arial" charset="0"/>
-                      </a:endParaRPr>
-                    </a:p>
-                  </a:txBody>
-                  <a:tcPr anchor="ctr">
-                    <a:lnL w="12700" cap="flat" cmpd="sng" algn="ctr">
-                      <a:solidFill>
-                        <a:srgbClr val="EEEEEE"/>
-                      </a:solidFill>
-                      <a:prstDash val="solid"/>
-                      <a:round/>
-                      <a:headEnd type="none" w="med" len="med"/>
-                      <a:tailEnd type="none" w="med" len="med"/>
-                    </a:lnL>
-                    <a:lnR w="12700" cap="flat" cmpd="sng" algn="ctr">
-                      <a:solidFill>
-                        <a:srgbClr val="EEEEEE"/>
-                      </a:solidFill>
-                      <a:prstDash val="solid"/>
-                      <a:round/>
-                      <a:headEnd type="none" w="med" len="med"/>
-                      <a:tailEnd type="none" w="med" len="med"/>
-                    </a:lnR>
-                    <a:lnT w="12700" cap="flat" cmpd="sng" algn="ctr">
-                      <a:solidFill>
-                        <a:srgbClr val="EEEEEE"/>
-                      </a:solidFill>
-                      <a:prstDash val="solid"/>
-                      <a:round/>
-                      <a:headEnd type="none" w="med" len="med"/>
-                      <a:tailEnd type="none" w="med" len="med"/>
-                    </a:lnT>
-                    <a:lnB w="12700" cap="flat" cmpd="sng" algn="ctr">
-                      <a:solidFill>
-                        <a:srgbClr val="EEEEEE"/>
-                      </a:solidFill>
-                      <a:prstDash val="solid"/>
-                      <a:round/>
-                      <a:headEnd type="none" w="med" len="med"/>
-                      <a:tailEnd type="none" w="med" len="med"/>
-                    </a:lnB>
-                    <a:solidFill>
-                      <a:srgbClr val="F5F5F5"/>
-                    </a:solidFill>
-                  </a:tcPr>
-                </a:tc>
-                <a:extLst>
-                  <a:ext uri="{0D108BD9-81ED-4DB2-BD59-A6C34878D82A}">
-                    <a16:rowId xmlns:a16="http://schemas.microsoft.com/office/drawing/2014/main" val="10002"/>
-                  </a:ext>
-                </a:extLst>
-              </a:tr>
-              <a:tr h="365760">
-                <a:tc>
-                  <a:txBody>
-                    <a:bodyPr/>
-                    <a:lstStyle/>
-                    <a:p>
-                      <a:pPr marL="0" indent="0">
-                        <a:buNone/>
-                      </a:pPr>
-                      <a:r>
-                        <a:rPr lang="en-US" sz="1300" b="1" dirty="0">
-                          <a:solidFill>
-                            <a:srgbClr val="212121"/>
-                          </a:solidFill>
-                          <a:latin typeface="Arial" pitchFamily="34" charset="0"/>
-                          <a:ea typeface="Arial" pitchFamily="34" charset="-122"/>
-                          <a:cs typeface="Arial" pitchFamily="34" charset="-120"/>
-                        </a:rPr>
-                        <a:t>5432</a:t>
-                      </a:r>
-                      <a:endParaRPr lang="en-US" sz="1300" dirty="0">
-                        <a:latin typeface="Arial" charset="0"/>
-                        <a:ea typeface="Arial" charset="0"/>
-                        <a:cs typeface="Arial" charset="0"/>
-                      </a:endParaRPr>
-                    </a:p>
-                  </a:txBody>
-                  <a:tcPr anchor="ctr">
-                    <a:lnL w="12700" cap="flat" cmpd="sng" algn="ctr">
-                      <a:solidFill>
-                        <a:srgbClr val="EEEEEE"/>
-                      </a:solidFill>
-                      <a:prstDash val="solid"/>
-                      <a:round/>
-                      <a:headEnd type="none" w="med" len="med"/>
-                      <a:tailEnd type="none" w="med" len="med"/>
-                    </a:lnL>
-                    <a:lnR w="12700" cap="flat" cmpd="sng" algn="ctr">
-                      <a:solidFill>
-                        <a:srgbClr val="EEEEEE"/>
-                      </a:solidFill>
-                      <a:prstDash val="solid"/>
-                      <a:round/>
-                      <a:headEnd type="none" w="med" len="med"/>
-                      <a:tailEnd type="none" w="med" len="med"/>
-                    </a:lnR>
-                    <a:lnT w="12700" cap="flat" cmpd="sng" algn="ctr">
-                      <a:solidFill>
-                        <a:srgbClr val="EEEEEE"/>
-                      </a:solidFill>
-                      <a:prstDash val="solid"/>
-                      <a:round/>
-                      <a:headEnd type="none" w="med" len="med"/>
-                      <a:tailEnd type="none" w="med" len="med"/>
-                    </a:lnT>
-                    <a:lnB w="12700" cap="flat" cmpd="sng" algn="ctr">
-                      <a:solidFill>
-                        <a:srgbClr val="EEEEEE"/>
-                      </a:solidFill>
-                      <a:prstDash val="solid"/>
-                      <a:round/>
-                      <a:headEnd type="none" w="med" len="med"/>
-                      <a:tailEnd type="none" w="med" len="med"/>
-                    </a:lnB>
-                    <a:solidFill>
-                      <a:srgbClr val="FFFFFF"/>
-                    </a:solidFill>
-                  </a:tcPr>
-                </a:tc>
-                <a:tc>
-                  <a:txBody>
-                    <a:bodyPr/>
-                    <a:lstStyle/>
-                    <a:p>
-                      <a:pPr marL="0" indent="0">
-                        <a:buNone/>
-                      </a:pPr>
-                      <a:r>
-                        <a:rPr lang="en-US" sz="1300" dirty="0">
-                          <a:solidFill>
-                            <a:srgbClr val="212121"/>
-                          </a:solidFill>
-                          <a:latin typeface="Arial" pitchFamily="34" charset="0"/>
-                          <a:ea typeface="Arial" pitchFamily="34" charset="-122"/>
-                          <a:cs typeface="Arial" pitchFamily="34" charset="-120"/>
-                        </a:rPr>
-                        <a:t>El puerto por defecto de PostgreSQL — este sí es fijo.</a:t>
-                      </a:r>
-                      <a:endParaRPr lang="en-US" sz="1300" dirty="0">
-                        <a:latin typeface="Arial" charset="0"/>
-                        <a:ea typeface="Arial" charset="0"/>
-                        <a:cs typeface="Arial" charset="0"/>
-                      </a:endParaRPr>
-                    </a:p>
-                  </a:txBody>
-                  <a:tcPr anchor="ctr">
-                    <a:lnL w="12700" cap="flat" cmpd="sng" algn="ctr">
-                      <a:solidFill>
-                        <a:srgbClr val="EEEEEE"/>
-                      </a:solidFill>
-                      <a:prstDash val="solid"/>
-                      <a:round/>
-                      <a:headEnd type="none" w="med" len="med"/>
-                      <a:tailEnd type="none" w="med" len="med"/>
-                    </a:lnL>
-                    <a:lnR w="12700" cap="flat" cmpd="sng" algn="ctr">
-                      <a:solidFill>
-                        <a:srgbClr val="EEEEEE"/>
-                      </a:solidFill>
-                      <a:prstDash val="solid"/>
-                      <a:round/>
-                      <a:headEnd type="none" w="med" len="med"/>
-                      <a:tailEnd type="none" w="med" len="med"/>
-                    </a:lnR>
-                    <a:lnT w="12700" cap="flat" cmpd="sng" algn="ctr">
-                      <a:solidFill>
-                        <a:srgbClr val="EEEEEE"/>
-                      </a:solidFill>
-                      <a:prstDash val="solid"/>
-                      <a:round/>
-                      <a:headEnd type="none" w="med" len="med"/>
-                      <a:tailEnd type="none" w="med" len="med"/>
-                    </a:lnT>
-                    <a:lnB w="12700" cap="flat" cmpd="sng" algn="ctr">
-                      <a:solidFill>
-                        <a:srgbClr val="EEEEEE"/>
-                      </a:solidFill>
-                      <a:prstDash val="solid"/>
-                      <a:round/>
-                      <a:headEnd type="none" w="med" len="med"/>
-                      <a:tailEnd type="none" w="med" len="med"/>
-                    </a:lnB>
-                    <a:solidFill>
-                      <a:srgbClr val="FFFFFF"/>
-                    </a:solidFill>
-                  </a:tcPr>
-                </a:tc>
-                <a:extLst>
-                  <a:ext uri="{0D108BD9-81ED-4DB2-BD59-A6C34878D82A}">
-                    <a16:rowId xmlns:a16="http://schemas.microsoft.com/office/drawing/2014/main" val="10003"/>
-                  </a:ext>
-                </a:extLst>
-              </a:tr>
-            </a:tbl>
-          </a:graphicData>
-        </a:graphic>
-      </p:graphicFrame>
+          <a:noFill/>
+          <a:ln/>
+        </p:spPr>
+        <p:txBody>
+          <a:bodyPr wrap="square" rtlCol="0" anchor="ctr"/>
+          <a:lstStyle/>
+          <a:p>
+            <a:pPr indent="0" marL="0">
+              <a:buNone/>
+            </a:pPr>
+            <a:r>
+              <a:rPr lang="en-US" sz="2200" b="1" dirty="0">
+                <a:solidFill>
+                  <a:srgbClr val="1A237E"/>
+                </a:solidFill>
+                <a:latin typeface="Arial" pitchFamily="34" charset="0"/>
+                <a:ea typeface="Arial" pitchFamily="34" charset="-122"/>
+                <a:cs typeface="Arial" pitchFamily="34" charset="-120"/>
+              </a:rPr>
+              <a:t>Cada flecha del diagrama es una regla de grupo de seguridad</a:t>
+            </a:r>
+            <a:endParaRPr lang="en-US" sz="2200" dirty="0"/>
+          </a:p>
+        </p:txBody>
+      </p:sp>
+      <p:sp>
+        <p:nvSpPr>
+          <p:cNvPr id="7" name="Text 5"/>
+          <p:cNvSpPr/>
+          <p:nvPr/>
+        </p:nvSpPr>
+        <p:spPr>
+          <a:xfrm>
+            <a:off x="731520" y="1901952"/>
+            <a:ext cx="10725912" cy="1133856"/>
+          </a:xfrm>
+          <a:prstGeom prst="rect">
+            <a:avLst/>
+          </a:prstGeom>
+          <a:noFill/>
+          <a:ln/>
+        </p:spPr>
+        <p:txBody>
+          <a:bodyPr wrap="square" rtlCol="0" anchor="t"/>
+          <a:lstStyle/>
+          <a:p>
+            <a:pPr indent="0" marL="0">
+              <a:buNone/>
+            </a:pPr>
+            <a:r>
+              <a:rPr lang="en-US" sz="1800" dirty="0">
+                <a:solidFill>
+                  <a:srgbClr val="212121"/>
+                </a:solidFill>
+                <a:latin typeface="Arial" pitchFamily="34" charset="0"/>
+                <a:ea typeface="Arial" pitchFamily="34" charset="-122"/>
+                <a:cs typeface="Arial" pitchFamily="34" charset="-120"/>
+              </a:rPr>
+              <a:t>La capa de datos solo acepta tráfico que venga de la capa de aplicación, nunca directamente de internet ni desde el borde.</a:t>
+            </a:r>
+            <a:endParaRPr lang="en-US" sz="1800" dirty="0"/>
+          </a:p>
+        </p:txBody>
+      </p:sp>
+      <p:sp>
+        <p:nvSpPr>
+          <p:cNvPr id="8" name="Shape 6"/>
+          <p:cNvSpPr/>
+          <p:nvPr/>
+        </p:nvSpPr>
+        <p:spPr>
+          <a:xfrm>
+            <a:off x="548640" y="3520440"/>
+            <a:ext cx="11091672" cy="1691640"/>
+          </a:xfrm>
+          <a:prstGeom prst="roundRect">
+            <a:avLst/>
+          </a:prstGeom>
+          <a:solidFill>
+            <a:srgbClr val="FFF8E1"/>
+          </a:solidFill>
+          <a:ln w="28575">
+            <a:solidFill>
+              <a:srgbClr val="FFA000"/>
+            </a:solidFill>
+            <a:prstDash val="solid"/>
+          </a:ln>
+        </p:spPr>
+      </p:sp>
+      <p:sp>
+        <p:nvSpPr>
+          <p:cNvPr id="9" name="Text 7"/>
+          <p:cNvSpPr/>
+          <p:nvPr/>
+        </p:nvSpPr>
+        <p:spPr>
+          <a:xfrm>
+            <a:off x="822960" y="3630168"/>
+            <a:ext cx="10543032" cy="1472184"/>
+          </a:xfrm>
+          <a:prstGeom prst="rect">
+            <a:avLst/>
+          </a:prstGeom>
+          <a:noFill/>
+          <a:ln/>
+        </p:spPr>
+        <p:txBody>
+          <a:bodyPr wrap="square" rtlCol="0" anchor="t"/>
+          <a:lstStyle/>
+          <a:p>
+            <a:pPr indent="0" marL="0">
+              <a:buNone/>
+            </a:pPr>
+            <a:r>
+              <a:rPr lang="en-US" sz="1900" b="1" dirty="0">
+                <a:solidFill>
+                  <a:srgbClr val="1A237E"/>
+                </a:solidFill>
+                <a:latin typeface="Arial" pitchFamily="34" charset="0"/>
+                <a:ea typeface="Arial" pitchFamily="34" charset="-122"/>
+                <a:cs typeface="Arial" pitchFamily="34" charset="-120"/>
+              </a:rPr>
+              <a:t>Una única regla de entrada
+</a:t>
+            </a:r>
+            <a:endParaRPr lang="en-US" sz="1900" dirty="0"/>
+          </a:p>
+          <a:p>
+            <a:pPr indent="0" marL="0">
+              <a:buNone/>
+            </a:pPr>
+            <a:r>
+              <a:rPr lang="en-US" sz="1800" dirty="0">
+                <a:solidFill>
+                  <a:srgbClr val="212121"/>
+                </a:solidFill>
+                <a:latin typeface="Arial" pitchFamily="34" charset="0"/>
+                <a:ea typeface="Arial" pitchFamily="34" charset="-122"/>
+                <a:cs typeface="Arial" pitchFamily="34" charset="-120"/>
+              </a:rPr>
+              <a:t>Puerto 5432, origen el grupo de seguridad de la capa de aplicación — nunca 0.0.0.0/0, ni siquiera el puerto 80 del borde. La construirás al conectar una base de datos gestionada en el Tema 3.</a:t>
+            </a:r>
+            <a:endParaRPr lang="en-US" sz="1900" dirty="0"/>
+          </a:p>
+        </p:txBody>
+      </p:sp>
     </p:spTree>
   </p:cSld>
   <p:clrMapOvr>
@@ -5301,13 +7291,6 @@
             <a:prstDash val="solid"/>
           </a:ln>
         </p:spPr>
-        <p:txBody>
-          <a:bodyPr/>
-          <a:lstStyle/>
-          <a:p>
-            <a:endParaRPr lang="es-ES"/>
-          </a:p>
-        </p:txBody>
       </p:sp>
       <p:sp>
         <p:nvSpPr>
@@ -5330,7 +7313,7 @@
           <a:bodyPr wrap="square" rtlCol="0" anchor="ctr"/>
           <a:lstStyle/>
           <a:p>
-            <a:pPr marL="0" indent="0">
+            <a:pPr indent="0" marL="0">
               <a:buNone/>
             </a:pPr>
             <a:r>
@@ -5342,7 +7325,7 @@
                 <a:ea typeface="Arial" pitchFamily="34" charset="-122"/>
                 <a:cs typeface="Arial" pitchFamily="34" charset="-120"/>
               </a:rPr>
-              <a:t>Acceso administrativo sin exponer SSH a internet</a:t>
+              <a:t>Acceso administrativo sin exponer SSH</a:t>
             </a:r>
             <a:endParaRPr lang="en-US" sz="2400" dirty="0"/>
           </a:p>
@@ -5369,7 +7352,7 @@
           <a:bodyPr wrap="square" rtlCol="0" anchor="ctr"/>
           <a:lstStyle/>
           <a:p>
-            <a:pPr marL="0" indent="0" algn="r">
+            <a:pPr algn="r" indent="0" marL="0">
               <a:buNone/>
             </a:pPr>
             <a:r>
@@ -5384,6 +7367,70 @@
               <a:t>Introducción a la Nube Pública — Tema 2: Seguridad de red</a:t>
             </a:r>
             <a:endParaRPr lang="en-US" sz="1100" dirty="0"/>
+          </a:p>
+        </p:txBody>
+      </p:sp>
+      <p:sp>
+        <p:nvSpPr>
+          <p:cNvPr id="5" name="Shape 3"/>
+          <p:cNvSpPr/>
+          <p:nvPr/>
+        </p:nvSpPr>
+        <p:spPr>
+          <a:xfrm>
+            <a:off x="548640" y="1143000"/>
+            <a:ext cx="11091672" cy="914400"/>
+          </a:xfrm>
+          <a:prstGeom prst="roundRect">
+            <a:avLst/>
+          </a:prstGeom>
+          <a:solidFill>
+            <a:srgbClr val="FFF8E1"/>
+          </a:solidFill>
+          <a:ln w="19050">
+            <a:solidFill>
+              <a:srgbClr val="FFA000"/>
+            </a:solidFill>
+            <a:prstDash val="solid"/>
+          </a:ln>
+        </p:spPr>
+      </p:sp>
+      <p:sp>
+        <p:nvSpPr>
+          <p:cNvPr id="6" name="Text 4"/>
+          <p:cNvSpPr/>
+          <p:nvPr/>
+        </p:nvSpPr>
+        <p:spPr>
+          <a:xfrm>
+            <a:off x="822960" y="1234440"/>
+            <a:ext cx="10543032" cy="731520"/>
+          </a:xfrm>
+          <a:prstGeom prst="rect">
+            <a:avLst/>
+          </a:prstGeom>
+          <a:noFill/>
+          <a:ln/>
+        </p:spPr>
+        <p:txBody>
+          <a:bodyPr wrap="square" rtlCol="0" anchor="ctr"/>
+          <a:lstStyle/>
+          <a:p>
+            <a:pPr indent="0" marL="0">
+              <a:buNone/>
+            </a:pPr>
+            <a:r>
+              <a:rPr lang="en-US" sz="1400" dirty="0">
+                <a:solidFill>
+                  <a:srgbClr val="212121"/>
+                </a:solidFill>
+                <a:latin typeface="Arial" pitchFamily="34" charset="0"/>
+                <a:ea typeface="Arial" pitchFamily="34" charset="-122"/>
+                <a:cs typeface="Arial" pitchFamily="34" charset="-120"/>
+              </a:rPr>
+              <a:t>Abrir el puerto 22 a 0.0.0.0/0 es de los errores más buscados por atacantes automatizados, que escanean internet constantemente. Tres formas de organizarlo, de más expuesta a más segura:</a:t>
+            </a:r>
+            <a:endParaRPr lang="en-US" sz="1400" dirty="0"/>
           </a:p>
         </p:txBody>
       </p:sp>
@@ -5402,47 +7449,29 @@
           </p:nvPr>
         </p:nvGraphicFramePr>
         <p:xfrm>
-          <a:off x="548640" y="1097280"/>
-          <a:ext cx="11091672" cy="3474720"/>
+          <a:off x="548640" y="2194560"/>
+          <a:ext cx="11091672" cy="914400"/>
         </p:xfrm>
         <a:graphic>
           <a:graphicData uri="http://schemas.openxmlformats.org/drawingml/2006/table">
             <a:tbl>
               <a:tblPr/>
               <a:tblGrid>
-                <a:gridCol w="3549335">
-                  <a:extLst>
-                    <a:ext uri="{9D8B030D-6E8A-4147-A177-3AD203B41FA5}">
-                      <a16:colId xmlns:a16="http://schemas.microsoft.com/office/drawing/2014/main" val="20000"/>
-                    </a:ext>
-                  </a:extLst>
-                </a:gridCol>
-                <a:gridCol w="4658502">
-                  <a:extLst>
-                    <a:ext uri="{9D8B030D-6E8A-4147-A177-3AD203B41FA5}">
-                      <a16:colId xmlns:a16="http://schemas.microsoft.com/office/drawing/2014/main" val="20001"/>
-                    </a:ext>
-                  </a:extLst>
-                </a:gridCol>
-                <a:gridCol w="2883835">
-                  <a:extLst>
-                    <a:ext uri="{9D8B030D-6E8A-4147-A177-3AD203B41FA5}">
-                      <a16:colId xmlns:a16="http://schemas.microsoft.com/office/drawing/2014/main" val="20002"/>
-                    </a:ext>
-                  </a:extLst>
-                </a:gridCol>
+                <a:gridCol w="3771168"/>
+                <a:gridCol w="4436669"/>
+                <a:gridCol w="2883835"/>
               </a:tblGrid>
-              <a:tr h="868680">
+              <a:tr h="731520">
                 <a:tc>
                   <a:txBody>
                     <a:bodyPr/>
                     <a:lstStyle/>
                     <a:p>
-                      <a:pPr marL="0" indent="0" algn="ctr">
+                      <a:pPr algn="ctr" indent="0" marL="0">
                         <a:buNone/>
                       </a:pPr>
                       <a:r>
-                        <a:rPr lang="en-US" sz="1500" b="1" dirty="0">
+                        <a:rPr lang="en-US" sz="1400" b="1" dirty="0">
                           <a:solidFill>
                             <a:srgbClr val="FFFFFF"/>
                           </a:solidFill>
@@ -5452,14 +7481,14 @@
                         </a:rPr>
                         <a:t>Práctica</a:t>
                       </a:r>
-                      <a:endParaRPr lang="en-US" sz="1500" dirty="0">
+                      <a:endParaRPr lang="en-US" sz="1400" dirty="0">
                         <a:latin typeface="Arial" charset="0"/>
                         <a:ea typeface="Arial" charset="0"/>
                         <a:cs typeface="Arial" charset="0"/>
                       </a:endParaRPr>
                     </a:p>
                   </a:txBody>
-                  <a:tcPr anchor="ctr">
+                  <a:tcPr marL="91440" marR="91440" marT="45720" marB="45720" anchor="ctr">
                     <a:lnL w="12700" cap="flat" cmpd="sng" algn="ctr">
                       <a:solidFill>
                         <a:srgbClr val="EEEEEE"/>
@@ -5506,11 +7535,11 @@
                     <a:bodyPr/>
                     <a:lstStyle/>
                     <a:p>
-                      <a:pPr marL="0" indent="0" algn="ctr">
+                      <a:pPr algn="ctr" indent="0" marL="0">
                         <a:buNone/>
                       </a:pPr>
                       <a:r>
-                        <a:rPr lang="en-US" sz="1500" b="1" dirty="0">
+                        <a:rPr lang="en-US" sz="1400" b="1" dirty="0">
                           <a:solidFill>
                             <a:srgbClr val="FFFFFF"/>
                           </a:solidFill>
@@ -5520,14 +7549,14 @@
                         </a:rPr>
                         <a:t>Qué hace</a:t>
                       </a:r>
-                      <a:endParaRPr lang="en-US" sz="1500" dirty="0">
+                      <a:endParaRPr lang="en-US" sz="1400" dirty="0">
                         <a:latin typeface="Arial" charset="0"/>
                         <a:ea typeface="Arial" charset="0"/>
                         <a:cs typeface="Arial" charset="0"/>
                       </a:endParaRPr>
                     </a:p>
                   </a:txBody>
-                  <a:tcPr anchor="ctr">
+                  <a:tcPr marL="91440" marR="91440" marT="45720" marB="45720" anchor="ctr">
                     <a:lnL w="12700" cap="flat" cmpd="sng" algn="ctr">
                       <a:solidFill>
                         <a:srgbClr val="EEEEEE"/>
@@ -5574,11 +7603,11 @@
                     <a:bodyPr/>
                     <a:lstStyle/>
                     <a:p>
-                      <a:pPr marL="0" indent="0" algn="ctr">
+                      <a:pPr algn="ctr" indent="0" marL="0">
                         <a:buNone/>
                       </a:pPr>
                       <a:r>
-                        <a:rPr lang="en-US" sz="1500" b="1" dirty="0">
+                        <a:rPr lang="en-US" sz="1400" b="1" dirty="0">
                           <a:solidFill>
                             <a:srgbClr val="FFFFFF"/>
                           </a:solidFill>
@@ -5588,14 +7617,14 @@
                         </a:rPr>
                         <a:t>Nivel de exposición</a:t>
                       </a:r>
-                      <a:endParaRPr lang="en-US" sz="1500" dirty="0">
+                      <a:endParaRPr lang="en-US" sz="1400" dirty="0">
                         <a:latin typeface="Arial" charset="0"/>
                         <a:ea typeface="Arial" charset="0"/>
                         <a:cs typeface="Arial" charset="0"/>
                       </a:endParaRPr>
                     </a:p>
                   </a:txBody>
-                  <a:tcPr anchor="ctr">
+                  <a:tcPr marL="91440" marR="91440" marT="45720" marB="45720" anchor="ctr">
                     <a:lnL w="12700" cap="flat" cmpd="sng" algn="ctr">
                       <a:solidFill>
                         <a:srgbClr val="EEEEEE"/>
@@ -5637,23 +7666,18 @@
                     </a:solidFill>
                   </a:tcPr>
                 </a:tc>
-                <a:extLst>
-                  <a:ext uri="{0D108BD9-81ED-4DB2-BD59-A6C34878D82A}">
-                    <a16:rowId xmlns:a16="http://schemas.microsoft.com/office/drawing/2014/main" val="10000"/>
-                  </a:ext>
-                </a:extLst>
               </a:tr>
-              <a:tr h="868680">
+              <a:tr h="731520">
                 <a:tc>
                   <a:txBody>
                     <a:bodyPr/>
                     <a:lstStyle/>
                     <a:p>
-                      <a:pPr marL="0" indent="0">
+                      <a:pPr indent="0" marL="0">
                         <a:buNone/>
                       </a:pPr>
                       <a:r>
-                        <a:rPr lang="en-US" sz="1400" b="1" dirty="0">
+                        <a:rPr lang="en-US" sz="1300" b="1" dirty="0">
                           <a:solidFill>
                             <a:srgbClr val="212121"/>
                           </a:solidFill>
@@ -5663,14 +7687,14 @@
                         </a:rPr>
                         <a:t>SSH abierto a 0.0.0.0/0</a:t>
                       </a:r>
-                      <a:endParaRPr lang="en-US" sz="1400" dirty="0">
+                      <a:endParaRPr lang="en-US" sz="1300" dirty="0">
                         <a:latin typeface="Arial" charset="0"/>
                         <a:ea typeface="Arial" charset="0"/>
                         <a:cs typeface="Arial" charset="0"/>
                       </a:endParaRPr>
                     </a:p>
                   </a:txBody>
-                  <a:tcPr anchor="ctr">
+                  <a:tcPr marL="91440" marR="91440" marT="45720" marB="45720" anchor="ctr">
                     <a:lnL w="12700" cap="flat" cmpd="sng" algn="ctr">
                       <a:solidFill>
                         <a:srgbClr val="EEEEEE"/>
@@ -5717,11 +7741,11 @@
                     <a:bodyPr/>
                     <a:lstStyle/>
                     <a:p>
-                      <a:pPr marL="0" indent="0">
+                      <a:pPr indent="0" marL="0">
                         <a:buNone/>
                       </a:pPr>
                       <a:r>
-                        <a:rPr lang="en-US" sz="1400" dirty="0">
+                        <a:rPr lang="en-US" sz="1300" dirty="0">
                           <a:solidFill>
                             <a:srgbClr val="212121"/>
                           </a:solidFill>
@@ -5729,16 +7753,16 @@
                           <a:ea typeface="Arial" pitchFamily="34" charset="-122"/>
                           <a:cs typeface="Arial" pitchFamily="34" charset="-120"/>
                         </a:rPr>
-                        <a:t>Cualquier IP del planeta puede intentar conectarse</a:t>
+                        <a:t>Cualquier IP del planeta puede intentarlo</a:t>
                       </a:r>
-                      <a:endParaRPr lang="en-US" sz="1400" dirty="0">
+                      <a:endParaRPr lang="en-US" sz="1300" dirty="0">
                         <a:latin typeface="Arial" charset="0"/>
                         <a:ea typeface="Arial" charset="0"/>
                         <a:cs typeface="Arial" charset="0"/>
                       </a:endParaRPr>
                     </a:p>
                   </a:txBody>
-                  <a:tcPr anchor="ctr">
+                  <a:tcPr marL="91440" marR="91440" marT="45720" marB="45720" anchor="ctr">
                     <a:lnL w="12700" cap="flat" cmpd="sng" algn="ctr">
                       <a:solidFill>
                         <a:srgbClr val="EEEEEE"/>
@@ -5785,11 +7809,11 @@
                     <a:bodyPr/>
                     <a:lstStyle/>
                     <a:p>
-                      <a:pPr marL="0" indent="0">
+                      <a:pPr indent="0" marL="0">
                         <a:buNone/>
                       </a:pPr>
                       <a:r>
-                        <a:rPr lang="en-US" sz="1400" dirty="0">
+                        <a:rPr lang="en-US" sz="1300" dirty="0">
                           <a:solidFill>
                             <a:srgbClr val="212121"/>
                           </a:solidFill>
@@ -5799,14 +7823,14 @@
                         </a:rPr>
                         <a:t>Máximo — evítalo siempre</a:t>
                       </a:r>
-                      <a:endParaRPr lang="en-US" sz="1400" dirty="0">
+                      <a:endParaRPr lang="en-US" sz="1300" dirty="0">
                         <a:latin typeface="Arial" charset="0"/>
                         <a:ea typeface="Arial" charset="0"/>
                         <a:cs typeface="Arial" charset="0"/>
                       </a:endParaRPr>
                     </a:p>
                   </a:txBody>
-                  <a:tcPr anchor="ctr">
+                  <a:tcPr marL="91440" marR="91440" marT="45720" marB="45720" anchor="ctr">
                     <a:lnL w="12700" cap="flat" cmpd="sng" algn="ctr">
                       <a:solidFill>
                         <a:srgbClr val="EEEEEE"/>
@@ -5848,23 +7872,18 @@
                     </a:solidFill>
                   </a:tcPr>
                 </a:tc>
-                <a:extLst>
-                  <a:ext uri="{0D108BD9-81ED-4DB2-BD59-A6C34878D82A}">
-                    <a16:rowId xmlns:a16="http://schemas.microsoft.com/office/drawing/2014/main" val="10001"/>
-                  </a:ext>
-                </a:extLst>
               </a:tr>
-              <a:tr h="868680">
+              <a:tr h="731520">
                 <a:tc>
                   <a:txBody>
                     <a:bodyPr/>
                     <a:lstStyle/>
                     <a:p>
-                      <a:pPr marL="0" indent="0">
+                      <a:pPr indent="0" marL="0">
                         <a:buNone/>
                       </a:pPr>
                       <a:r>
-                        <a:rPr lang="en-US" sz="1400" b="1" dirty="0">
+                        <a:rPr lang="en-US" sz="1300" b="1" dirty="0">
                           <a:solidFill>
                             <a:srgbClr val="212121"/>
                           </a:solidFill>
@@ -5874,14 +7893,14 @@
                         </a:rPr>
                         <a:t>SSH restringido a tu IP</a:t>
                       </a:r>
-                      <a:endParaRPr lang="en-US" sz="1400" dirty="0">
+                      <a:endParaRPr lang="en-US" sz="1300" dirty="0">
                         <a:latin typeface="Arial" charset="0"/>
                         <a:ea typeface="Arial" charset="0"/>
                         <a:cs typeface="Arial" charset="0"/>
                       </a:endParaRPr>
                     </a:p>
                   </a:txBody>
-                  <a:tcPr anchor="ctr">
+                  <a:tcPr marL="91440" marR="91440" marT="45720" marB="45720" anchor="ctr">
                     <a:lnL w="12700" cap="flat" cmpd="sng" algn="ctr">
                       <a:solidFill>
                         <a:srgbClr val="EEEEEE"/>
@@ -5928,11 +7947,11 @@
                     <a:bodyPr/>
                     <a:lstStyle/>
                     <a:p>
-                      <a:pPr marL="0" indent="0">
+                      <a:pPr indent="0" marL="0">
                         <a:buNone/>
                       </a:pPr>
                       <a:r>
-                        <a:rPr lang="en-US" sz="1400" dirty="0">
+                        <a:rPr lang="en-US" sz="1300" dirty="0">
                           <a:solidFill>
                             <a:srgbClr val="212121"/>
                           </a:solidFill>
@@ -5942,14 +7961,14 @@
                         </a:rPr>
                         <a:t>Solo tu dirección actual puede conectarse</a:t>
                       </a:r>
-                      <a:endParaRPr lang="en-US" sz="1400" dirty="0">
+                      <a:endParaRPr lang="en-US" sz="1300" dirty="0">
                         <a:latin typeface="Arial" charset="0"/>
                         <a:ea typeface="Arial" charset="0"/>
                         <a:cs typeface="Arial" charset="0"/>
                       </a:endParaRPr>
                     </a:p>
                   </a:txBody>
-                  <a:tcPr anchor="ctr">
+                  <a:tcPr marL="91440" marR="91440" marT="45720" marB="45720" anchor="ctr">
                     <a:lnL w="12700" cap="flat" cmpd="sng" algn="ctr">
                       <a:solidFill>
                         <a:srgbClr val="EEEEEE"/>
@@ -5996,11 +8015,11 @@
                     <a:bodyPr/>
                     <a:lstStyle/>
                     <a:p>
-                      <a:pPr marL="0" indent="0">
+                      <a:pPr indent="0" marL="0">
                         <a:buNone/>
                       </a:pPr>
                       <a:r>
-                        <a:rPr lang="en-US" sz="1400" dirty="0">
+                        <a:rPr lang="en-US" sz="1300" dirty="0">
                           <a:solidFill>
                             <a:srgbClr val="212121"/>
                           </a:solidFill>
@@ -6010,14 +8029,14 @@
                         </a:rPr>
                         <a:t>Bajo, pero cambia si te mueves de red</a:t>
                       </a:r>
-                      <a:endParaRPr lang="en-US" sz="1400" dirty="0">
+                      <a:endParaRPr lang="en-US" sz="1300" dirty="0">
                         <a:latin typeface="Arial" charset="0"/>
                         <a:ea typeface="Arial" charset="0"/>
                         <a:cs typeface="Arial" charset="0"/>
                       </a:endParaRPr>
                     </a:p>
                   </a:txBody>
-                  <a:tcPr anchor="ctr">
+                  <a:tcPr marL="91440" marR="91440" marT="45720" marB="45720" anchor="ctr">
                     <a:lnL w="12700" cap="flat" cmpd="sng" algn="ctr">
                       <a:solidFill>
                         <a:srgbClr val="EEEEEE"/>
@@ -6059,23 +8078,18 @@
                     </a:solidFill>
                   </a:tcPr>
                 </a:tc>
-                <a:extLst>
-                  <a:ext uri="{0D108BD9-81ED-4DB2-BD59-A6C34878D82A}">
-                    <a16:rowId xmlns:a16="http://schemas.microsoft.com/office/drawing/2014/main" val="10002"/>
-                  </a:ext>
-                </a:extLst>
               </a:tr>
-              <a:tr h="868680">
+              <a:tr h="731520">
                 <a:tc>
                   <a:txBody>
                     <a:bodyPr/>
                     <a:lstStyle/>
                     <a:p>
-                      <a:pPr marL="0" indent="0">
+                      <a:pPr indent="0" marL="0">
                         <a:buNone/>
                       </a:pPr>
                       <a:r>
-                        <a:rPr lang="en-US" sz="1400" b="1" dirty="0">
+                        <a:rPr lang="en-US" sz="1300" b="1" dirty="0">
                           <a:solidFill>
                             <a:srgbClr val="212121"/>
                           </a:solidFill>
@@ -6083,16 +8097,16 @@
                           <a:ea typeface="Arial" pitchFamily="34" charset="-122"/>
                           <a:cs typeface="Arial" pitchFamily="34" charset="-120"/>
                         </a:rPr>
-                        <a:t>Instancia sin IP pública, acceso vía intermedia</a:t>
+                        <a:t>Sin IP pública, acceso vía instancia intermedia</a:t>
                       </a:r>
-                      <a:endParaRPr lang="en-US" sz="1400" dirty="0">
+                      <a:endParaRPr lang="en-US" sz="1300" dirty="0">
                         <a:latin typeface="Arial" charset="0"/>
                         <a:ea typeface="Arial" charset="0"/>
                         <a:cs typeface="Arial" charset="0"/>
                       </a:endParaRPr>
                     </a:p>
                   </a:txBody>
-                  <a:tcPr anchor="ctr">
+                  <a:tcPr marL="91440" marR="91440" marT="45720" marB="45720" anchor="ctr">
                     <a:lnL w="12700" cap="flat" cmpd="sng" algn="ctr">
                       <a:solidFill>
                         <a:srgbClr val="EEEEEE"/>
@@ -6139,11 +8153,11 @@
                     <a:bodyPr/>
                     <a:lstStyle/>
                     <a:p>
-                      <a:pPr marL="0" indent="0">
+                      <a:pPr indent="0" marL="0">
                         <a:buNone/>
                       </a:pPr>
                       <a:r>
-                        <a:rPr lang="en-US" sz="1400" dirty="0">
+                        <a:rPr lang="en-US" sz="1300" dirty="0">
                           <a:solidFill>
                             <a:srgbClr val="212121"/>
                           </a:solidFill>
@@ -6153,14 +8167,14 @@
                         </a:rPr>
                         <a:t>La instancia administrada nunca es alcanzable directamente</a:t>
                       </a:r>
-                      <a:endParaRPr lang="en-US" sz="1400" dirty="0">
+                      <a:endParaRPr lang="en-US" sz="1300" dirty="0">
                         <a:latin typeface="Arial" charset="0"/>
                         <a:ea typeface="Arial" charset="0"/>
                         <a:cs typeface="Arial" charset="0"/>
                       </a:endParaRPr>
                     </a:p>
                   </a:txBody>
-                  <a:tcPr anchor="ctr">
+                  <a:tcPr marL="91440" marR="91440" marT="45720" marB="45720" anchor="ctr">
                     <a:lnL w="12700" cap="flat" cmpd="sng" algn="ctr">
                       <a:solidFill>
                         <a:srgbClr val="EEEEEE"/>
@@ -6207,11 +8221,11 @@
                     <a:bodyPr/>
                     <a:lstStyle/>
                     <a:p>
-                      <a:pPr marL="0" indent="0">
+                      <a:pPr indent="0" marL="0">
                         <a:buNone/>
                       </a:pPr>
                       <a:r>
-                        <a:rPr lang="en-US" sz="1400" dirty="0">
+                        <a:rPr lang="en-US" sz="1300" dirty="0">
                           <a:solidFill>
                             <a:srgbClr val="212121"/>
                           </a:solidFill>
@@ -6221,14 +8235,14 @@
                         </a:rPr>
                         <a:t>Mínimo</a:t>
                       </a:r>
-                      <a:endParaRPr lang="en-US" sz="1400" dirty="0">
+                      <a:endParaRPr lang="en-US" sz="1300" dirty="0">
                         <a:latin typeface="Arial" charset="0"/>
                         <a:ea typeface="Arial" charset="0"/>
                         <a:cs typeface="Arial" charset="0"/>
                       </a:endParaRPr>
                     </a:p>
                   </a:txBody>
-                  <a:tcPr anchor="ctr">
+                  <a:tcPr marL="91440" marR="91440" marT="45720" marB="45720" anchor="ctr">
                     <a:lnL w="12700" cap="flat" cmpd="sng" algn="ctr">
                       <a:solidFill>
                         <a:srgbClr val="EEEEEE"/>
@@ -6270,87 +8284,11 @@
                     </a:solidFill>
                   </a:tcPr>
                 </a:tc>
-                <a:extLst>
-                  <a:ext uri="{0D108BD9-81ED-4DB2-BD59-A6C34878D82A}">
-                    <a16:rowId xmlns:a16="http://schemas.microsoft.com/office/drawing/2014/main" val="10003"/>
-                  </a:ext>
-                </a:extLst>
               </a:tr>
             </a:tbl>
           </a:graphicData>
         </a:graphic>
       </p:graphicFrame>
-      <p:sp>
-        <p:nvSpPr>
-          <p:cNvPr id="6" name="Shape 3"/>
-          <p:cNvSpPr/>
-          <p:nvPr/>
-        </p:nvSpPr>
-        <p:spPr>
-          <a:xfrm>
-            <a:off x="548640" y="4800600"/>
-            <a:ext cx="11091672" cy="914400"/>
-          </a:xfrm>
-          <a:prstGeom prst="roundRect">
-            <a:avLst/>
-          </a:prstGeom>
-          <a:solidFill>
-            <a:srgbClr val="FFF8E1"/>
-          </a:solidFill>
-          <a:ln w="19050">
-            <a:solidFill>
-              <a:srgbClr val="FFA000"/>
-            </a:solidFill>
-            <a:prstDash val="solid"/>
-          </a:ln>
-        </p:spPr>
-        <p:txBody>
-          <a:bodyPr/>
-          <a:lstStyle/>
-          <a:p>
-            <a:endParaRPr lang="es-ES"/>
-          </a:p>
-        </p:txBody>
-      </p:sp>
-      <p:sp>
-        <p:nvSpPr>
-          <p:cNvPr id="7" name="Text 4"/>
-          <p:cNvSpPr/>
-          <p:nvPr/>
-        </p:nvSpPr>
-        <p:spPr>
-          <a:xfrm>
-            <a:off x="822960" y="4892040"/>
-            <a:ext cx="10543032" cy="731520"/>
-          </a:xfrm>
-          <a:prstGeom prst="rect">
-            <a:avLst/>
-          </a:prstGeom>
-          <a:noFill/>
-          <a:ln/>
-        </p:spPr>
-        <p:txBody>
-          <a:bodyPr wrap="square" rtlCol="0" anchor="ctr"/>
-          <a:lstStyle/>
-          <a:p>
-            <a:pPr marL="0" indent="0">
-              <a:buNone/>
-            </a:pPr>
-            <a:r>
-              <a:rPr lang="en-US" sz="1700" dirty="0">
-                <a:solidFill>
-                  <a:srgbClr val="212121"/>
-                </a:solidFill>
-                <a:latin typeface="Arial" pitchFamily="34" charset="0"/>
-                <a:ea typeface="Arial" pitchFamily="34" charset="-122"/>
-                <a:cs typeface="Arial" pitchFamily="34" charset="-120"/>
-              </a:rPr>
-              <a:t>Abrir el puerto 22 a 0.0.0.0/0 es de los errores más buscados por atacantes automatizados que escanean internet constantemente.</a:t>
-            </a:r>
-            <a:endParaRPr lang="en-US" sz="1700" dirty="0"/>
-          </a:p>
-        </p:txBody>
-      </p:sp>
     </p:spTree>
   </p:cSld>
   <p:clrMapOvr>
@@ -6652,319 +8590,4 @@
     </a:ext>
   </a:extLst>
 </a:theme>
-</file>
-
-<file path=ppt/theme/theme2.xml><?xml version="1.0" encoding="utf-8"?>
-<a:theme xmlns:a="http://schemas.openxmlformats.org/drawingml/2006/main" name="Tema de Office">
-  <a:themeElements>
-    <a:clrScheme name="Office">
-      <a:dk1>
-        <a:sysClr val="windowText" lastClr="000000"/>
-      </a:dk1>
-      <a:lt1>
-        <a:sysClr val="window" lastClr="FFFFFF"/>
-      </a:lt1>
-      <a:dk2>
-        <a:srgbClr val="0E2841"/>
-      </a:dk2>
-      <a:lt2>
-        <a:srgbClr val="E8E8E8"/>
-      </a:lt2>
-      <a:accent1>
-        <a:srgbClr val="156082"/>
-      </a:accent1>
-      <a:accent2>
-        <a:srgbClr val="E97132"/>
-      </a:accent2>
-      <a:accent3>
-        <a:srgbClr val="196B24"/>
-      </a:accent3>
-      <a:accent4>
-        <a:srgbClr val="0F9ED5"/>
-      </a:accent4>
-      <a:accent5>
-        <a:srgbClr val="A02B93"/>
-      </a:accent5>
-      <a:accent6>
-        <a:srgbClr val="4EA72E"/>
-      </a:accent6>
-      <a:hlink>
-        <a:srgbClr val="467886"/>
-      </a:hlink>
-      <a:folHlink>
-        <a:srgbClr val="96607D"/>
-      </a:folHlink>
-    </a:clrScheme>
-    <a:fontScheme name="Office">
-      <a:majorFont>
-        <a:latin typeface="Aptos Display" panose="02110004020202020204"/>
-        <a:ea typeface=""/>
-        <a:cs typeface=""/>
-        <a:font script="Jpan" typeface="游ゴシック Light"/>
-        <a:font script="Hang" typeface="맑은 고딕"/>
-        <a:font script="Hans" typeface="等线 Light"/>
-        <a:font script="Hant" typeface="新細明體"/>
-        <a:font script="Arab" typeface="Times New Roman"/>
-        <a:font script="Hebr" typeface="Times New Roman"/>
-        <a:font script="Thai" typeface="Angsana New"/>
-        <a:font script="Ethi" typeface="Nyala"/>
-        <a:font script="Beng" typeface="Vrinda"/>
-        <a:font script="Gujr" typeface="Shruti"/>
-        <a:font script="Khmr" typeface="MoolBoran"/>
-        <a:font script="Knda" typeface="Tunga"/>
-        <a:font script="Guru" typeface="Raavi"/>
-        <a:font script="Cans" typeface="Euphemia"/>
-        <a:font script="Cher" typeface="Plantagenet Cherokee"/>
-        <a:font script="Yiii" typeface="Microsoft Yi Baiti"/>
-        <a:font script="Tibt" typeface="Microsoft Himalaya"/>
-        <a:font script="Thaa" typeface="MV Boli"/>
-        <a:font script="Deva" typeface="Mangal"/>
-        <a:font script="Telu" typeface="Gautami"/>
-        <a:font script="Taml" typeface="Latha"/>
-        <a:font script="Syrc" typeface="Estrangelo Edessa"/>
-        <a:font script="Orya" typeface="Kalinga"/>
-        <a:font script="Mlym" typeface="Kartika"/>
-        <a:font script="Laoo" typeface="DokChampa"/>
-        <a:font script="Sinh" typeface="Iskoola Pota"/>
-        <a:font script="Mong" typeface="Mongolian Baiti"/>
-        <a:font script="Viet" typeface="Times New Roman"/>
-        <a:font script="Uigh" typeface="Microsoft Uighur"/>
-        <a:font script="Geor" typeface="Sylfaen"/>
-        <a:font script="Armn" typeface="Arial"/>
-        <a:font script="Bugi" typeface="Leelawadee UI"/>
-        <a:font script="Bopo" typeface="Microsoft JhengHei"/>
-        <a:font script="Java" typeface="Javanese Text"/>
-        <a:font script="Lisu" typeface="Segoe UI"/>
-        <a:font script="Mymr" typeface="Myanmar Text"/>
-        <a:font script="Nkoo" typeface="Ebrima"/>
-        <a:font script="Olck" typeface="Nirmala UI"/>
-        <a:font script="Osma" typeface="Ebrima"/>
-        <a:font script="Phag" typeface="Phagspa"/>
-        <a:font script="Syrn" typeface="Estrangelo Edessa"/>
-        <a:font script="Syrj" typeface="Estrangelo Edessa"/>
-        <a:font script="Syre" typeface="Estrangelo Edessa"/>
-        <a:font script="Sora" typeface="Nirmala UI"/>
-        <a:font script="Tale" typeface="Microsoft Tai Le"/>
-        <a:font script="Talu" typeface="Microsoft New Tai Lue"/>
-        <a:font script="Tfng" typeface="Ebrima"/>
-      </a:majorFont>
-      <a:minorFont>
-        <a:latin typeface="Aptos" panose="02110004020202020204"/>
-        <a:ea typeface=""/>
-        <a:cs typeface=""/>
-        <a:font script="Jpan" typeface="游ゴシック"/>
-        <a:font script="Hang" typeface="맑은 고딕"/>
-        <a:font script="Hans" typeface="等线"/>
-        <a:font script="Hant" typeface="新細明體"/>
-        <a:font script="Arab" typeface="Arial"/>
-        <a:font script="Hebr" typeface="Arial"/>
-        <a:font script="Thai" typeface="Cordia New"/>
-        <a:font script="Ethi" typeface="Nyala"/>
-        <a:font script="Beng" typeface="Vrinda"/>
-        <a:font script="Gujr" typeface="Shruti"/>
-        <a:font script="Khmr" typeface="DaunPenh"/>
-        <a:font script="Knda" typeface="Tunga"/>
-        <a:font script="Guru" typeface="Raavi"/>
-        <a:font script="Cans" typeface="Euphemia"/>
-        <a:font script="Cher" typeface="Plantagenet Cherokee"/>
-        <a:font script="Yiii" typeface="Microsoft Yi Baiti"/>
-        <a:font script="Tibt" typeface="Microsoft Himalaya"/>
-        <a:font script="Thaa" typeface="MV Boli"/>
-        <a:font script="Deva" typeface="Mangal"/>
-        <a:font script="Telu" typeface="Gautami"/>
-        <a:font script="Taml" typeface="Latha"/>
-        <a:font script="Syrc" typeface="Estrangelo Edessa"/>
-        <a:font script="Orya" typeface="Kalinga"/>
-        <a:font script="Mlym" typeface="Kartika"/>
-        <a:font script="Laoo" typeface="DokChampa"/>
-        <a:font script="Sinh" typeface="Iskoola Pota"/>
-        <a:font script="Mong" typeface="Mongolian Baiti"/>
-        <a:font script="Viet" typeface="Arial"/>
-        <a:font script="Uigh" typeface="Microsoft Uighur"/>
-        <a:font script="Geor" typeface="Sylfaen"/>
-        <a:font script="Armn" typeface="Arial"/>
-        <a:font script="Bugi" typeface="Leelawadee UI"/>
-        <a:font script="Bopo" typeface="Microsoft JhengHei"/>
-        <a:font script="Java" typeface="Javanese Text"/>
-        <a:font script="Lisu" typeface="Segoe UI"/>
-        <a:font script="Mymr" typeface="Myanmar Text"/>
-        <a:font script="Nkoo" typeface="Ebrima"/>
-        <a:font script="Olck" typeface="Nirmala UI"/>
-        <a:font script="Osma" typeface="Ebrima"/>
-        <a:font script="Phag" typeface="Phagspa"/>
-        <a:font script="Syrn" typeface="Estrangelo Edessa"/>
-        <a:font script="Syrj" typeface="Estrangelo Edessa"/>
-        <a:font script="Syre" typeface="Estrangelo Edessa"/>
-        <a:font script="Sora" typeface="Nirmala UI"/>
-        <a:font script="Tale" typeface="Microsoft Tai Le"/>
-        <a:font script="Talu" typeface="Microsoft New Tai Lue"/>
-        <a:font script="Tfng" typeface="Ebrima"/>
-      </a:minorFont>
-    </a:fontScheme>
-    <a:fmtScheme name="Office">
-      <a:fillStyleLst>
-        <a:solidFill>
-          <a:schemeClr val="phClr"/>
-        </a:solidFill>
-        <a:gradFill rotWithShape="1">
-          <a:gsLst>
-            <a:gs pos="0">
-              <a:schemeClr val="phClr">
-                <a:lumMod val="110000"/>
-                <a:satMod val="105000"/>
-                <a:tint val="67000"/>
-              </a:schemeClr>
-            </a:gs>
-            <a:gs pos="50000">
-              <a:schemeClr val="phClr">
-                <a:lumMod val="105000"/>
-                <a:satMod val="103000"/>
-                <a:tint val="73000"/>
-              </a:schemeClr>
-            </a:gs>
-            <a:gs pos="100000">
-              <a:schemeClr val="phClr">
-                <a:lumMod val="105000"/>
-                <a:satMod val="109000"/>
-                <a:tint val="81000"/>
-              </a:schemeClr>
-            </a:gs>
-          </a:gsLst>
-          <a:lin ang="5400000" scaled="0"/>
-        </a:gradFill>
-        <a:gradFill rotWithShape="1">
-          <a:gsLst>
-            <a:gs pos="0">
-              <a:schemeClr val="phClr">
-                <a:satMod val="103000"/>
-                <a:lumMod val="102000"/>
-                <a:tint val="94000"/>
-              </a:schemeClr>
-            </a:gs>
-            <a:gs pos="50000">
-              <a:schemeClr val="phClr">
-                <a:satMod val="110000"/>
-                <a:lumMod val="100000"/>
-                <a:shade val="100000"/>
-              </a:schemeClr>
-            </a:gs>
-            <a:gs pos="100000">
-              <a:schemeClr val="phClr">
-                <a:lumMod val="99000"/>
-                <a:satMod val="120000"/>
-                <a:shade val="78000"/>
-              </a:schemeClr>
-            </a:gs>
-          </a:gsLst>
-          <a:lin ang="5400000" scaled="0"/>
-        </a:gradFill>
-      </a:fillStyleLst>
-      <a:lnStyleLst>
-        <a:ln w="12700" cap="flat" cmpd="sng" algn="ctr">
-          <a:solidFill>
-            <a:schemeClr val="phClr"/>
-          </a:solidFill>
-          <a:prstDash val="solid"/>
-          <a:miter lim="800000"/>
-        </a:ln>
-        <a:ln w="19050" cap="flat" cmpd="sng" algn="ctr">
-          <a:solidFill>
-            <a:schemeClr val="phClr"/>
-          </a:solidFill>
-          <a:prstDash val="solid"/>
-          <a:miter lim="800000"/>
-        </a:ln>
-        <a:ln w="25400" cap="flat" cmpd="sng" algn="ctr">
-          <a:solidFill>
-            <a:schemeClr val="phClr"/>
-          </a:solidFill>
-          <a:prstDash val="solid"/>
-          <a:miter lim="800000"/>
-        </a:ln>
-      </a:lnStyleLst>
-      <a:effectStyleLst>
-        <a:effectStyle>
-          <a:effectLst/>
-        </a:effectStyle>
-        <a:effectStyle>
-          <a:effectLst/>
-        </a:effectStyle>
-        <a:effectStyle>
-          <a:effectLst>
-            <a:outerShdw blurRad="57150" dist="19050" dir="5400000" algn="ctr" rotWithShape="0">
-              <a:srgbClr val="000000">
-                <a:alpha val="63000"/>
-              </a:srgbClr>
-            </a:outerShdw>
-          </a:effectLst>
-        </a:effectStyle>
-      </a:effectStyleLst>
-      <a:bgFillStyleLst>
-        <a:solidFill>
-          <a:schemeClr val="phClr"/>
-        </a:solidFill>
-        <a:solidFill>
-          <a:schemeClr val="phClr">
-            <a:tint val="95000"/>
-            <a:satMod val="170000"/>
-          </a:schemeClr>
-        </a:solidFill>
-        <a:gradFill rotWithShape="1">
-          <a:gsLst>
-            <a:gs pos="0">
-              <a:schemeClr val="phClr">
-                <a:tint val="93000"/>
-                <a:satMod val="150000"/>
-                <a:shade val="98000"/>
-                <a:lumMod val="102000"/>
-              </a:schemeClr>
-            </a:gs>
-            <a:gs pos="50000">
-              <a:schemeClr val="phClr">
-                <a:tint val="98000"/>
-                <a:satMod val="130000"/>
-                <a:shade val="90000"/>
-                <a:lumMod val="103000"/>
-              </a:schemeClr>
-            </a:gs>
-            <a:gs pos="100000">
-              <a:schemeClr val="phClr">
-                <a:shade val="63000"/>
-                <a:satMod val="120000"/>
-              </a:schemeClr>
-            </a:gs>
-          </a:gsLst>
-          <a:lin ang="5400000" scaled="0"/>
-        </a:gradFill>
-      </a:bgFillStyleLst>
-    </a:fmtScheme>
-  </a:themeElements>
-  <a:objectDefaults>
-    <a:lnDef>
-      <a:spPr/>
-      <a:bodyPr/>
-      <a:lstStyle/>
-      <a:style>
-        <a:lnRef idx="2">
-          <a:schemeClr val="accent1"/>
-        </a:lnRef>
-        <a:fillRef idx="0">
-          <a:schemeClr val="accent1"/>
-        </a:fillRef>
-        <a:effectRef idx="1">
-          <a:schemeClr val="accent1"/>
-        </a:effectRef>
-        <a:fontRef idx="minor">
-          <a:schemeClr val="tx1"/>
-        </a:fontRef>
-      </a:style>
-    </a:lnDef>
-  </a:objectDefaults>
-  <a:extraClrSchemeLst/>
-  <a:extLst>
-    <a:ext uri="{05A4C25C-085E-4340-85A3-A5531E510DB2}">
-      <thm15:themeFamily xmlns:thm15="http://schemas.microsoft.com/office/thememl/2012/main" name="Office Theme" id="{2E142A2C-CD16-42D6-873A-C26D2A0506FA}" vid="{1BDDFF52-6CD6-40A5-AB3C-68EB2F1E4D0A}"/>
-    </a:ext>
-  </a:extLst>
-</a:theme>
 </file>